--- a/public/fun/pack/pptx/review/보장점검양식_38_가족점검_군고구마골목.pptx
+++ b/public/fun/pack/pptx/review/보장점검양식_38_가족점검_군고구마골목.pptx
@@ -3286,14 +3286,6 @@
 <file path=ppt/slides/slide1.xml><?xml version="1.0" encoding="utf-8"?>
 <p:sld xmlns:a="http://schemas.openxmlformats.org/drawingml/2006/main" xmlns:p="http://schemas.openxmlformats.org/presentationml/2006/main" xmlns:r="http://schemas.openxmlformats.org/officeDocument/2006/relationships">
   <p:cSld>
-    <p:bg>
-      <p:bgPr>
-        <a:solidFill>
-          <a:srgbClr val="FBF3EF"/>
-        </a:solidFill>
-        <a:effectLst/>
-      </p:bgPr>
-    </p:bg>
     <p:spTree>
       <p:nvGrpSpPr>
         <p:cNvPr id="1" name=""/>
@@ -3301,383 +3293,30 @@
         <p:nvPr/>
       </p:nvGrpSpPr>
       <p:grpSpPr/>
-      <p:sp>
-        <p:nvSpPr>
-          <p:cNvPr id="3" name="장식"/>
-          <p:cNvSpPr/>
+      <p:pic>
+        <p:nvPicPr>
+          <p:cNvPr id="3" name="표지 그림" descr="review-38.jpg"/>
+          <p:cNvPicPr>
+            <a:picLocks noChangeAspect="1"/>
+          </p:cNvPicPr>
           <p:nvPr/>
-        </p:nvSpPr>
-        <p:spPr>
-          <a:xfrm>
-            <a:off x="274320" y="274320"/>
-            <a:ext cx="11643055" cy="6309360"/>
+        </p:nvPicPr>
+        <p:blipFill>
+          <a:blip r:embed="rId2"/>
+          <a:stretch>
+            <a:fillRect/>
+          </a:stretch>
+        </p:blipFill>
+        <p:spPr>
+          <a:xfrm>
+            <a:off x="0" y="0"/>
+            <a:ext cx="12191695" cy="6858000"/>
           </a:xfrm>
           <a:prstGeom prst="rect">
             <a:avLst/>
           </a:prstGeom>
-          <a:noFill/>
-          <a:ln w="38100">
-            <a:solidFill>
-              <a:srgbClr val="995229"/>
-            </a:solidFill>
-          </a:ln>
-        </p:spPr>
-        <p:txBody>
-          <a:bodyPr rtlCol="0" anchor="ctr"/>
-          <a:lstStyle/>
-          <a:p>
-            <a:pPr algn="ctr"/>
-          </a:p>
-        </p:txBody>
-      </p:sp>
-      <p:sp>
-        <p:nvSpPr>
-          <p:cNvPr id="4" name="장식"/>
-          <p:cNvSpPr/>
-          <p:nvPr/>
-        </p:nvSpPr>
-        <p:spPr>
-          <a:xfrm>
-            <a:off x="457200" y="457200"/>
-            <a:ext cx="11277295" cy="5943600"/>
-          </a:xfrm>
-          <a:prstGeom prst="rect">
-            <a:avLst/>
-          </a:prstGeom>
-          <a:noFill/>
-          <a:ln w="12700">
-            <a:solidFill>
-              <a:srgbClr val="F4DBCD"/>
-            </a:solidFill>
-          </a:ln>
-        </p:spPr>
-        <p:txBody>
-          <a:bodyPr rtlCol="0" anchor="ctr"/>
-          <a:lstStyle/>
-          <a:p>
-            <a:pPr algn="ctr"/>
-          </a:p>
-        </p:txBody>
-      </p:sp>
-      <p:sp>
-        <p:nvSpPr>
-          <p:cNvPr id="5" name="장식"/>
-          <p:cNvSpPr/>
-          <p:nvPr/>
-        </p:nvSpPr>
-        <p:spPr>
-          <a:xfrm>
-            <a:off x="5854364" y="780551"/>
-            <a:ext cx="333470" cy="333470"/>
-          </a:xfrm>
-          <a:prstGeom prst="ellipse">
-            <a:avLst/>
-          </a:prstGeom>
-          <a:solidFill>
-            <a:srgbClr val="995229"/>
-          </a:solidFill>
-          <a:ln>
-            <a:noFill/>
-          </a:ln>
-        </p:spPr>
-        <p:txBody>
-          <a:bodyPr rtlCol="0" anchor="ctr"/>
-          <a:lstStyle/>
-          <a:p>
-            <a:pPr algn="ctr"/>
-          </a:p>
-        </p:txBody>
-      </p:sp>
-      <p:sp>
-        <p:nvSpPr>
-          <p:cNvPr id="6" name="장식"/>
-          <p:cNvSpPr/>
-          <p:nvPr/>
-        </p:nvSpPr>
-        <p:spPr>
-          <a:xfrm>
-            <a:off x="6892061" y="1623191"/>
-            <a:ext cx="200163" cy="200163"/>
-          </a:xfrm>
-          <a:prstGeom prst="ellipse">
-            <a:avLst/>
-          </a:prstGeom>
-          <a:solidFill>
-            <a:srgbClr val="F4DBCD"/>
-          </a:solidFill>
-          <a:ln>
-            <a:noFill/>
-          </a:ln>
-        </p:spPr>
-        <p:txBody>
-          <a:bodyPr rtlCol="0" anchor="ctr"/>
-          <a:lstStyle/>
-          <a:p>
-            <a:pPr algn="ctr"/>
-          </a:p>
-        </p:txBody>
-      </p:sp>
-      <p:sp>
-        <p:nvSpPr>
-          <p:cNvPr id="7" name="장식"/>
-          <p:cNvSpPr/>
-          <p:nvPr/>
-        </p:nvSpPr>
-        <p:spPr>
-          <a:xfrm>
-            <a:off x="5120089" y="1161505"/>
-            <a:ext cx="263527" cy="263527"/>
-          </a:xfrm>
-          <a:prstGeom prst="ellipse">
-            <a:avLst/>
-          </a:prstGeom>
-          <a:solidFill>
-            <a:srgbClr val="3B9185"/>
-          </a:solidFill>
-          <a:ln>
-            <a:noFill/>
-          </a:ln>
-        </p:spPr>
-        <p:txBody>
-          <a:bodyPr rtlCol="0" anchor="ctr"/>
-          <a:lstStyle/>
-          <a:p>
-            <a:pPr algn="ctr"/>
-          </a:p>
-        </p:txBody>
-      </p:sp>
-      <p:sp>
-        <p:nvSpPr>
-          <p:cNvPr id="8" name="장식"/>
-          <p:cNvSpPr/>
-          <p:nvPr/>
-        </p:nvSpPr>
-        <p:spPr>
-          <a:xfrm>
-            <a:off x="6364859" y="758859"/>
-            <a:ext cx="216496" cy="216496"/>
-          </a:xfrm>
-          <a:prstGeom prst="ellipse">
-            <a:avLst/>
-          </a:prstGeom>
-          <a:solidFill>
-            <a:srgbClr val="995229"/>
-          </a:solidFill>
-          <a:ln>
-            <a:noFill/>
-          </a:ln>
-        </p:spPr>
-        <p:txBody>
-          <a:bodyPr rtlCol="0" anchor="ctr"/>
-          <a:lstStyle/>
-          <a:p>
-            <a:pPr algn="ctr"/>
-          </a:p>
-        </p:txBody>
-      </p:sp>
-      <p:sp>
-        <p:nvSpPr>
-          <p:cNvPr id="9" name="장식"/>
-          <p:cNvSpPr/>
-          <p:nvPr/>
-        </p:nvSpPr>
-        <p:spPr>
-          <a:xfrm>
-            <a:off x="6068545" y="360190"/>
-            <a:ext cx="334832" cy="334832"/>
-          </a:xfrm>
-          <a:prstGeom prst="ellipse">
-            <a:avLst/>
-          </a:prstGeom>
-          <a:solidFill>
-            <a:srgbClr val="F4DBCD"/>
-          </a:solidFill>
-          <a:ln>
-            <a:noFill/>
-          </a:ln>
-        </p:spPr>
-        <p:txBody>
-          <a:bodyPr rtlCol="0" anchor="ctr"/>
-          <a:lstStyle/>
-          <a:p>
-            <a:pPr algn="ctr"/>
-          </a:p>
-        </p:txBody>
-      </p:sp>
-      <p:sp>
-        <p:nvSpPr>
-          <p:cNvPr id="10" name="장식"/>
-          <p:cNvSpPr/>
-          <p:nvPr/>
-        </p:nvSpPr>
-        <p:spPr>
-          <a:xfrm>
-            <a:off x="5437401" y="825259"/>
-            <a:ext cx="143688" cy="143688"/>
-          </a:xfrm>
-          <a:prstGeom prst="ellipse">
-            <a:avLst/>
-          </a:prstGeom>
-          <a:solidFill>
-            <a:srgbClr val="3B9185"/>
-          </a:solidFill>
-          <a:ln>
-            <a:noFill/>
-          </a:ln>
-        </p:spPr>
-        <p:txBody>
-          <a:bodyPr rtlCol="0" anchor="ctr"/>
-          <a:lstStyle/>
-          <a:p>
-            <a:pPr algn="ctr"/>
-          </a:p>
-        </p:txBody>
-      </p:sp>
-      <p:sp>
-        <p:nvSpPr>
-          <p:cNvPr id="11" name="장식"/>
-          <p:cNvSpPr/>
-          <p:nvPr/>
-        </p:nvSpPr>
-        <p:spPr>
-          <a:xfrm>
-            <a:off x="6550618" y="2104327"/>
-            <a:ext cx="285402" cy="285402"/>
-          </a:xfrm>
-          <a:prstGeom prst="ellipse">
-            <a:avLst/>
-          </a:prstGeom>
-          <a:solidFill>
-            <a:srgbClr val="995229"/>
-          </a:solidFill>
-          <a:ln>
-            <a:noFill/>
-          </a:ln>
-        </p:spPr>
-        <p:txBody>
-          <a:bodyPr rtlCol="0" anchor="ctr"/>
-          <a:lstStyle/>
-          <a:p>
-            <a:pPr algn="ctr"/>
-          </a:p>
-        </p:txBody>
-      </p:sp>
-      <p:sp>
-        <p:nvSpPr>
-          <p:cNvPr id="12" name="장식"/>
-          <p:cNvSpPr/>
-          <p:nvPr/>
-        </p:nvSpPr>
-        <p:spPr>
-          <a:xfrm>
-            <a:off x="6115670" y="917740"/>
-            <a:ext cx="267797" cy="267797"/>
-          </a:xfrm>
-          <a:prstGeom prst="ellipse">
-            <a:avLst/>
-          </a:prstGeom>
-          <a:solidFill>
-            <a:srgbClr val="F4DBCD"/>
-          </a:solidFill>
-          <a:ln>
-            <a:noFill/>
-          </a:ln>
-        </p:spPr>
-        <p:txBody>
-          <a:bodyPr rtlCol="0" anchor="ctr"/>
-          <a:lstStyle/>
-          <a:p>
-            <a:pPr algn="ctr"/>
-          </a:p>
-        </p:txBody>
-      </p:sp>
-      <p:sp>
-        <p:nvSpPr>
-          <p:cNvPr id="13" name="장식"/>
-          <p:cNvSpPr/>
-          <p:nvPr/>
-        </p:nvSpPr>
-        <p:spPr>
-          <a:xfrm>
-            <a:off x="6642241" y="1444838"/>
-            <a:ext cx="284342" cy="284342"/>
-          </a:xfrm>
-          <a:prstGeom prst="ellipse">
-            <a:avLst/>
-          </a:prstGeom>
-          <a:solidFill>
-            <a:srgbClr val="3B9185"/>
-          </a:solidFill>
-          <a:ln>
-            <a:noFill/>
-          </a:ln>
-        </p:spPr>
-        <p:txBody>
-          <a:bodyPr rtlCol="0" anchor="ctr"/>
-          <a:lstStyle/>
-          <a:p>
-            <a:pPr algn="ctr"/>
-          </a:p>
-        </p:txBody>
-      </p:sp>
-      <p:sp>
-        <p:nvSpPr>
-          <p:cNvPr id="14" name="장식"/>
-          <p:cNvSpPr/>
-          <p:nvPr/>
-        </p:nvSpPr>
-        <p:spPr>
-          <a:xfrm>
-            <a:off x="5561757" y="750724"/>
-            <a:ext cx="180660" cy="180660"/>
-          </a:xfrm>
-          <a:prstGeom prst="ellipse">
-            <a:avLst/>
-          </a:prstGeom>
-          <a:solidFill>
-            <a:srgbClr val="995229"/>
-          </a:solidFill>
-          <a:ln>
-            <a:noFill/>
-          </a:ln>
-        </p:spPr>
-        <p:txBody>
-          <a:bodyPr rtlCol="0" anchor="ctr"/>
-          <a:lstStyle/>
-          <a:p>
-            <a:pPr algn="ctr"/>
-          </a:p>
-        </p:txBody>
-      </p:sp>
-      <p:sp>
-        <p:nvSpPr>
-          <p:cNvPr id="15" name="장식"/>
-          <p:cNvSpPr/>
-          <p:nvPr/>
-        </p:nvSpPr>
-        <p:spPr>
-          <a:xfrm>
-            <a:off x="5279103" y="941758"/>
-            <a:ext cx="124614" cy="124614"/>
-          </a:xfrm>
-          <a:prstGeom prst="ellipse">
-            <a:avLst/>
-          </a:prstGeom>
-          <a:solidFill>
-            <a:srgbClr val="F4DBCD"/>
-          </a:solidFill>
-          <a:ln>
-            <a:noFill/>
-          </a:ln>
-        </p:spPr>
-        <p:txBody>
-          <a:bodyPr rtlCol="0" anchor="ctr"/>
-          <a:lstStyle/>
-          <a:p>
-            <a:pPr algn="ctr"/>
-          </a:p>
-        </p:txBody>
-      </p:sp>
+        </p:spPr>
+      </p:pic>
       <p:sp>
         <p:nvSpPr>
           <p:cNvPr id="2" name="Title 1"/>
@@ -3690,8 +3329,8 @@
         </p:nvSpPr>
         <p:spPr>
           <a:xfrm>
-            <a:off x="1463003" y="2331720"/>
-            <a:ext cx="9265688" cy="1371600"/>
+            <a:off x="853418" y="2057400"/>
+            <a:ext cx="6095847" cy="1554480"/>
           </a:xfrm>
         </p:spPr>
         <p:txBody>
@@ -3700,7 +3339,7 @@
           </a:bodyPr>
           <a:lstStyle/>
           <a:p>
-            <a:pPr algn="ctr">
+            <a:pPr algn="l">
               <a:lnSpc>
                 <a:spcPct val="105000"/>
               </a:lnSpc>
@@ -3718,14 +3357,14 @@
       </p:sp>
       <p:sp>
         <p:nvSpPr>
-          <p:cNvPr id="16" name="한 줄 문구"/>
+          <p:cNvPr id="4" name="한 줄 문구"/>
           <p:cNvSpPr txBox="1"/>
           <p:nvPr/>
         </p:nvSpPr>
         <p:spPr>
           <a:xfrm>
-            <a:off x="1463003" y="3794760"/>
-            <a:ext cx="9265688" cy="822960"/>
+            <a:off x="853418" y="3749039"/>
+            <a:ext cx="6095847" cy="822960"/>
           </a:xfrm>
           <a:prstGeom prst="rect">
             <a:avLst/>
@@ -3738,7 +3377,7 @@
           </a:bodyPr>
           <a:lstStyle/>
           <a:p>
-            <a:pPr algn="ctr">
+            <a:pPr algn="l">
               <a:lnSpc>
                 <a:spcPct val="115000"/>
               </a:lnSpc>
@@ -3749,21 +3388,21 @@
                   <a:srgbClr val="492713"/>
                 </a:solidFill>
               </a:rPr>
-              <a:t>따끈한 차 한 잔과 가족 회의</a:t>
+              <a:t>명절에 모였을 때 같이 봅니다</a:t>
             </a:r>
           </a:p>
         </p:txBody>
       </p:sp>
       <p:sp>
         <p:nvSpPr>
-          <p:cNvPr id="17" name="안내 문구"/>
+          <p:cNvPr id="5" name="안내 문구"/>
           <p:cNvSpPr txBox="1"/>
           <p:nvPr/>
         </p:nvSpPr>
         <p:spPr>
           <a:xfrm>
-            <a:off x="1463003" y="4663440"/>
-            <a:ext cx="9265688" cy="914400"/>
+            <a:off x="853418" y="4617720"/>
+            <a:ext cx="6095847" cy="914400"/>
           </a:xfrm>
           <a:prstGeom prst="rect">
             <a:avLst/>
@@ -3776,7 +3415,7 @@
           </a:bodyPr>
           <a:lstStyle/>
           <a:p>
-            <a:pPr algn="ctr">
+            <a:pPr algn="l">
               <a:lnSpc>
                 <a:spcPct val="115000"/>
               </a:lnSpc>
@@ -3787,11 +3426,11 @@
                   <a:srgbClr val="666666"/>
                 </a:solidFill>
               </a:rPr>
-              <a:t>가족 점검 · 2026. 00. 00</a:t>
+              <a:t>가족 점검 · 2027. 00. 00</a:t>
             </a:r>
           </a:p>
           <a:p>
-            <a:pPr algn="ctr">
+            <a:pPr algn="l">
               <a:lnSpc>
                 <a:spcPct val="115000"/>
               </a:lnSpc>
@@ -3893,325 +3532,6 @@
       </p:sp>
       <p:sp>
         <p:nvSpPr>
-          <p:cNvPr id="5" name="장식"/>
-          <p:cNvSpPr/>
-          <p:nvPr/>
-        </p:nvSpPr>
-        <p:spPr>
-          <a:xfrm>
-            <a:off x="10914538" y="631759"/>
-            <a:ext cx="185261" cy="185261"/>
-          </a:xfrm>
-          <a:prstGeom prst="ellipse">
-            <a:avLst/>
-          </a:prstGeom>
-          <a:solidFill>
-            <a:srgbClr val="995229"/>
-          </a:solidFill>
-          <a:ln>
-            <a:noFill/>
-          </a:ln>
-        </p:spPr>
-        <p:txBody>
-          <a:bodyPr rtlCol="0" anchor="ctr"/>
-          <a:lstStyle/>
-          <a:p>
-            <a:pPr algn="ctr"/>
-          </a:p>
-        </p:txBody>
-      </p:sp>
-      <p:sp>
-        <p:nvSpPr>
-          <p:cNvPr id="6" name="장식"/>
-          <p:cNvSpPr/>
-          <p:nvPr/>
-        </p:nvSpPr>
-        <p:spPr>
-          <a:xfrm>
-            <a:off x="11491036" y="1099893"/>
-            <a:ext cx="111201" cy="111201"/>
-          </a:xfrm>
-          <a:prstGeom prst="ellipse">
-            <a:avLst/>
-          </a:prstGeom>
-          <a:solidFill>
-            <a:srgbClr val="F4DBCD"/>
-          </a:solidFill>
-          <a:ln>
-            <a:noFill/>
-          </a:ln>
-        </p:spPr>
-        <p:txBody>
-          <a:bodyPr rtlCol="0" anchor="ctr"/>
-          <a:lstStyle/>
-          <a:p>
-            <a:pPr algn="ctr"/>
-          </a:p>
-        </p:txBody>
-      </p:sp>
-      <p:sp>
-        <p:nvSpPr>
-          <p:cNvPr id="7" name="장식"/>
-          <p:cNvSpPr/>
-          <p:nvPr/>
-        </p:nvSpPr>
-        <p:spPr>
-          <a:xfrm>
-            <a:off x="10506607" y="843400"/>
-            <a:ext cx="146404" cy="146404"/>
-          </a:xfrm>
-          <a:prstGeom prst="ellipse">
-            <a:avLst/>
-          </a:prstGeom>
-          <a:solidFill>
-            <a:srgbClr val="3B9185"/>
-          </a:solidFill>
-          <a:ln>
-            <a:noFill/>
-          </a:ln>
-        </p:spPr>
-        <p:txBody>
-          <a:bodyPr rtlCol="0" anchor="ctr"/>
-          <a:lstStyle/>
-          <a:p>
-            <a:pPr algn="ctr"/>
-          </a:p>
-        </p:txBody>
-      </p:sp>
-      <p:sp>
-        <p:nvSpPr>
-          <p:cNvPr id="8" name="장식"/>
-          <p:cNvSpPr/>
-          <p:nvPr/>
-        </p:nvSpPr>
-        <p:spPr>
-          <a:xfrm>
-            <a:off x="11198146" y="619708"/>
-            <a:ext cx="120275" cy="120275"/>
-          </a:xfrm>
-          <a:prstGeom prst="ellipse">
-            <a:avLst/>
-          </a:prstGeom>
-          <a:solidFill>
-            <a:srgbClr val="995229"/>
-          </a:solidFill>
-          <a:ln>
-            <a:noFill/>
-          </a:ln>
-        </p:spPr>
-        <p:txBody>
-          <a:bodyPr rtlCol="0" anchor="ctr"/>
-          <a:lstStyle/>
-          <a:p>
-            <a:pPr algn="ctr"/>
-          </a:p>
-        </p:txBody>
-      </p:sp>
-      <p:sp>
-        <p:nvSpPr>
-          <p:cNvPr id="9" name="장식"/>
-          <p:cNvSpPr/>
-          <p:nvPr/>
-        </p:nvSpPr>
-        <p:spPr>
-          <a:xfrm>
-            <a:off x="11033527" y="398225"/>
-            <a:ext cx="186017" cy="186017"/>
-          </a:xfrm>
-          <a:prstGeom prst="ellipse">
-            <a:avLst/>
-          </a:prstGeom>
-          <a:solidFill>
-            <a:srgbClr val="F4DBCD"/>
-          </a:solidFill>
-          <a:ln>
-            <a:noFill/>
-          </a:ln>
-        </p:spPr>
-        <p:txBody>
-          <a:bodyPr rtlCol="0" anchor="ctr"/>
-          <a:lstStyle/>
-          <a:p>
-            <a:pPr algn="ctr"/>
-          </a:p>
-        </p:txBody>
-      </p:sp>
-      <p:sp>
-        <p:nvSpPr>
-          <p:cNvPr id="10" name="장식"/>
-          <p:cNvSpPr/>
-          <p:nvPr/>
-        </p:nvSpPr>
-        <p:spPr>
-          <a:xfrm>
-            <a:off x="10682891" y="656597"/>
-            <a:ext cx="79826" cy="79826"/>
-          </a:xfrm>
-          <a:prstGeom prst="ellipse">
-            <a:avLst/>
-          </a:prstGeom>
-          <a:solidFill>
-            <a:srgbClr val="3B9185"/>
-          </a:solidFill>
-          <a:ln>
-            <a:noFill/>
-          </a:ln>
-        </p:spPr>
-        <p:txBody>
-          <a:bodyPr rtlCol="0" anchor="ctr"/>
-          <a:lstStyle/>
-          <a:p>
-            <a:pPr algn="ctr"/>
-          </a:p>
-        </p:txBody>
-      </p:sp>
-      <p:sp>
-        <p:nvSpPr>
-          <p:cNvPr id="11" name="장식"/>
-          <p:cNvSpPr/>
-          <p:nvPr/>
-        </p:nvSpPr>
-        <p:spPr>
-          <a:xfrm>
-            <a:off x="11301345" y="1367190"/>
-            <a:ext cx="158557" cy="158557"/>
-          </a:xfrm>
-          <a:prstGeom prst="ellipse">
-            <a:avLst/>
-          </a:prstGeom>
-          <a:solidFill>
-            <a:srgbClr val="995229"/>
-          </a:solidFill>
-          <a:ln>
-            <a:noFill/>
-          </a:ln>
-        </p:spPr>
-        <p:txBody>
-          <a:bodyPr rtlCol="0" anchor="ctr"/>
-          <a:lstStyle/>
-          <a:p>
-            <a:pPr algn="ctr"/>
-          </a:p>
-        </p:txBody>
-      </p:sp>
-      <p:sp>
-        <p:nvSpPr>
-          <p:cNvPr id="12" name="장식"/>
-          <p:cNvSpPr/>
-          <p:nvPr/>
-        </p:nvSpPr>
-        <p:spPr>
-          <a:xfrm>
-            <a:off x="11059707" y="707976"/>
-            <a:ext cx="148776" cy="148776"/>
-          </a:xfrm>
-          <a:prstGeom prst="ellipse">
-            <a:avLst/>
-          </a:prstGeom>
-          <a:solidFill>
-            <a:srgbClr val="F4DBCD"/>
-          </a:solidFill>
-          <a:ln>
-            <a:noFill/>
-          </a:ln>
-        </p:spPr>
-        <p:txBody>
-          <a:bodyPr rtlCol="0" anchor="ctr"/>
-          <a:lstStyle/>
-          <a:p>
-            <a:pPr algn="ctr"/>
-          </a:p>
-        </p:txBody>
-      </p:sp>
-      <p:sp>
-        <p:nvSpPr>
-          <p:cNvPr id="13" name="장식"/>
-          <p:cNvSpPr/>
-          <p:nvPr/>
-        </p:nvSpPr>
-        <p:spPr>
-          <a:xfrm>
-            <a:off x="11352247" y="1000807"/>
-            <a:ext cx="157967" cy="157967"/>
-          </a:xfrm>
-          <a:prstGeom prst="ellipse">
-            <a:avLst/>
-          </a:prstGeom>
-          <a:solidFill>
-            <a:srgbClr val="3B9185"/>
-          </a:solidFill>
-          <a:ln>
-            <a:noFill/>
-          </a:ln>
-        </p:spPr>
-        <p:txBody>
-          <a:bodyPr rtlCol="0" anchor="ctr"/>
-          <a:lstStyle/>
-          <a:p>
-            <a:pPr algn="ctr"/>
-          </a:p>
-        </p:txBody>
-      </p:sp>
-      <p:sp>
-        <p:nvSpPr>
-          <p:cNvPr id="14" name="장식"/>
-          <p:cNvSpPr/>
-          <p:nvPr/>
-        </p:nvSpPr>
-        <p:spPr>
-          <a:xfrm>
-            <a:off x="10751978" y="615189"/>
-            <a:ext cx="100367" cy="100367"/>
-          </a:xfrm>
-          <a:prstGeom prst="ellipse">
-            <a:avLst/>
-          </a:prstGeom>
-          <a:solidFill>
-            <a:srgbClr val="995229"/>
-          </a:solidFill>
-          <a:ln>
-            <a:noFill/>
-          </a:ln>
-        </p:spPr>
-        <p:txBody>
-          <a:bodyPr rtlCol="0" anchor="ctr"/>
-          <a:lstStyle/>
-          <a:p>
-            <a:pPr algn="ctr"/>
-          </a:p>
-        </p:txBody>
-      </p:sp>
-      <p:sp>
-        <p:nvSpPr>
-          <p:cNvPr id="15" name="장식"/>
-          <p:cNvSpPr/>
-          <p:nvPr/>
-        </p:nvSpPr>
-        <p:spPr>
-          <a:xfrm>
-            <a:off x="10594948" y="721318"/>
-            <a:ext cx="69230" cy="69230"/>
-          </a:xfrm>
-          <a:prstGeom prst="ellipse">
-            <a:avLst/>
-          </a:prstGeom>
-          <a:solidFill>
-            <a:srgbClr val="F4DBCD"/>
-          </a:solidFill>
-          <a:ln>
-            <a:noFill/>
-          </a:ln>
-        </p:spPr>
-        <p:txBody>
-          <a:bodyPr rtlCol="0" anchor="ctr"/>
-          <a:lstStyle/>
-          <a:p>
-            <a:pPr algn="ctr"/>
-          </a:p>
-        </p:txBody>
-      </p:sp>
-      <p:sp>
-        <p:nvSpPr>
           <p:cNvPr id="2" name="Title 1"/>
           <p:cNvSpPr>
             <a:spLocks noGrp="1"/>
@@ -4250,7 +3570,7 @@
       </p:sp>
       <p:graphicFrame>
         <p:nvGraphicFramePr>
-          <p:cNvPr id="16" name="표"/>
+          <p:cNvPr id="5" name="표"/>
           <p:cNvGraphicFramePr>
             <a:graphicFrameLocks noGrp="1"/>
           </p:cNvGraphicFramePr>
@@ -5292,325 +4612,6 @@
       </p:sp>
       <p:sp>
         <p:nvSpPr>
-          <p:cNvPr id="5" name="장식"/>
-          <p:cNvSpPr/>
-          <p:nvPr/>
-        </p:nvSpPr>
-        <p:spPr>
-          <a:xfrm>
-            <a:off x="10914538" y="631759"/>
-            <a:ext cx="185261" cy="185261"/>
-          </a:xfrm>
-          <a:prstGeom prst="ellipse">
-            <a:avLst/>
-          </a:prstGeom>
-          <a:solidFill>
-            <a:srgbClr val="995229"/>
-          </a:solidFill>
-          <a:ln>
-            <a:noFill/>
-          </a:ln>
-        </p:spPr>
-        <p:txBody>
-          <a:bodyPr rtlCol="0" anchor="ctr"/>
-          <a:lstStyle/>
-          <a:p>
-            <a:pPr algn="ctr"/>
-          </a:p>
-        </p:txBody>
-      </p:sp>
-      <p:sp>
-        <p:nvSpPr>
-          <p:cNvPr id="6" name="장식"/>
-          <p:cNvSpPr/>
-          <p:nvPr/>
-        </p:nvSpPr>
-        <p:spPr>
-          <a:xfrm>
-            <a:off x="11491036" y="1099893"/>
-            <a:ext cx="111201" cy="111201"/>
-          </a:xfrm>
-          <a:prstGeom prst="ellipse">
-            <a:avLst/>
-          </a:prstGeom>
-          <a:solidFill>
-            <a:srgbClr val="F4DBCD"/>
-          </a:solidFill>
-          <a:ln>
-            <a:noFill/>
-          </a:ln>
-        </p:spPr>
-        <p:txBody>
-          <a:bodyPr rtlCol="0" anchor="ctr"/>
-          <a:lstStyle/>
-          <a:p>
-            <a:pPr algn="ctr"/>
-          </a:p>
-        </p:txBody>
-      </p:sp>
-      <p:sp>
-        <p:nvSpPr>
-          <p:cNvPr id="7" name="장식"/>
-          <p:cNvSpPr/>
-          <p:nvPr/>
-        </p:nvSpPr>
-        <p:spPr>
-          <a:xfrm>
-            <a:off x="10506607" y="843400"/>
-            <a:ext cx="146404" cy="146404"/>
-          </a:xfrm>
-          <a:prstGeom prst="ellipse">
-            <a:avLst/>
-          </a:prstGeom>
-          <a:solidFill>
-            <a:srgbClr val="3B9185"/>
-          </a:solidFill>
-          <a:ln>
-            <a:noFill/>
-          </a:ln>
-        </p:spPr>
-        <p:txBody>
-          <a:bodyPr rtlCol="0" anchor="ctr"/>
-          <a:lstStyle/>
-          <a:p>
-            <a:pPr algn="ctr"/>
-          </a:p>
-        </p:txBody>
-      </p:sp>
-      <p:sp>
-        <p:nvSpPr>
-          <p:cNvPr id="8" name="장식"/>
-          <p:cNvSpPr/>
-          <p:nvPr/>
-        </p:nvSpPr>
-        <p:spPr>
-          <a:xfrm>
-            <a:off x="11198146" y="619708"/>
-            <a:ext cx="120275" cy="120275"/>
-          </a:xfrm>
-          <a:prstGeom prst="ellipse">
-            <a:avLst/>
-          </a:prstGeom>
-          <a:solidFill>
-            <a:srgbClr val="995229"/>
-          </a:solidFill>
-          <a:ln>
-            <a:noFill/>
-          </a:ln>
-        </p:spPr>
-        <p:txBody>
-          <a:bodyPr rtlCol="0" anchor="ctr"/>
-          <a:lstStyle/>
-          <a:p>
-            <a:pPr algn="ctr"/>
-          </a:p>
-        </p:txBody>
-      </p:sp>
-      <p:sp>
-        <p:nvSpPr>
-          <p:cNvPr id="9" name="장식"/>
-          <p:cNvSpPr/>
-          <p:nvPr/>
-        </p:nvSpPr>
-        <p:spPr>
-          <a:xfrm>
-            <a:off x="11033527" y="398225"/>
-            <a:ext cx="186017" cy="186017"/>
-          </a:xfrm>
-          <a:prstGeom prst="ellipse">
-            <a:avLst/>
-          </a:prstGeom>
-          <a:solidFill>
-            <a:srgbClr val="F4DBCD"/>
-          </a:solidFill>
-          <a:ln>
-            <a:noFill/>
-          </a:ln>
-        </p:spPr>
-        <p:txBody>
-          <a:bodyPr rtlCol="0" anchor="ctr"/>
-          <a:lstStyle/>
-          <a:p>
-            <a:pPr algn="ctr"/>
-          </a:p>
-        </p:txBody>
-      </p:sp>
-      <p:sp>
-        <p:nvSpPr>
-          <p:cNvPr id="10" name="장식"/>
-          <p:cNvSpPr/>
-          <p:nvPr/>
-        </p:nvSpPr>
-        <p:spPr>
-          <a:xfrm>
-            <a:off x="10682891" y="656597"/>
-            <a:ext cx="79826" cy="79826"/>
-          </a:xfrm>
-          <a:prstGeom prst="ellipse">
-            <a:avLst/>
-          </a:prstGeom>
-          <a:solidFill>
-            <a:srgbClr val="3B9185"/>
-          </a:solidFill>
-          <a:ln>
-            <a:noFill/>
-          </a:ln>
-        </p:spPr>
-        <p:txBody>
-          <a:bodyPr rtlCol="0" anchor="ctr"/>
-          <a:lstStyle/>
-          <a:p>
-            <a:pPr algn="ctr"/>
-          </a:p>
-        </p:txBody>
-      </p:sp>
-      <p:sp>
-        <p:nvSpPr>
-          <p:cNvPr id="11" name="장식"/>
-          <p:cNvSpPr/>
-          <p:nvPr/>
-        </p:nvSpPr>
-        <p:spPr>
-          <a:xfrm>
-            <a:off x="11301345" y="1367190"/>
-            <a:ext cx="158557" cy="158557"/>
-          </a:xfrm>
-          <a:prstGeom prst="ellipse">
-            <a:avLst/>
-          </a:prstGeom>
-          <a:solidFill>
-            <a:srgbClr val="995229"/>
-          </a:solidFill>
-          <a:ln>
-            <a:noFill/>
-          </a:ln>
-        </p:spPr>
-        <p:txBody>
-          <a:bodyPr rtlCol="0" anchor="ctr"/>
-          <a:lstStyle/>
-          <a:p>
-            <a:pPr algn="ctr"/>
-          </a:p>
-        </p:txBody>
-      </p:sp>
-      <p:sp>
-        <p:nvSpPr>
-          <p:cNvPr id="12" name="장식"/>
-          <p:cNvSpPr/>
-          <p:nvPr/>
-        </p:nvSpPr>
-        <p:spPr>
-          <a:xfrm>
-            <a:off x="11059707" y="707976"/>
-            <a:ext cx="148776" cy="148776"/>
-          </a:xfrm>
-          <a:prstGeom prst="ellipse">
-            <a:avLst/>
-          </a:prstGeom>
-          <a:solidFill>
-            <a:srgbClr val="F4DBCD"/>
-          </a:solidFill>
-          <a:ln>
-            <a:noFill/>
-          </a:ln>
-        </p:spPr>
-        <p:txBody>
-          <a:bodyPr rtlCol="0" anchor="ctr"/>
-          <a:lstStyle/>
-          <a:p>
-            <a:pPr algn="ctr"/>
-          </a:p>
-        </p:txBody>
-      </p:sp>
-      <p:sp>
-        <p:nvSpPr>
-          <p:cNvPr id="13" name="장식"/>
-          <p:cNvSpPr/>
-          <p:nvPr/>
-        </p:nvSpPr>
-        <p:spPr>
-          <a:xfrm>
-            <a:off x="11352247" y="1000807"/>
-            <a:ext cx="157967" cy="157967"/>
-          </a:xfrm>
-          <a:prstGeom prst="ellipse">
-            <a:avLst/>
-          </a:prstGeom>
-          <a:solidFill>
-            <a:srgbClr val="3B9185"/>
-          </a:solidFill>
-          <a:ln>
-            <a:noFill/>
-          </a:ln>
-        </p:spPr>
-        <p:txBody>
-          <a:bodyPr rtlCol="0" anchor="ctr"/>
-          <a:lstStyle/>
-          <a:p>
-            <a:pPr algn="ctr"/>
-          </a:p>
-        </p:txBody>
-      </p:sp>
-      <p:sp>
-        <p:nvSpPr>
-          <p:cNvPr id="14" name="장식"/>
-          <p:cNvSpPr/>
-          <p:nvPr/>
-        </p:nvSpPr>
-        <p:spPr>
-          <a:xfrm>
-            <a:off x="10751978" y="615189"/>
-            <a:ext cx="100367" cy="100367"/>
-          </a:xfrm>
-          <a:prstGeom prst="ellipse">
-            <a:avLst/>
-          </a:prstGeom>
-          <a:solidFill>
-            <a:srgbClr val="995229"/>
-          </a:solidFill>
-          <a:ln>
-            <a:noFill/>
-          </a:ln>
-        </p:spPr>
-        <p:txBody>
-          <a:bodyPr rtlCol="0" anchor="ctr"/>
-          <a:lstStyle/>
-          <a:p>
-            <a:pPr algn="ctr"/>
-          </a:p>
-        </p:txBody>
-      </p:sp>
-      <p:sp>
-        <p:nvSpPr>
-          <p:cNvPr id="15" name="장식"/>
-          <p:cNvSpPr/>
-          <p:nvPr/>
-        </p:nvSpPr>
-        <p:spPr>
-          <a:xfrm>
-            <a:off x="10594948" y="721318"/>
-            <a:ext cx="69230" cy="69230"/>
-          </a:xfrm>
-          <a:prstGeom prst="ellipse">
-            <a:avLst/>
-          </a:prstGeom>
-          <a:solidFill>
-            <a:srgbClr val="F4DBCD"/>
-          </a:solidFill>
-          <a:ln>
-            <a:noFill/>
-          </a:ln>
-        </p:spPr>
-        <p:txBody>
-          <a:bodyPr rtlCol="0" anchor="ctr"/>
-          <a:lstStyle/>
-          <a:p>
-            <a:pPr algn="ctr"/>
-          </a:p>
-        </p:txBody>
-      </p:sp>
-      <p:sp>
-        <p:nvSpPr>
           <p:cNvPr id="2" name="Title 1"/>
           <p:cNvSpPr>
             <a:spLocks noGrp="1"/>
@@ -5649,7 +4650,7 @@
       </p:sp>
       <p:graphicFrame>
         <p:nvGraphicFramePr>
-          <p:cNvPr id="16" name="표"/>
+          <p:cNvPr id="5" name="표"/>
           <p:cNvGraphicFramePr>
             <a:graphicFrameLocks noGrp="1"/>
           </p:cNvGraphicFramePr>
@@ -7386,325 +6387,6 @@
       </p:sp>
       <p:sp>
         <p:nvSpPr>
-          <p:cNvPr id="5" name="장식"/>
-          <p:cNvSpPr/>
-          <p:nvPr/>
-        </p:nvSpPr>
-        <p:spPr>
-          <a:xfrm>
-            <a:off x="10914538" y="631759"/>
-            <a:ext cx="185261" cy="185261"/>
-          </a:xfrm>
-          <a:prstGeom prst="ellipse">
-            <a:avLst/>
-          </a:prstGeom>
-          <a:solidFill>
-            <a:srgbClr val="995229"/>
-          </a:solidFill>
-          <a:ln>
-            <a:noFill/>
-          </a:ln>
-        </p:spPr>
-        <p:txBody>
-          <a:bodyPr rtlCol="0" anchor="ctr"/>
-          <a:lstStyle/>
-          <a:p>
-            <a:pPr algn="ctr"/>
-          </a:p>
-        </p:txBody>
-      </p:sp>
-      <p:sp>
-        <p:nvSpPr>
-          <p:cNvPr id="6" name="장식"/>
-          <p:cNvSpPr/>
-          <p:nvPr/>
-        </p:nvSpPr>
-        <p:spPr>
-          <a:xfrm>
-            <a:off x="11491036" y="1099893"/>
-            <a:ext cx="111201" cy="111201"/>
-          </a:xfrm>
-          <a:prstGeom prst="ellipse">
-            <a:avLst/>
-          </a:prstGeom>
-          <a:solidFill>
-            <a:srgbClr val="F4DBCD"/>
-          </a:solidFill>
-          <a:ln>
-            <a:noFill/>
-          </a:ln>
-        </p:spPr>
-        <p:txBody>
-          <a:bodyPr rtlCol="0" anchor="ctr"/>
-          <a:lstStyle/>
-          <a:p>
-            <a:pPr algn="ctr"/>
-          </a:p>
-        </p:txBody>
-      </p:sp>
-      <p:sp>
-        <p:nvSpPr>
-          <p:cNvPr id="7" name="장식"/>
-          <p:cNvSpPr/>
-          <p:nvPr/>
-        </p:nvSpPr>
-        <p:spPr>
-          <a:xfrm>
-            <a:off x="10506607" y="843400"/>
-            <a:ext cx="146404" cy="146404"/>
-          </a:xfrm>
-          <a:prstGeom prst="ellipse">
-            <a:avLst/>
-          </a:prstGeom>
-          <a:solidFill>
-            <a:srgbClr val="3B9185"/>
-          </a:solidFill>
-          <a:ln>
-            <a:noFill/>
-          </a:ln>
-        </p:spPr>
-        <p:txBody>
-          <a:bodyPr rtlCol="0" anchor="ctr"/>
-          <a:lstStyle/>
-          <a:p>
-            <a:pPr algn="ctr"/>
-          </a:p>
-        </p:txBody>
-      </p:sp>
-      <p:sp>
-        <p:nvSpPr>
-          <p:cNvPr id="8" name="장식"/>
-          <p:cNvSpPr/>
-          <p:nvPr/>
-        </p:nvSpPr>
-        <p:spPr>
-          <a:xfrm>
-            <a:off x="11198146" y="619708"/>
-            <a:ext cx="120275" cy="120275"/>
-          </a:xfrm>
-          <a:prstGeom prst="ellipse">
-            <a:avLst/>
-          </a:prstGeom>
-          <a:solidFill>
-            <a:srgbClr val="995229"/>
-          </a:solidFill>
-          <a:ln>
-            <a:noFill/>
-          </a:ln>
-        </p:spPr>
-        <p:txBody>
-          <a:bodyPr rtlCol="0" anchor="ctr"/>
-          <a:lstStyle/>
-          <a:p>
-            <a:pPr algn="ctr"/>
-          </a:p>
-        </p:txBody>
-      </p:sp>
-      <p:sp>
-        <p:nvSpPr>
-          <p:cNvPr id="9" name="장식"/>
-          <p:cNvSpPr/>
-          <p:nvPr/>
-        </p:nvSpPr>
-        <p:spPr>
-          <a:xfrm>
-            <a:off x="11033527" y="398225"/>
-            <a:ext cx="186017" cy="186017"/>
-          </a:xfrm>
-          <a:prstGeom prst="ellipse">
-            <a:avLst/>
-          </a:prstGeom>
-          <a:solidFill>
-            <a:srgbClr val="F4DBCD"/>
-          </a:solidFill>
-          <a:ln>
-            <a:noFill/>
-          </a:ln>
-        </p:spPr>
-        <p:txBody>
-          <a:bodyPr rtlCol="0" anchor="ctr"/>
-          <a:lstStyle/>
-          <a:p>
-            <a:pPr algn="ctr"/>
-          </a:p>
-        </p:txBody>
-      </p:sp>
-      <p:sp>
-        <p:nvSpPr>
-          <p:cNvPr id="10" name="장식"/>
-          <p:cNvSpPr/>
-          <p:nvPr/>
-        </p:nvSpPr>
-        <p:spPr>
-          <a:xfrm>
-            <a:off x="10682891" y="656597"/>
-            <a:ext cx="79826" cy="79826"/>
-          </a:xfrm>
-          <a:prstGeom prst="ellipse">
-            <a:avLst/>
-          </a:prstGeom>
-          <a:solidFill>
-            <a:srgbClr val="3B9185"/>
-          </a:solidFill>
-          <a:ln>
-            <a:noFill/>
-          </a:ln>
-        </p:spPr>
-        <p:txBody>
-          <a:bodyPr rtlCol="0" anchor="ctr"/>
-          <a:lstStyle/>
-          <a:p>
-            <a:pPr algn="ctr"/>
-          </a:p>
-        </p:txBody>
-      </p:sp>
-      <p:sp>
-        <p:nvSpPr>
-          <p:cNvPr id="11" name="장식"/>
-          <p:cNvSpPr/>
-          <p:nvPr/>
-        </p:nvSpPr>
-        <p:spPr>
-          <a:xfrm>
-            <a:off x="11301345" y="1367190"/>
-            <a:ext cx="158557" cy="158557"/>
-          </a:xfrm>
-          <a:prstGeom prst="ellipse">
-            <a:avLst/>
-          </a:prstGeom>
-          <a:solidFill>
-            <a:srgbClr val="995229"/>
-          </a:solidFill>
-          <a:ln>
-            <a:noFill/>
-          </a:ln>
-        </p:spPr>
-        <p:txBody>
-          <a:bodyPr rtlCol="0" anchor="ctr"/>
-          <a:lstStyle/>
-          <a:p>
-            <a:pPr algn="ctr"/>
-          </a:p>
-        </p:txBody>
-      </p:sp>
-      <p:sp>
-        <p:nvSpPr>
-          <p:cNvPr id="12" name="장식"/>
-          <p:cNvSpPr/>
-          <p:nvPr/>
-        </p:nvSpPr>
-        <p:spPr>
-          <a:xfrm>
-            <a:off x="11059707" y="707976"/>
-            <a:ext cx="148776" cy="148776"/>
-          </a:xfrm>
-          <a:prstGeom prst="ellipse">
-            <a:avLst/>
-          </a:prstGeom>
-          <a:solidFill>
-            <a:srgbClr val="F4DBCD"/>
-          </a:solidFill>
-          <a:ln>
-            <a:noFill/>
-          </a:ln>
-        </p:spPr>
-        <p:txBody>
-          <a:bodyPr rtlCol="0" anchor="ctr"/>
-          <a:lstStyle/>
-          <a:p>
-            <a:pPr algn="ctr"/>
-          </a:p>
-        </p:txBody>
-      </p:sp>
-      <p:sp>
-        <p:nvSpPr>
-          <p:cNvPr id="13" name="장식"/>
-          <p:cNvSpPr/>
-          <p:nvPr/>
-        </p:nvSpPr>
-        <p:spPr>
-          <a:xfrm>
-            <a:off x="11352247" y="1000807"/>
-            <a:ext cx="157967" cy="157967"/>
-          </a:xfrm>
-          <a:prstGeom prst="ellipse">
-            <a:avLst/>
-          </a:prstGeom>
-          <a:solidFill>
-            <a:srgbClr val="3B9185"/>
-          </a:solidFill>
-          <a:ln>
-            <a:noFill/>
-          </a:ln>
-        </p:spPr>
-        <p:txBody>
-          <a:bodyPr rtlCol="0" anchor="ctr"/>
-          <a:lstStyle/>
-          <a:p>
-            <a:pPr algn="ctr"/>
-          </a:p>
-        </p:txBody>
-      </p:sp>
-      <p:sp>
-        <p:nvSpPr>
-          <p:cNvPr id="14" name="장식"/>
-          <p:cNvSpPr/>
-          <p:nvPr/>
-        </p:nvSpPr>
-        <p:spPr>
-          <a:xfrm>
-            <a:off x="10751978" y="615189"/>
-            <a:ext cx="100367" cy="100367"/>
-          </a:xfrm>
-          <a:prstGeom prst="ellipse">
-            <a:avLst/>
-          </a:prstGeom>
-          <a:solidFill>
-            <a:srgbClr val="995229"/>
-          </a:solidFill>
-          <a:ln>
-            <a:noFill/>
-          </a:ln>
-        </p:spPr>
-        <p:txBody>
-          <a:bodyPr rtlCol="0" anchor="ctr"/>
-          <a:lstStyle/>
-          <a:p>
-            <a:pPr algn="ctr"/>
-          </a:p>
-        </p:txBody>
-      </p:sp>
-      <p:sp>
-        <p:nvSpPr>
-          <p:cNvPr id="15" name="장식"/>
-          <p:cNvSpPr/>
-          <p:nvPr/>
-        </p:nvSpPr>
-        <p:spPr>
-          <a:xfrm>
-            <a:off x="10594948" y="721318"/>
-            <a:ext cx="69230" cy="69230"/>
-          </a:xfrm>
-          <a:prstGeom prst="ellipse">
-            <a:avLst/>
-          </a:prstGeom>
-          <a:solidFill>
-            <a:srgbClr val="F4DBCD"/>
-          </a:solidFill>
-          <a:ln>
-            <a:noFill/>
-          </a:ln>
-        </p:spPr>
-        <p:txBody>
-          <a:bodyPr rtlCol="0" anchor="ctr"/>
-          <a:lstStyle/>
-          <a:p>
-            <a:pPr algn="ctr"/>
-          </a:p>
-        </p:txBody>
-      </p:sp>
-      <p:sp>
-        <p:nvSpPr>
           <p:cNvPr id="2" name="Title 1"/>
           <p:cNvSpPr>
             <a:spLocks noGrp="1"/>
@@ -7743,7 +6425,7 @@
       </p:sp>
       <p:graphicFrame>
         <p:nvGraphicFramePr>
-          <p:cNvPr id="16" name="표"/>
+          <p:cNvPr id="5" name="표"/>
           <p:cNvGraphicFramePr>
             <a:graphicFrameLocks noGrp="1"/>
           </p:cNvGraphicFramePr>
@@ -9529,325 +8211,6 @@
       </p:sp>
       <p:sp>
         <p:nvSpPr>
-          <p:cNvPr id="5" name="장식"/>
-          <p:cNvSpPr/>
-          <p:nvPr/>
-        </p:nvSpPr>
-        <p:spPr>
-          <a:xfrm>
-            <a:off x="10914538" y="631759"/>
-            <a:ext cx="185261" cy="185261"/>
-          </a:xfrm>
-          <a:prstGeom prst="ellipse">
-            <a:avLst/>
-          </a:prstGeom>
-          <a:solidFill>
-            <a:srgbClr val="995229"/>
-          </a:solidFill>
-          <a:ln>
-            <a:noFill/>
-          </a:ln>
-        </p:spPr>
-        <p:txBody>
-          <a:bodyPr rtlCol="0" anchor="ctr"/>
-          <a:lstStyle/>
-          <a:p>
-            <a:pPr algn="ctr"/>
-          </a:p>
-        </p:txBody>
-      </p:sp>
-      <p:sp>
-        <p:nvSpPr>
-          <p:cNvPr id="6" name="장식"/>
-          <p:cNvSpPr/>
-          <p:nvPr/>
-        </p:nvSpPr>
-        <p:spPr>
-          <a:xfrm>
-            <a:off x="11491036" y="1099893"/>
-            <a:ext cx="111201" cy="111201"/>
-          </a:xfrm>
-          <a:prstGeom prst="ellipse">
-            <a:avLst/>
-          </a:prstGeom>
-          <a:solidFill>
-            <a:srgbClr val="F4DBCD"/>
-          </a:solidFill>
-          <a:ln>
-            <a:noFill/>
-          </a:ln>
-        </p:spPr>
-        <p:txBody>
-          <a:bodyPr rtlCol="0" anchor="ctr"/>
-          <a:lstStyle/>
-          <a:p>
-            <a:pPr algn="ctr"/>
-          </a:p>
-        </p:txBody>
-      </p:sp>
-      <p:sp>
-        <p:nvSpPr>
-          <p:cNvPr id="7" name="장식"/>
-          <p:cNvSpPr/>
-          <p:nvPr/>
-        </p:nvSpPr>
-        <p:spPr>
-          <a:xfrm>
-            <a:off x="10506607" y="843400"/>
-            <a:ext cx="146404" cy="146404"/>
-          </a:xfrm>
-          <a:prstGeom prst="ellipse">
-            <a:avLst/>
-          </a:prstGeom>
-          <a:solidFill>
-            <a:srgbClr val="3B9185"/>
-          </a:solidFill>
-          <a:ln>
-            <a:noFill/>
-          </a:ln>
-        </p:spPr>
-        <p:txBody>
-          <a:bodyPr rtlCol="0" anchor="ctr"/>
-          <a:lstStyle/>
-          <a:p>
-            <a:pPr algn="ctr"/>
-          </a:p>
-        </p:txBody>
-      </p:sp>
-      <p:sp>
-        <p:nvSpPr>
-          <p:cNvPr id="8" name="장식"/>
-          <p:cNvSpPr/>
-          <p:nvPr/>
-        </p:nvSpPr>
-        <p:spPr>
-          <a:xfrm>
-            <a:off x="11198146" y="619708"/>
-            <a:ext cx="120275" cy="120275"/>
-          </a:xfrm>
-          <a:prstGeom prst="ellipse">
-            <a:avLst/>
-          </a:prstGeom>
-          <a:solidFill>
-            <a:srgbClr val="995229"/>
-          </a:solidFill>
-          <a:ln>
-            <a:noFill/>
-          </a:ln>
-        </p:spPr>
-        <p:txBody>
-          <a:bodyPr rtlCol="0" anchor="ctr"/>
-          <a:lstStyle/>
-          <a:p>
-            <a:pPr algn="ctr"/>
-          </a:p>
-        </p:txBody>
-      </p:sp>
-      <p:sp>
-        <p:nvSpPr>
-          <p:cNvPr id="9" name="장식"/>
-          <p:cNvSpPr/>
-          <p:nvPr/>
-        </p:nvSpPr>
-        <p:spPr>
-          <a:xfrm>
-            <a:off x="11033527" y="398225"/>
-            <a:ext cx="186017" cy="186017"/>
-          </a:xfrm>
-          <a:prstGeom prst="ellipse">
-            <a:avLst/>
-          </a:prstGeom>
-          <a:solidFill>
-            <a:srgbClr val="F4DBCD"/>
-          </a:solidFill>
-          <a:ln>
-            <a:noFill/>
-          </a:ln>
-        </p:spPr>
-        <p:txBody>
-          <a:bodyPr rtlCol="0" anchor="ctr"/>
-          <a:lstStyle/>
-          <a:p>
-            <a:pPr algn="ctr"/>
-          </a:p>
-        </p:txBody>
-      </p:sp>
-      <p:sp>
-        <p:nvSpPr>
-          <p:cNvPr id="10" name="장식"/>
-          <p:cNvSpPr/>
-          <p:nvPr/>
-        </p:nvSpPr>
-        <p:spPr>
-          <a:xfrm>
-            <a:off x="10682891" y="656597"/>
-            <a:ext cx="79826" cy="79826"/>
-          </a:xfrm>
-          <a:prstGeom prst="ellipse">
-            <a:avLst/>
-          </a:prstGeom>
-          <a:solidFill>
-            <a:srgbClr val="3B9185"/>
-          </a:solidFill>
-          <a:ln>
-            <a:noFill/>
-          </a:ln>
-        </p:spPr>
-        <p:txBody>
-          <a:bodyPr rtlCol="0" anchor="ctr"/>
-          <a:lstStyle/>
-          <a:p>
-            <a:pPr algn="ctr"/>
-          </a:p>
-        </p:txBody>
-      </p:sp>
-      <p:sp>
-        <p:nvSpPr>
-          <p:cNvPr id="11" name="장식"/>
-          <p:cNvSpPr/>
-          <p:nvPr/>
-        </p:nvSpPr>
-        <p:spPr>
-          <a:xfrm>
-            <a:off x="11301345" y="1367190"/>
-            <a:ext cx="158557" cy="158557"/>
-          </a:xfrm>
-          <a:prstGeom prst="ellipse">
-            <a:avLst/>
-          </a:prstGeom>
-          <a:solidFill>
-            <a:srgbClr val="995229"/>
-          </a:solidFill>
-          <a:ln>
-            <a:noFill/>
-          </a:ln>
-        </p:spPr>
-        <p:txBody>
-          <a:bodyPr rtlCol="0" anchor="ctr"/>
-          <a:lstStyle/>
-          <a:p>
-            <a:pPr algn="ctr"/>
-          </a:p>
-        </p:txBody>
-      </p:sp>
-      <p:sp>
-        <p:nvSpPr>
-          <p:cNvPr id="12" name="장식"/>
-          <p:cNvSpPr/>
-          <p:nvPr/>
-        </p:nvSpPr>
-        <p:spPr>
-          <a:xfrm>
-            <a:off x="11059707" y="707976"/>
-            <a:ext cx="148776" cy="148776"/>
-          </a:xfrm>
-          <a:prstGeom prst="ellipse">
-            <a:avLst/>
-          </a:prstGeom>
-          <a:solidFill>
-            <a:srgbClr val="F4DBCD"/>
-          </a:solidFill>
-          <a:ln>
-            <a:noFill/>
-          </a:ln>
-        </p:spPr>
-        <p:txBody>
-          <a:bodyPr rtlCol="0" anchor="ctr"/>
-          <a:lstStyle/>
-          <a:p>
-            <a:pPr algn="ctr"/>
-          </a:p>
-        </p:txBody>
-      </p:sp>
-      <p:sp>
-        <p:nvSpPr>
-          <p:cNvPr id="13" name="장식"/>
-          <p:cNvSpPr/>
-          <p:nvPr/>
-        </p:nvSpPr>
-        <p:spPr>
-          <a:xfrm>
-            <a:off x="11352247" y="1000807"/>
-            <a:ext cx="157967" cy="157967"/>
-          </a:xfrm>
-          <a:prstGeom prst="ellipse">
-            <a:avLst/>
-          </a:prstGeom>
-          <a:solidFill>
-            <a:srgbClr val="3B9185"/>
-          </a:solidFill>
-          <a:ln>
-            <a:noFill/>
-          </a:ln>
-        </p:spPr>
-        <p:txBody>
-          <a:bodyPr rtlCol="0" anchor="ctr"/>
-          <a:lstStyle/>
-          <a:p>
-            <a:pPr algn="ctr"/>
-          </a:p>
-        </p:txBody>
-      </p:sp>
-      <p:sp>
-        <p:nvSpPr>
-          <p:cNvPr id="14" name="장식"/>
-          <p:cNvSpPr/>
-          <p:nvPr/>
-        </p:nvSpPr>
-        <p:spPr>
-          <a:xfrm>
-            <a:off x="10751978" y="615189"/>
-            <a:ext cx="100367" cy="100367"/>
-          </a:xfrm>
-          <a:prstGeom prst="ellipse">
-            <a:avLst/>
-          </a:prstGeom>
-          <a:solidFill>
-            <a:srgbClr val="995229"/>
-          </a:solidFill>
-          <a:ln>
-            <a:noFill/>
-          </a:ln>
-        </p:spPr>
-        <p:txBody>
-          <a:bodyPr rtlCol="0" anchor="ctr"/>
-          <a:lstStyle/>
-          <a:p>
-            <a:pPr algn="ctr"/>
-          </a:p>
-        </p:txBody>
-      </p:sp>
-      <p:sp>
-        <p:nvSpPr>
-          <p:cNvPr id="15" name="장식"/>
-          <p:cNvSpPr/>
-          <p:nvPr/>
-        </p:nvSpPr>
-        <p:spPr>
-          <a:xfrm>
-            <a:off x="10594948" y="721318"/>
-            <a:ext cx="69230" cy="69230"/>
-          </a:xfrm>
-          <a:prstGeom prst="ellipse">
-            <a:avLst/>
-          </a:prstGeom>
-          <a:solidFill>
-            <a:srgbClr val="F4DBCD"/>
-          </a:solidFill>
-          <a:ln>
-            <a:noFill/>
-          </a:ln>
-        </p:spPr>
-        <p:txBody>
-          <a:bodyPr rtlCol="0" anchor="ctr"/>
-          <a:lstStyle/>
-          <a:p>
-            <a:pPr algn="ctr"/>
-          </a:p>
-        </p:txBody>
-      </p:sp>
-      <p:sp>
-        <p:nvSpPr>
           <p:cNvPr id="2" name="Title 1"/>
           <p:cNvSpPr>
             <a:spLocks noGrp="1"/>
@@ -9886,7 +8249,7 @@
       </p:sp>
       <p:sp>
         <p:nvSpPr>
-          <p:cNvPr id="16" name="카드 1"/>
+          <p:cNvPr id="5" name="카드 1"/>
           <p:cNvSpPr/>
           <p:nvPr/>
         </p:nvSpPr>
@@ -9919,7 +8282,7 @@
       </p:sp>
       <p:sp>
         <p:nvSpPr>
-          <p:cNvPr id="17" name="번호 1"/>
+          <p:cNvPr id="6" name="번호 1"/>
           <p:cNvSpPr/>
           <p:nvPr/>
         </p:nvSpPr>
@@ -9962,7 +8325,7 @@
       </p:sp>
       <p:sp>
         <p:nvSpPr>
-          <p:cNvPr id="18" name="TextBox 17"/>
+          <p:cNvPr id="7" name="TextBox 6"/>
           <p:cNvSpPr txBox="1"/>
           <p:nvPr/>
         </p:nvSpPr>
@@ -10000,7 +8363,7 @@
       </p:sp>
       <p:sp>
         <p:nvSpPr>
-          <p:cNvPr id="19" name="TextBox 18"/>
+          <p:cNvPr id="8" name="TextBox 7"/>
           <p:cNvSpPr txBox="1"/>
           <p:nvPr/>
         </p:nvSpPr>
@@ -10038,7 +8401,7 @@
       </p:sp>
       <p:sp>
         <p:nvSpPr>
-          <p:cNvPr id="20" name="카드 2"/>
+          <p:cNvPr id="9" name="카드 2"/>
           <p:cNvSpPr/>
           <p:nvPr/>
         </p:nvSpPr>
@@ -10071,7 +8434,7 @@
       </p:sp>
       <p:sp>
         <p:nvSpPr>
-          <p:cNvPr id="21" name="번호 2"/>
+          <p:cNvPr id="10" name="번호 2"/>
           <p:cNvSpPr/>
           <p:nvPr/>
         </p:nvSpPr>
@@ -10114,7 +8477,7 @@
       </p:sp>
       <p:sp>
         <p:nvSpPr>
-          <p:cNvPr id="22" name="TextBox 21"/>
+          <p:cNvPr id="11" name="TextBox 10"/>
           <p:cNvSpPr txBox="1"/>
           <p:nvPr/>
         </p:nvSpPr>
@@ -10152,7 +8515,7 @@
       </p:sp>
       <p:sp>
         <p:nvSpPr>
-          <p:cNvPr id="23" name="TextBox 22"/>
+          <p:cNvPr id="12" name="TextBox 11"/>
           <p:cNvSpPr txBox="1"/>
           <p:nvPr/>
         </p:nvSpPr>
@@ -10190,7 +8553,7 @@
       </p:sp>
       <p:sp>
         <p:nvSpPr>
-          <p:cNvPr id="24" name="카드 3"/>
+          <p:cNvPr id="13" name="카드 3"/>
           <p:cNvSpPr/>
           <p:nvPr/>
         </p:nvSpPr>
@@ -10223,7 +8586,7 @@
       </p:sp>
       <p:sp>
         <p:nvSpPr>
-          <p:cNvPr id="25" name="번호 3"/>
+          <p:cNvPr id="14" name="번호 3"/>
           <p:cNvSpPr/>
           <p:nvPr/>
         </p:nvSpPr>
@@ -10266,7 +8629,7 @@
       </p:sp>
       <p:sp>
         <p:nvSpPr>
-          <p:cNvPr id="26" name="TextBox 25"/>
+          <p:cNvPr id="15" name="TextBox 14"/>
           <p:cNvSpPr txBox="1"/>
           <p:nvPr/>
         </p:nvSpPr>
@@ -10304,7 +8667,7 @@
       </p:sp>
       <p:sp>
         <p:nvSpPr>
-          <p:cNvPr id="27" name="TextBox 26"/>
+          <p:cNvPr id="16" name="TextBox 15"/>
           <p:cNvSpPr txBox="1"/>
           <p:nvPr/>
         </p:nvSpPr>
@@ -10342,7 +8705,7 @@
       </p:sp>
       <p:sp>
         <p:nvSpPr>
-          <p:cNvPr id="28" name="안내"/>
+          <p:cNvPr id="17" name="안내"/>
           <p:cNvSpPr txBox="1"/>
           <p:nvPr/>
         </p:nvSpPr>
@@ -10464,325 +8827,6 @@
       </p:sp>
       <p:sp>
         <p:nvSpPr>
-          <p:cNvPr id="5" name="장식"/>
-          <p:cNvSpPr/>
-          <p:nvPr/>
-        </p:nvSpPr>
-        <p:spPr>
-          <a:xfrm>
-            <a:off x="10914538" y="631759"/>
-            <a:ext cx="185261" cy="185261"/>
-          </a:xfrm>
-          <a:prstGeom prst="ellipse">
-            <a:avLst/>
-          </a:prstGeom>
-          <a:solidFill>
-            <a:srgbClr val="995229"/>
-          </a:solidFill>
-          <a:ln>
-            <a:noFill/>
-          </a:ln>
-        </p:spPr>
-        <p:txBody>
-          <a:bodyPr rtlCol="0" anchor="ctr"/>
-          <a:lstStyle/>
-          <a:p>
-            <a:pPr algn="ctr"/>
-          </a:p>
-        </p:txBody>
-      </p:sp>
-      <p:sp>
-        <p:nvSpPr>
-          <p:cNvPr id="6" name="장식"/>
-          <p:cNvSpPr/>
-          <p:nvPr/>
-        </p:nvSpPr>
-        <p:spPr>
-          <a:xfrm>
-            <a:off x="11491036" y="1099893"/>
-            <a:ext cx="111201" cy="111201"/>
-          </a:xfrm>
-          <a:prstGeom prst="ellipse">
-            <a:avLst/>
-          </a:prstGeom>
-          <a:solidFill>
-            <a:srgbClr val="F4DBCD"/>
-          </a:solidFill>
-          <a:ln>
-            <a:noFill/>
-          </a:ln>
-        </p:spPr>
-        <p:txBody>
-          <a:bodyPr rtlCol="0" anchor="ctr"/>
-          <a:lstStyle/>
-          <a:p>
-            <a:pPr algn="ctr"/>
-          </a:p>
-        </p:txBody>
-      </p:sp>
-      <p:sp>
-        <p:nvSpPr>
-          <p:cNvPr id="7" name="장식"/>
-          <p:cNvSpPr/>
-          <p:nvPr/>
-        </p:nvSpPr>
-        <p:spPr>
-          <a:xfrm>
-            <a:off x="10506607" y="843400"/>
-            <a:ext cx="146404" cy="146404"/>
-          </a:xfrm>
-          <a:prstGeom prst="ellipse">
-            <a:avLst/>
-          </a:prstGeom>
-          <a:solidFill>
-            <a:srgbClr val="3B9185"/>
-          </a:solidFill>
-          <a:ln>
-            <a:noFill/>
-          </a:ln>
-        </p:spPr>
-        <p:txBody>
-          <a:bodyPr rtlCol="0" anchor="ctr"/>
-          <a:lstStyle/>
-          <a:p>
-            <a:pPr algn="ctr"/>
-          </a:p>
-        </p:txBody>
-      </p:sp>
-      <p:sp>
-        <p:nvSpPr>
-          <p:cNvPr id="8" name="장식"/>
-          <p:cNvSpPr/>
-          <p:nvPr/>
-        </p:nvSpPr>
-        <p:spPr>
-          <a:xfrm>
-            <a:off x="11198146" y="619708"/>
-            <a:ext cx="120275" cy="120275"/>
-          </a:xfrm>
-          <a:prstGeom prst="ellipse">
-            <a:avLst/>
-          </a:prstGeom>
-          <a:solidFill>
-            <a:srgbClr val="995229"/>
-          </a:solidFill>
-          <a:ln>
-            <a:noFill/>
-          </a:ln>
-        </p:spPr>
-        <p:txBody>
-          <a:bodyPr rtlCol="0" anchor="ctr"/>
-          <a:lstStyle/>
-          <a:p>
-            <a:pPr algn="ctr"/>
-          </a:p>
-        </p:txBody>
-      </p:sp>
-      <p:sp>
-        <p:nvSpPr>
-          <p:cNvPr id="9" name="장식"/>
-          <p:cNvSpPr/>
-          <p:nvPr/>
-        </p:nvSpPr>
-        <p:spPr>
-          <a:xfrm>
-            <a:off x="11033527" y="398225"/>
-            <a:ext cx="186017" cy="186017"/>
-          </a:xfrm>
-          <a:prstGeom prst="ellipse">
-            <a:avLst/>
-          </a:prstGeom>
-          <a:solidFill>
-            <a:srgbClr val="F4DBCD"/>
-          </a:solidFill>
-          <a:ln>
-            <a:noFill/>
-          </a:ln>
-        </p:spPr>
-        <p:txBody>
-          <a:bodyPr rtlCol="0" anchor="ctr"/>
-          <a:lstStyle/>
-          <a:p>
-            <a:pPr algn="ctr"/>
-          </a:p>
-        </p:txBody>
-      </p:sp>
-      <p:sp>
-        <p:nvSpPr>
-          <p:cNvPr id="10" name="장식"/>
-          <p:cNvSpPr/>
-          <p:nvPr/>
-        </p:nvSpPr>
-        <p:spPr>
-          <a:xfrm>
-            <a:off x="10682891" y="656597"/>
-            <a:ext cx="79826" cy="79826"/>
-          </a:xfrm>
-          <a:prstGeom prst="ellipse">
-            <a:avLst/>
-          </a:prstGeom>
-          <a:solidFill>
-            <a:srgbClr val="3B9185"/>
-          </a:solidFill>
-          <a:ln>
-            <a:noFill/>
-          </a:ln>
-        </p:spPr>
-        <p:txBody>
-          <a:bodyPr rtlCol="0" anchor="ctr"/>
-          <a:lstStyle/>
-          <a:p>
-            <a:pPr algn="ctr"/>
-          </a:p>
-        </p:txBody>
-      </p:sp>
-      <p:sp>
-        <p:nvSpPr>
-          <p:cNvPr id="11" name="장식"/>
-          <p:cNvSpPr/>
-          <p:nvPr/>
-        </p:nvSpPr>
-        <p:spPr>
-          <a:xfrm>
-            <a:off x="11301345" y="1367190"/>
-            <a:ext cx="158557" cy="158557"/>
-          </a:xfrm>
-          <a:prstGeom prst="ellipse">
-            <a:avLst/>
-          </a:prstGeom>
-          <a:solidFill>
-            <a:srgbClr val="995229"/>
-          </a:solidFill>
-          <a:ln>
-            <a:noFill/>
-          </a:ln>
-        </p:spPr>
-        <p:txBody>
-          <a:bodyPr rtlCol="0" anchor="ctr"/>
-          <a:lstStyle/>
-          <a:p>
-            <a:pPr algn="ctr"/>
-          </a:p>
-        </p:txBody>
-      </p:sp>
-      <p:sp>
-        <p:nvSpPr>
-          <p:cNvPr id="12" name="장식"/>
-          <p:cNvSpPr/>
-          <p:nvPr/>
-        </p:nvSpPr>
-        <p:spPr>
-          <a:xfrm>
-            <a:off x="11059707" y="707976"/>
-            <a:ext cx="148776" cy="148776"/>
-          </a:xfrm>
-          <a:prstGeom prst="ellipse">
-            <a:avLst/>
-          </a:prstGeom>
-          <a:solidFill>
-            <a:srgbClr val="F4DBCD"/>
-          </a:solidFill>
-          <a:ln>
-            <a:noFill/>
-          </a:ln>
-        </p:spPr>
-        <p:txBody>
-          <a:bodyPr rtlCol="0" anchor="ctr"/>
-          <a:lstStyle/>
-          <a:p>
-            <a:pPr algn="ctr"/>
-          </a:p>
-        </p:txBody>
-      </p:sp>
-      <p:sp>
-        <p:nvSpPr>
-          <p:cNvPr id="13" name="장식"/>
-          <p:cNvSpPr/>
-          <p:nvPr/>
-        </p:nvSpPr>
-        <p:spPr>
-          <a:xfrm>
-            <a:off x="11352247" y="1000807"/>
-            <a:ext cx="157967" cy="157967"/>
-          </a:xfrm>
-          <a:prstGeom prst="ellipse">
-            <a:avLst/>
-          </a:prstGeom>
-          <a:solidFill>
-            <a:srgbClr val="3B9185"/>
-          </a:solidFill>
-          <a:ln>
-            <a:noFill/>
-          </a:ln>
-        </p:spPr>
-        <p:txBody>
-          <a:bodyPr rtlCol="0" anchor="ctr"/>
-          <a:lstStyle/>
-          <a:p>
-            <a:pPr algn="ctr"/>
-          </a:p>
-        </p:txBody>
-      </p:sp>
-      <p:sp>
-        <p:nvSpPr>
-          <p:cNvPr id="14" name="장식"/>
-          <p:cNvSpPr/>
-          <p:nvPr/>
-        </p:nvSpPr>
-        <p:spPr>
-          <a:xfrm>
-            <a:off x="10751978" y="615189"/>
-            <a:ext cx="100367" cy="100367"/>
-          </a:xfrm>
-          <a:prstGeom prst="ellipse">
-            <a:avLst/>
-          </a:prstGeom>
-          <a:solidFill>
-            <a:srgbClr val="995229"/>
-          </a:solidFill>
-          <a:ln>
-            <a:noFill/>
-          </a:ln>
-        </p:spPr>
-        <p:txBody>
-          <a:bodyPr rtlCol="0" anchor="ctr"/>
-          <a:lstStyle/>
-          <a:p>
-            <a:pPr algn="ctr"/>
-          </a:p>
-        </p:txBody>
-      </p:sp>
-      <p:sp>
-        <p:nvSpPr>
-          <p:cNvPr id="15" name="장식"/>
-          <p:cNvSpPr/>
-          <p:nvPr/>
-        </p:nvSpPr>
-        <p:spPr>
-          <a:xfrm>
-            <a:off x="10594948" y="721318"/>
-            <a:ext cx="69230" cy="69230"/>
-          </a:xfrm>
-          <a:prstGeom prst="ellipse">
-            <a:avLst/>
-          </a:prstGeom>
-          <a:solidFill>
-            <a:srgbClr val="F4DBCD"/>
-          </a:solidFill>
-          <a:ln>
-            <a:noFill/>
-          </a:ln>
-        </p:spPr>
-        <p:txBody>
-          <a:bodyPr rtlCol="0" anchor="ctr"/>
-          <a:lstStyle/>
-          <a:p>
-            <a:pPr algn="ctr"/>
-          </a:p>
-        </p:txBody>
-      </p:sp>
-      <p:sp>
-        <p:nvSpPr>
           <p:cNvPr id="2" name="Title 1"/>
           <p:cNvSpPr>
             <a:spLocks noGrp="1"/>
@@ -10821,7 +8865,7 @@
       </p:sp>
       <p:sp>
         <p:nvSpPr>
-          <p:cNvPr id="16" name="카드 1"/>
+          <p:cNvPr id="5" name="카드 1"/>
           <p:cNvSpPr/>
           <p:nvPr/>
         </p:nvSpPr>
@@ -10854,7 +8898,7 @@
       </p:sp>
       <p:sp>
         <p:nvSpPr>
-          <p:cNvPr id="17" name="번호 1"/>
+          <p:cNvPr id="6" name="번호 1"/>
           <p:cNvSpPr/>
           <p:nvPr/>
         </p:nvSpPr>
@@ -10897,7 +8941,7 @@
       </p:sp>
       <p:sp>
         <p:nvSpPr>
-          <p:cNvPr id="18" name="TextBox 17"/>
+          <p:cNvPr id="7" name="TextBox 6"/>
           <p:cNvSpPr txBox="1"/>
           <p:nvPr/>
         </p:nvSpPr>
@@ -10935,7 +8979,7 @@
       </p:sp>
       <p:sp>
         <p:nvSpPr>
-          <p:cNvPr id="19" name="TextBox 18"/>
+          <p:cNvPr id="8" name="TextBox 7"/>
           <p:cNvSpPr txBox="1"/>
           <p:nvPr/>
         </p:nvSpPr>
@@ -10973,7 +9017,7 @@
       </p:sp>
       <p:sp>
         <p:nvSpPr>
-          <p:cNvPr id="20" name="카드 2"/>
+          <p:cNvPr id="9" name="카드 2"/>
           <p:cNvSpPr/>
           <p:nvPr/>
         </p:nvSpPr>
@@ -11006,7 +9050,7 @@
       </p:sp>
       <p:sp>
         <p:nvSpPr>
-          <p:cNvPr id="21" name="번호 2"/>
+          <p:cNvPr id="10" name="번호 2"/>
           <p:cNvSpPr/>
           <p:nvPr/>
         </p:nvSpPr>
@@ -11049,7 +9093,7 @@
       </p:sp>
       <p:sp>
         <p:nvSpPr>
-          <p:cNvPr id="22" name="TextBox 21"/>
+          <p:cNvPr id="11" name="TextBox 10"/>
           <p:cNvSpPr txBox="1"/>
           <p:nvPr/>
         </p:nvSpPr>
@@ -11087,7 +9131,7 @@
       </p:sp>
       <p:sp>
         <p:nvSpPr>
-          <p:cNvPr id="23" name="TextBox 22"/>
+          <p:cNvPr id="12" name="TextBox 11"/>
           <p:cNvSpPr txBox="1"/>
           <p:nvPr/>
         </p:nvSpPr>
@@ -11125,7 +9169,7 @@
       </p:sp>
       <p:sp>
         <p:nvSpPr>
-          <p:cNvPr id="24" name="카드 3"/>
+          <p:cNvPr id="13" name="카드 3"/>
           <p:cNvSpPr/>
           <p:nvPr/>
         </p:nvSpPr>
@@ -11158,7 +9202,7 @@
       </p:sp>
       <p:sp>
         <p:nvSpPr>
-          <p:cNvPr id="25" name="번호 3"/>
+          <p:cNvPr id="14" name="번호 3"/>
           <p:cNvSpPr/>
           <p:nvPr/>
         </p:nvSpPr>
@@ -11201,7 +9245,7 @@
       </p:sp>
       <p:sp>
         <p:nvSpPr>
-          <p:cNvPr id="26" name="TextBox 25"/>
+          <p:cNvPr id="15" name="TextBox 14"/>
           <p:cNvSpPr txBox="1"/>
           <p:nvPr/>
         </p:nvSpPr>
@@ -11239,7 +9283,7 @@
       </p:sp>
       <p:sp>
         <p:nvSpPr>
-          <p:cNvPr id="27" name="TextBox 26"/>
+          <p:cNvPr id="16" name="TextBox 15"/>
           <p:cNvSpPr txBox="1"/>
           <p:nvPr/>
         </p:nvSpPr>
@@ -11277,7 +9321,7 @@
       </p:sp>
       <p:sp>
         <p:nvSpPr>
-          <p:cNvPr id="28" name="안내 문구"/>
+          <p:cNvPr id="17" name="안내 문구"/>
           <p:cNvSpPr txBox="1"/>
           <p:nvPr/>
         </p:nvSpPr>

--- a/public/fun/pack/pptx/review/보장점검양식_38_가족점검_군고구마골목.pptx
+++ b/public/fun/pack/pptx/review/보장점검양식_38_가족점검_군고구마골목.pptx
@@ -3286,6 +3286,14 @@
 <file path=ppt/slides/slide1.xml><?xml version="1.0" encoding="utf-8"?>
 <p:sld xmlns:a="http://schemas.openxmlformats.org/drawingml/2006/main" xmlns:p="http://schemas.openxmlformats.org/presentationml/2006/main" xmlns:r="http://schemas.openxmlformats.org/officeDocument/2006/relationships">
   <p:cSld>
+    <p:bg>
+      <p:bgPr>
+        <a:solidFill>
+          <a:srgbClr val="F6E1D5"/>
+        </a:solidFill>
+        <a:effectLst/>
+      </p:bgPr>
+    </p:bg>
     <p:spTree>
       <p:nvGrpSpPr>
         <p:cNvPr id="1" name=""/>
@@ -3293,30 +3301,140 @@
         <p:nvPr/>
       </p:nvGrpSpPr>
       <p:grpSpPr/>
-      <p:pic>
-        <p:nvPicPr>
-          <p:cNvPr id="3" name="표지 그림" descr="review-38.jpg"/>
-          <p:cNvPicPr>
-            <a:picLocks noChangeAspect="1"/>
-          </p:cNvPicPr>
+      <p:sp>
+        <p:nvSpPr>
+          <p:cNvPr id="3" name="장식"/>
+          <p:cNvSpPr/>
           <p:nvPr/>
-        </p:nvPicPr>
-        <p:blipFill>
-          <a:blip r:embed="rId2"/>
-          <a:stretch>
-            <a:fillRect/>
-          </a:stretch>
-        </p:blipFill>
-        <p:spPr>
-          <a:xfrm>
-            <a:off x="0" y="0"/>
-            <a:ext cx="12191695" cy="6858000"/>
+        </p:nvSpPr>
+        <p:spPr>
+          <a:xfrm>
+            <a:off x="6827349" y="2057400"/>
+            <a:ext cx="1463003" cy="4800600"/>
+          </a:xfrm>
+          <a:prstGeom prst="round2SameRect">
+            <a:avLst>
+              <a:gd name="adj1" fmla="val 50000"/>
+              <a:gd name="adj2" fmla="val 0"/>
+            </a:avLst>
+          </a:prstGeom>
+          <a:solidFill>
+            <a:srgbClr val="EBC4AD"/>
+          </a:solidFill>
+          <a:ln>
+            <a:noFill/>
+          </a:ln>
+        </p:spPr>
+        <p:txBody>
+          <a:bodyPr rtlCol="0" anchor="ctr"/>
+          <a:lstStyle/>
+          <a:p>
+            <a:pPr algn="ctr"/>
+          </a:p>
+        </p:txBody>
+      </p:sp>
+      <p:sp>
+        <p:nvSpPr>
+          <p:cNvPr id="4" name="장식"/>
+          <p:cNvSpPr/>
+          <p:nvPr/>
+        </p:nvSpPr>
+        <p:spPr>
+          <a:xfrm>
+            <a:off x="8412269" y="1577339"/>
+            <a:ext cx="1463003" cy="5280660"/>
+          </a:xfrm>
+          <a:prstGeom prst="round2SameRect">
+            <a:avLst>
+              <a:gd name="adj1" fmla="val 50000"/>
+              <a:gd name="adj2" fmla="val 0"/>
+            </a:avLst>
+          </a:prstGeom>
+          <a:solidFill>
+            <a:srgbClr val="FFFFFF"/>
+          </a:solidFill>
+          <a:ln>
+            <a:noFill/>
+          </a:ln>
+        </p:spPr>
+        <p:txBody>
+          <a:bodyPr rtlCol="0" anchor="ctr"/>
+          <a:lstStyle/>
+          <a:p>
+            <a:pPr algn="ctr"/>
+          </a:p>
+        </p:txBody>
+      </p:sp>
+      <p:sp>
+        <p:nvSpPr>
+          <p:cNvPr id="5" name="장식"/>
+          <p:cNvSpPr/>
+          <p:nvPr/>
+        </p:nvSpPr>
+        <p:spPr>
+          <a:xfrm>
+            <a:off x="9997190" y="1097279"/>
+            <a:ext cx="1463003" cy="5760720"/>
+          </a:xfrm>
+          <a:prstGeom prst="round2SameRect">
+            <a:avLst>
+              <a:gd name="adj1" fmla="val 50000"/>
+              <a:gd name="adj2" fmla="val 0"/>
+            </a:avLst>
+          </a:prstGeom>
+          <a:solidFill>
+            <a:srgbClr val="F6E1D5"/>
+          </a:solidFill>
+          <a:ln>
+            <a:noFill/>
+          </a:ln>
+        </p:spPr>
+        <p:txBody>
+          <a:bodyPr rtlCol="0" anchor="ctr"/>
+          <a:lstStyle/>
+          <a:p>
+            <a:pPr algn="ctr"/>
+          </a:p>
+        </p:txBody>
+      </p:sp>
+      <p:sp>
+        <p:nvSpPr>
+          <p:cNvPr id="6" name="라벨"/>
+          <p:cNvSpPr txBox="1"/>
+          <p:nvPr/>
+        </p:nvSpPr>
+        <p:spPr>
+          <a:xfrm>
+            <a:off x="822960" y="2148840"/>
+            <a:ext cx="5608179" cy="274320"/>
           </a:xfrm>
           <a:prstGeom prst="rect">
             <a:avLst/>
           </a:prstGeom>
-        </p:spPr>
-      </p:pic>
+          <a:noFill/>
+        </p:spPr>
+        <p:txBody>
+          <a:bodyPr wrap="square" lIns="54864" rIns="54864" tIns="27432" bIns="27432" anchor="t">
+            <a:noAutofit/>
+          </a:bodyPr>
+          <a:lstStyle/>
+          <a:p>
+            <a:pPr algn="l">
+              <a:lnSpc>
+                <a:spcPct val="115000"/>
+              </a:lnSpc>
+            </a:pPr>
+            <a:r>
+              <a:rPr sz="1000" b="1" i="0" spc="250">
+                <a:solidFill>
+                  <a:srgbClr val="26231F"/>
+                </a:solidFill>
+              </a:rPr>
+              <a:t>INSURANCE CHECK</a:t>
+            </a:r>
+          </a:p>
+        </p:txBody>
+      </p:sp>
       <p:sp>
         <p:nvSpPr>
           <p:cNvPr id="2" name="Title 1"/>
@@ -3329,8 +3447,8 @@
         </p:nvSpPr>
         <p:spPr>
           <a:xfrm>
-            <a:off x="853418" y="2057400"/>
-            <a:ext cx="6095847" cy="1554480"/>
+            <a:off x="822960" y="2606040"/>
+            <a:ext cx="5608179" cy="1188720"/>
           </a:xfrm>
         </p:spPr>
         <p:txBody>
@@ -3347,7 +3465,7 @@
             <a:r>
               <a:rPr sz="3600" b="1" i="0">
                 <a:solidFill>
-                  <a:srgbClr val="492713"/>
+                  <a:srgbClr val="26231F"/>
                 </a:solidFill>
               </a:rPr>
               <a:t>우리 보험 점검 시간</a:t>
@@ -3357,14 +3475,14 @@
       </p:sp>
       <p:sp>
         <p:nvSpPr>
-          <p:cNvPr id="4" name="한 줄 문구"/>
+          <p:cNvPr id="7" name="한 줄 문구"/>
           <p:cNvSpPr txBox="1"/>
           <p:nvPr/>
         </p:nvSpPr>
         <p:spPr>
           <a:xfrm>
-            <a:off x="853418" y="3749039"/>
-            <a:ext cx="6095847" cy="822960"/>
+            <a:off x="822960" y="3886200"/>
+            <a:ext cx="5608179" cy="822960"/>
           </a:xfrm>
           <a:prstGeom prst="rect">
             <a:avLst/>
@@ -3383,26 +3501,26 @@
               </a:lnSpc>
             </a:pPr>
             <a:r>
-              <a:rPr sz="1700" b="0" i="1">
+              <a:rPr sz="1700" b="0" i="0">
                 <a:solidFill>
-                  <a:srgbClr val="492713"/>
+                  <a:srgbClr val="26231F"/>
                 </a:solidFill>
               </a:rPr>
-              <a:t>명절에 모였을 때 같이 봅니다</a:t>
+              <a:t>가족이 모였을 때 같이 봅니다</a:t>
             </a:r>
           </a:p>
         </p:txBody>
       </p:sp>
       <p:sp>
         <p:nvSpPr>
-          <p:cNvPr id="5" name="안내 문구"/>
+          <p:cNvPr id="8" name="안내 문구"/>
           <p:cNvSpPr txBox="1"/>
           <p:nvPr/>
         </p:nvSpPr>
         <p:spPr>
           <a:xfrm>
-            <a:off x="853418" y="4617720"/>
-            <a:ext cx="6095847" cy="914400"/>
+            <a:off x="822960" y="4754880"/>
+            <a:ext cx="5608179" cy="914400"/>
           </a:xfrm>
           <a:prstGeom prst="rect">
             <a:avLst/>
@@ -3423,10 +3541,10 @@
             <a:r>
               <a:rPr sz="1400" b="0" i="0">
                 <a:solidFill>
-                  <a:srgbClr val="666666"/>
+                  <a:srgbClr val="26231F"/>
                 </a:solidFill>
               </a:rPr>
-              <a:t>가족 점검 · 2027. 00. 00</a:t>
+              <a:t>가족 점검 · 날짜 입력</a:t>
             </a:r>
           </a:p>
           <a:p>
@@ -3438,7 +3556,7 @@
             <a:r>
               <a:rPr sz="1400" b="0" i="0">
                 <a:solidFill>
-                  <a:srgbClr val="666666"/>
+                  <a:srgbClr val="26231F"/>
                 </a:solidFill>
               </a:rPr>
               <a:t>가입 내용을 정리하고 함께 확인하는 양식</a:t>
@@ -3460,7 +3578,7 @@
     <p:bg>
       <p:bgPr>
         <a:solidFill>
-          <a:srgbClr val="FBF3EF"/>
+          <a:srgbClr val="FFFFFF"/>
         </a:solidFill>
         <a:effectLst/>
       </p:bgPr>
@@ -3480,46 +3598,113 @@
         </p:nvSpPr>
         <p:spPr>
           <a:xfrm>
-            <a:off x="256032" y="256032"/>
-            <a:ext cx="11679631" cy="6345936"/>
+            <a:off x="0" y="6565392"/>
+            <a:ext cx="12191695" cy="292608"/>
+          </a:xfrm>
+          <a:prstGeom prst="rect">
+            <a:avLst/>
+          </a:prstGeom>
+          <a:solidFill>
+            <a:srgbClr val="EBC4AD"/>
+          </a:solidFill>
+          <a:ln>
+            <a:noFill/>
+          </a:ln>
+        </p:spPr>
+        <p:txBody>
+          <a:bodyPr rtlCol="0" anchor="ctr"/>
+          <a:lstStyle/>
+          <a:p>
+            <a:pPr algn="ctr"/>
+          </a:p>
+        </p:txBody>
+      </p:sp>
+      <p:sp>
+        <p:nvSpPr>
+          <p:cNvPr id="4" name="장식"/>
+          <p:cNvSpPr/>
+          <p:nvPr/>
+        </p:nvSpPr>
+        <p:spPr>
+          <a:xfrm>
+            <a:off x="640080" y="566928"/>
+            <a:ext cx="10911535" cy="10972"/>
+          </a:xfrm>
+          <a:prstGeom prst="rect">
+            <a:avLst/>
+          </a:prstGeom>
+          <a:solidFill>
+            <a:srgbClr val="26231F"/>
+          </a:solidFill>
+          <a:ln>
+            <a:noFill/>
+          </a:ln>
+        </p:spPr>
+        <p:txBody>
+          <a:bodyPr rtlCol="0" anchor="ctr"/>
+          <a:lstStyle/>
+          <a:p>
+            <a:pPr algn="ctr"/>
+          </a:p>
+        </p:txBody>
+      </p:sp>
+      <p:sp>
+        <p:nvSpPr>
+          <p:cNvPr id="5" name="상단 라벨"/>
+          <p:cNvSpPr txBox="1"/>
+          <p:nvPr/>
+        </p:nvSpPr>
+        <p:spPr>
+          <a:xfrm>
+            <a:off x="640080" y="237744"/>
+            <a:ext cx="5486400" cy="274320"/>
           </a:xfrm>
           <a:prstGeom prst="rect">
             <a:avLst/>
           </a:prstGeom>
           <a:noFill/>
-          <a:ln w="28575">
-            <a:solidFill>
-              <a:srgbClr val="995229"/>
-            </a:solidFill>
-          </a:ln>
-        </p:spPr>
-        <p:txBody>
-          <a:bodyPr rtlCol="0" anchor="ctr"/>
-          <a:lstStyle/>
-          <a:p>
-            <a:pPr algn="ctr"/>
-          </a:p>
-        </p:txBody>
-      </p:sp>
-      <p:sp>
-        <p:nvSpPr>
-          <p:cNvPr id="4" name="장식"/>
+        </p:spPr>
+        <p:txBody>
+          <a:bodyPr wrap="square" lIns="54864" rIns="54864" tIns="27432" bIns="27432" anchor="ctr">
+            <a:noAutofit/>
+          </a:bodyPr>
+          <a:lstStyle/>
+          <a:p>
+            <a:pPr algn="l">
+              <a:lnSpc>
+                <a:spcPct val="115000"/>
+              </a:lnSpc>
+            </a:pPr>
+            <a:r>
+              <a:rPr sz="900" b="1" i="0" spc="250">
+                <a:solidFill>
+                  <a:srgbClr val="26231F"/>
+                </a:solidFill>
+              </a:rPr>
+              <a:t>INSURANCE CHECK</a:t>
+            </a:r>
+          </a:p>
+        </p:txBody>
+      </p:sp>
+      <p:sp>
+        <p:nvSpPr>
+          <p:cNvPr id="6" name="포인트"/>
           <p:cNvSpPr/>
           <p:nvPr/>
         </p:nvSpPr>
         <p:spPr>
           <a:xfrm>
-            <a:off x="384048" y="384048"/>
-            <a:ext cx="11423599" cy="6089904"/>
-          </a:xfrm>
-          <a:prstGeom prst="rect">
+            <a:off x="11204143" y="246888"/>
+            <a:ext cx="237744" cy="237744"/>
+          </a:xfrm>
+          <a:prstGeom prst="ellipse">
             <a:avLst/>
           </a:prstGeom>
-          <a:noFill/>
-          <a:ln w="9525">
-            <a:solidFill>
-              <a:srgbClr val="F4DBCD"/>
-            </a:solidFill>
+          <a:solidFill>
+            <a:srgbClr val="D89C79"/>
+          </a:solidFill>
+          <a:ln>
+            <a:noFill/>
           </a:ln>
         </p:spPr>
         <p:txBody>
@@ -3542,8 +3727,8 @@
         </p:nvSpPr>
         <p:spPr>
           <a:xfrm>
-            <a:off x="822960" y="548640"/>
-            <a:ext cx="9265615" cy="822960"/>
+            <a:off x="640080" y="731520"/>
+            <a:ext cx="10911535" cy="822960"/>
           </a:xfrm>
         </p:spPr>
         <p:txBody>
@@ -3560,7 +3745,7 @@
             <a:r>
               <a:rPr sz="3000" b="1" i="0">
                 <a:solidFill>
-                  <a:srgbClr val="492713"/>
+                  <a:srgbClr val="26231F"/>
                 </a:solidFill>
               </a:rPr>
               <a:t>점검 대상 현황</a:t>
@@ -3570,15 +3755,15 @@
       </p:sp>
       <p:graphicFrame>
         <p:nvGraphicFramePr>
-          <p:cNvPr id="5" name="표"/>
+          <p:cNvPr id="7" name="표"/>
           <p:cNvGraphicFramePr>
             <a:graphicFrameLocks noGrp="1"/>
           </p:cNvGraphicFramePr>
           <p:nvPr/>
         </p:nvGraphicFramePr>
         <p:xfrm>
-          <a:off x="822960" y="1554480"/>
-          <a:ext cx="10545772" cy="3657600"/>
+          <a:off x="640080" y="1783080"/>
+          <a:ext cx="10911532" cy="3657600"/>
         </p:xfrm>
         <a:graphic>
           <a:graphicData uri="http://schemas.openxmlformats.org/drawingml/2006/table">
@@ -3587,10 +3772,10 @@
                 <a:tableStyleId>{5C22544A-7EE6-4342-B048-85BDC9FD1C3A}</a:tableStyleId>
               </a:tblPr>
               <a:tblGrid>
-                <a:gridCol w="2636443"/>
-                <a:gridCol w="2636443"/>
-                <a:gridCol w="2636443"/>
-                <a:gridCol w="2636443"/>
+                <a:gridCol w="2727883"/>
+                <a:gridCol w="2727883"/>
+                <a:gridCol w="2727883"/>
+                <a:gridCol w="2727883"/>
               </a:tblGrid>
               <a:tr h="731520">
                 <a:tc>
@@ -3602,7 +3787,7 @@
                       <a:r>
                         <a:rPr sz="1600" b="1">
                           <a:solidFill>
-                            <a:srgbClr val="FFFFFF"/>
+                            <a:srgbClr val="26231F"/>
                           </a:solidFill>
                         </a:rPr>
                         <a:t>구분</a:t>
@@ -3612,30 +3797,30 @@
                   <a:tcPr anchor="ctr" marL="73152" marR="73152">
                     <a:lnL w="9525" cap="flat" cmpd="sng" algn="ctr">
                       <a:solidFill>
-                        <a:srgbClr val="995229"/>
+                        <a:srgbClr val="D89C79"/>
                       </a:solidFill>
                       <a:prstDash val="solid"/>
                     </a:lnL>
                     <a:lnR w="9525" cap="flat" cmpd="sng" algn="ctr">
                       <a:solidFill>
-                        <a:srgbClr val="995229"/>
+                        <a:srgbClr val="D89C79"/>
                       </a:solidFill>
                       <a:prstDash val="solid"/>
                     </a:lnR>
                     <a:lnT w="9525" cap="flat" cmpd="sng" algn="ctr">
                       <a:solidFill>
-                        <a:srgbClr val="995229"/>
+                        <a:srgbClr val="D89C79"/>
                       </a:solidFill>
                       <a:prstDash val="solid"/>
                     </a:lnT>
                     <a:lnB w="9525" cap="flat" cmpd="sng" algn="ctr">
                       <a:solidFill>
-                        <a:srgbClr val="995229"/>
+                        <a:srgbClr val="D89C79"/>
                       </a:solidFill>
                       <a:prstDash val="solid"/>
                     </a:lnB>
                     <a:solidFill>
-                      <a:srgbClr val="995229"/>
+                      <a:srgbClr val="D89C79"/>
                     </a:solidFill>
                   </a:tcPr>
                 </a:tc>
@@ -3648,7 +3833,7 @@
                       <a:r>
                         <a:rPr sz="1600" b="1">
                           <a:solidFill>
-                            <a:srgbClr val="FFFFFF"/>
+                            <a:srgbClr val="26231F"/>
                           </a:solidFill>
                         </a:rPr>
                         <a:t>아빠</a:t>
@@ -3658,30 +3843,30 @@
                   <a:tcPr anchor="ctr" marL="73152" marR="73152">
                     <a:lnL w="9525" cap="flat" cmpd="sng" algn="ctr">
                       <a:solidFill>
-                        <a:srgbClr val="995229"/>
+                        <a:srgbClr val="D89C79"/>
                       </a:solidFill>
                       <a:prstDash val="solid"/>
                     </a:lnL>
                     <a:lnR w="9525" cap="flat" cmpd="sng" algn="ctr">
                       <a:solidFill>
-                        <a:srgbClr val="995229"/>
+                        <a:srgbClr val="D89C79"/>
                       </a:solidFill>
                       <a:prstDash val="solid"/>
                     </a:lnR>
                     <a:lnT w="9525" cap="flat" cmpd="sng" algn="ctr">
                       <a:solidFill>
-                        <a:srgbClr val="995229"/>
+                        <a:srgbClr val="D89C79"/>
                       </a:solidFill>
                       <a:prstDash val="solid"/>
                     </a:lnT>
                     <a:lnB w="9525" cap="flat" cmpd="sng" algn="ctr">
                       <a:solidFill>
-                        <a:srgbClr val="995229"/>
+                        <a:srgbClr val="D89C79"/>
                       </a:solidFill>
                       <a:prstDash val="solid"/>
                     </a:lnB>
                     <a:solidFill>
-                      <a:srgbClr val="995229"/>
+                      <a:srgbClr val="D89C79"/>
                     </a:solidFill>
                   </a:tcPr>
                 </a:tc>
@@ -3694,7 +3879,7 @@
                       <a:r>
                         <a:rPr sz="1600" b="1">
                           <a:solidFill>
-                            <a:srgbClr val="FFFFFF"/>
+                            <a:srgbClr val="26231F"/>
                           </a:solidFill>
                         </a:rPr>
                         <a:t>엄마</a:t>
@@ -3704,30 +3889,30 @@
                   <a:tcPr anchor="ctr" marL="73152" marR="73152">
                     <a:lnL w="9525" cap="flat" cmpd="sng" algn="ctr">
                       <a:solidFill>
-                        <a:srgbClr val="995229"/>
+                        <a:srgbClr val="D89C79"/>
                       </a:solidFill>
                       <a:prstDash val="solid"/>
                     </a:lnL>
                     <a:lnR w="9525" cap="flat" cmpd="sng" algn="ctr">
                       <a:solidFill>
-                        <a:srgbClr val="995229"/>
+                        <a:srgbClr val="D89C79"/>
                       </a:solidFill>
                       <a:prstDash val="solid"/>
                     </a:lnR>
                     <a:lnT w="9525" cap="flat" cmpd="sng" algn="ctr">
                       <a:solidFill>
-                        <a:srgbClr val="995229"/>
+                        <a:srgbClr val="D89C79"/>
                       </a:solidFill>
                       <a:prstDash val="solid"/>
                     </a:lnT>
                     <a:lnB w="9525" cap="flat" cmpd="sng" algn="ctr">
                       <a:solidFill>
-                        <a:srgbClr val="995229"/>
+                        <a:srgbClr val="D89C79"/>
                       </a:solidFill>
                       <a:prstDash val="solid"/>
                     </a:lnB>
                     <a:solidFill>
-                      <a:srgbClr val="995229"/>
+                      <a:srgbClr val="D89C79"/>
                     </a:solidFill>
                   </a:tcPr>
                 </a:tc>
@@ -3740,7 +3925,7 @@
                       <a:r>
                         <a:rPr sz="1600" b="1">
                           <a:solidFill>
-                            <a:srgbClr val="FFFFFF"/>
+                            <a:srgbClr val="26231F"/>
                           </a:solidFill>
                         </a:rPr>
                         <a:t>자녀</a:t>
@@ -3750,30 +3935,30 @@
                   <a:tcPr anchor="ctr" marL="73152" marR="73152">
                     <a:lnL w="9525" cap="flat" cmpd="sng" algn="ctr">
                       <a:solidFill>
-                        <a:srgbClr val="995229"/>
+                        <a:srgbClr val="D89C79"/>
                       </a:solidFill>
                       <a:prstDash val="solid"/>
                     </a:lnL>
                     <a:lnR w="9525" cap="flat" cmpd="sng" algn="ctr">
                       <a:solidFill>
-                        <a:srgbClr val="995229"/>
+                        <a:srgbClr val="D89C79"/>
                       </a:solidFill>
                       <a:prstDash val="solid"/>
                     </a:lnR>
                     <a:lnT w="9525" cap="flat" cmpd="sng" algn="ctr">
                       <a:solidFill>
-                        <a:srgbClr val="995229"/>
+                        <a:srgbClr val="D89C79"/>
                       </a:solidFill>
                       <a:prstDash val="solid"/>
                     </a:lnT>
                     <a:lnB w="9525" cap="flat" cmpd="sng" algn="ctr">
                       <a:solidFill>
-                        <a:srgbClr val="995229"/>
+                        <a:srgbClr val="D89C79"/>
                       </a:solidFill>
                       <a:prstDash val="solid"/>
                     </a:lnB>
                     <a:solidFill>
-                      <a:srgbClr val="995229"/>
+                      <a:srgbClr val="D89C79"/>
                     </a:solidFill>
                   </a:tcPr>
                 </a:tc>
@@ -3788,7 +3973,7 @@
                       <a:r>
                         <a:rPr sz="1600" b="1">
                           <a:solidFill>
-                            <a:srgbClr val="492713"/>
+                            <a:srgbClr val="493427"/>
                           </a:solidFill>
                         </a:rPr>
                         <a:t>이름</a:t>
@@ -3798,30 +3983,30 @@
                   <a:tcPr anchor="ctr" marL="73152" marR="73152">
                     <a:lnL w="9525" cap="flat" cmpd="sng" algn="ctr">
                       <a:solidFill>
-                        <a:srgbClr val="F4DBCD"/>
+                        <a:srgbClr val="F6E1D5"/>
                       </a:solidFill>
                       <a:prstDash val="solid"/>
                     </a:lnL>
                     <a:lnR w="9525" cap="flat" cmpd="sng" algn="ctr">
                       <a:solidFill>
-                        <a:srgbClr val="F4DBCD"/>
+                        <a:srgbClr val="F6E1D5"/>
                       </a:solidFill>
                       <a:prstDash val="solid"/>
                     </a:lnR>
                     <a:lnT w="9525" cap="flat" cmpd="sng" algn="ctr">
                       <a:solidFill>
-                        <a:srgbClr val="F4DBCD"/>
+                        <a:srgbClr val="F6E1D5"/>
                       </a:solidFill>
                       <a:prstDash val="solid"/>
                     </a:lnT>
                     <a:lnB w="9525" cap="flat" cmpd="sng" algn="ctr">
                       <a:solidFill>
-                        <a:srgbClr val="F4DBCD"/>
+                        <a:srgbClr val="F6E1D5"/>
                       </a:solidFill>
                       <a:prstDash val="solid"/>
                     </a:lnB>
                     <a:solidFill>
-                      <a:srgbClr val="F4DBCD"/>
+                      <a:srgbClr val="F6E1D5"/>
                     </a:solidFill>
                   </a:tcPr>
                 </a:tc>
@@ -3834,7 +4019,7 @@
                       <a:r>
                         <a:rPr sz="1600" b="0">
                           <a:solidFill>
-                            <a:srgbClr val="2B2B2B"/>
+                            <a:srgbClr val="26231F"/>
                           </a:solidFill>
                         </a:rPr>
                         <a:t/>
@@ -3844,25 +4029,25 @@
                   <a:tcPr anchor="ctr" marL="73152" marR="73152">
                     <a:lnL w="9525" cap="flat" cmpd="sng" algn="ctr">
                       <a:solidFill>
-                        <a:srgbClr val="F4DBCD"/>
+                        <a:srgbClr val="F6E1D5"/>
                       </a:solidFill>
                       <a:prstDash val="solid"/>
                     </a:lnL>
                     <a:lnR w="9525" cap="flat" cmpd="sng" algn="ctr">
                       <a:solidFill>
-                        <a:srgbClr val="F4DBCD"/>
+                        <a:srgbClr val="F6E1D5"/>
                       </a:solidFill>
                       <a:prstDash val="solid"/>
                     </a:lnR>
                     <a:lnT w="9525" cap="flat" cmpd="sng" algn="ctr">
                       <a:solidFill>
-                        <a:srgbClr val="F4DBCD"/>
+                        <a:srgbClr val="F6E1D5"/>
                       </a:solidFill>
                       <a:prstDash val="solid"/>
                     </a:lnT>
                     <a:lnB w="9525" cap="flat" cmpd="sng" algn="ctr">
                       <a:solidFill>
-                        <a:srgbClr val="F4DBCD"/>
+                        <a:srgbClr val="F6E1D5"/>
                       </a:solidFill>
                       <a:prstDash val="solid"/>
                     </a:lnB>
@@ -3880,7 +4065,7 @@
                       <a:r>
                         <a:rPr sz="1600" b="0">
                           <a:solidFill>
-                            <a:srgbClr val="2B2B2B"/>
+                            <a:srgbClr val="26231F"/>
                           </a:solidFill>
                         </a:rPr>
                         <a:t/>
@@ -3890,25 +4075,25 @@
                   <a:tcPr anchor="ctr" marL="73152" marR="73152">
                     <a:lnL w="9525" cap="flat" cmpd="sng" algn="ctr">
                       <a:solidFill>
-                        <a:srgbClr val="F4DBCD"/>
+                        <a:srgbClr val="F6E1D5"/>
                       </a:solidFill>
                       <a:prstDash val="solid"/>
                     </a:lnL>
                     <a:lnR w="9525" cap="flat" cmpd="sng" algn="ctr">
                       <a:solidFill>
-                        <a:srgbClr val="F4DBCD"/>
+                        <a:srgbClr val="F6E1D5"/>
                       </a:solidFill>
                       <a:prstDash val="solid"/>
                     </a:lnR>
                     <a:lnT w="9525" cap="flat" cmpd="sng" algn="ctr">
                       <a:solidFill>
-                        <a:srgbClr val="F4DBCD"/>
+                        <a:srgbClr val="F6E1D5"/>
                       </a:solidFill>
                       <a:prstDash val="solid"/>
                     </a:lnT>
                     <a:lnB w="9525" cap="flat" cmpd="sng" algn="ctr">
                       <a:solidFill>
-                        <a:srgbClr val="F4DBCD"/>
+                        <a:srgbClr val="F6E1D5"/>
                       </a:solidFill>
                       <a:prstDash val="solid"/>
                     </a:lnB>
@@ -3926,7 +4111,7 @@
                       <a:r>
                         <a:rPr sz="1600" b="0">
                           <a:solidFill>
-                            <a:srgbClr val="2B2B2B"/>
+                            <a:srgbClr val="26231F"/>
                           </a:solidFill>
                         </a:rPr>
                         <a:t/>
@@ -3936,25 +4121,25 @@
                   <a:tcPr anchor="ctr" marL="73152" marR="73152">
                     <a:lnL w="9525" cap="flat" cmpd="sng" algn="ctr">
                       <a:solidFill>
-                        <a:srgbClr val="F4DBCD"/>
+                        <a:srgbClr val="F6E1D5"/>
                       </a:solidFill>
                       <a:prstDash val="solid"/>
                     </a:lnL>
                     <a:lnR w="9525" cap="flat" cmpd="sng" algn="ctr">
                       <a:solidFill>
-                        <a:srgbClr val="F4DBCD"/>
+                        <a:srgbClr val="F6E1D5"/>
                       </a:solidFill>
                       <a:prstDash val="solid"/>
                     </a:lnR>
                     <a:lnT w="9525" cap="flat" cmpd="sng" algn="ctr">
                       <a:solidFill>
-                        <a:srgbClr val="F4DBCD"/>
+                        <a:srgbClr val="F6E1D5"/>
                       </a:solidFill>
                       <a:prstDash val="solid"/>
                     </a:lnT>
                     <a:lnB w="9525" cap="flat" cmpd="sng" algn="ctr">
                       <a:solidFill>
-                        <a:srgbClr val="F4DBCD"/>
+                        <a:srgbClr val="F6E1D5"/>
                       </a:solidFill>
                       <a:prstDash val="solid"/>
                     </a:lnB>
@@ -3974,7 +4159,7 @@
                       <a:r>
                         <a:rPr sz="1600" b="1">
                           <a:solidFill>
-                            <a:srgbClr val="492713"/>
+                            <a:srgbClr val="493427"/>
                           </a:solidFill>
                         </a:rPr>
                         <a:t>나이</a:t>
@@ -3984,30 +4169,30 @@
                   <a:tcPr anchor="ctr" marL="73152" marR="73152">
                     <a:lnL w="9525" cap="flat" cmpd="sng" algn="ctr">
                       <a:solidFill>
-                        <a:srgbClr val="F4DBCD"/>
+                        <a:srgbClr val="F6E1D5"/>
                       </a:solidFill>
                       <a:prstDash val="solid"/>
                     </a:lnL>
                     <a:lnR w="9525" cap="flat" cmpd="sng" algn="ctr">
                       <a:solidFill>
-                        <a:srgbClr val="F4DBCD"/>
+                        <a:srgbClr val="F6E1D5"/>
                       </a:solidFill>
                       <a:prstDash val="solid"/>
                     </a:lnR>
                     <a:lnT w="9525" cap="flat" cmpd="sng" algn="ctr">
                       <a:solidFill>
-                        <a:srgbClr val="F4DBCD"/>
+                        <a:srgbClr val="F6E1D5"/>
                       </a:solidFill>
                       <a:prstDash val="solid"/>
                     </a:lnT>
                     <a:lnB w="9525" cap="flat" cmpd="sng" algn="ctr">
                       <a:solidFill>
-                        <a:srgbClr val="F4DBCD"/>
+                        <a:srgbClr val="F6E1D5"/>
                       </a:solidFill>
                       <a:prstDash val="solid"/>
                     </a:lnB>
                     <a:solidFill>
-                      <a:srgbClr val="F4DBCD"/>
+                      <a:srgbClr val="F6E1D5"/>
                     </a:solidFill>
                   </a:tcPr>
                 </a:tc>
@@ -4020,7 +4205,7 @@
                       <a:r>
                         <a:rPr sz="1600" b="0">
                           <a:solidFill>
-                            <a:srgbClr val="2B2B2B"/>
+                            <a:srgbClr val="26231F"/>
                           </a:solidFill>
                         </a:rPr>
                         <a:t/>
@@ -4030,30 +4215,30 @@
                   <a:tcPr anchor="ctr" marL="73152" marR="73152">
                     <a:lnL w="9525" cap="flat" cmpd="sng" algn="ctr">
                       <a:solidFill>
-                        <a:srgbClr val="F4DBCD"/>
+                        <a:srgbClr val="F6E1D5"/>
                       </a:solidFill>
                       <a:prstDash val="solid"/>
                     </a:lnL>
                     <a:lnR w="9525" cap="flat" cmpd="sng" algn="ctr">
                       <a:solidFill>
-                        <a:srgbClr val="F4DBCD"/>
+                        <a:srgbClr val="F6E1D5"/>
                       </a:solidFill>
                       <a:prstDash val="solid"/>
                     </a:lnR>
                     <a:lnT w="9525" cap="flat" cmpd="sng" algn="ctr">
                       <a:solidFill>
-                        <a:srgbClr val="F4DBCD"/>
+                        <a:srgbClr val="F6E1D5"/>
                       </a:solidFill>
                       <a:prstDash val="solid"/>
                     </a:lnT>
                     <a:lnB w="9525" cap="flat" cmpd="sng" algn="ctr">
                       <a:solidFill>
-                        <a:srgbClr val="F4DBCD"/>
+                        <a:srgbClr val="F6E1D5"/>
                       </a:solidFill>
                       <a:prstDash val="solid"/>
                     </a:lnB>
                     <a:solidFill>
-                      <a:srgbClr val="FBF3EF"/>
+                      <a:srgbClr val="FBF2EC"/>
                     </a:solidFill>
                   </a:tcPr>
                 </a:tc>
@@ -4066,7 +4251,7 @@
                       <a:r>
                         <a:rPr sz="1600" b="0">
                           <a:solidFill>
-                            <a:srgbClr val="2B2B2B"/>
+                            <a:srgbClr val="26231F"/>
                           </a:solidFill>
                         </a:rPr>
                         <a:t/>
@@ -4076,30 +4261,30 @@
                   <a:tcPr anchor="ctr" marL="73152" marR="73152">
                     <a:lnL w="9525" cap="flat" cmpd="sng" algn="ctr">
                       <a:solidFill>
-                        <a:srgbClr val="F4DBCD"/>
+                        <a:srgbClr val="F6E1D5"/>
                       </a:solidFill>
                       <a:prstDash val="solid"/>
                     </a:lnL>
                     <a:lnR w="9525" cap="flat" cmpd="sng" algn="ctr">
                       <a:solidFill>
-                        <a:srgbClr val="F4DBCD"/>
+                        <a:srgbClr val="F6E1D5"/>
                       </a:solidFill>
                       <a:prstDash val="solid"/>
                     </a:lnR>
                     <a:lnT w="9525" cap="flat" cmpd="sng" algn="ctr">
                       <a:solidFill>
-                        <a:srgbClr val="F4DBCD"/>
+                        <a:srgbClr val="F6E1D5"/>
                       </a:solidFill>
                       <a:prstDash val="solid"/>
                     </a:lnT>
                     <a:lnB w="9525" cap="flat" cmpd="sng" algn="ctr">
                       <a:solidFill>
-                        <a:srgbClr val="F4DBCD"/>
+                        <a:srgbClr val="F6E1D5"/>
                       </a:solidFill>
                       <a:prstDash val="solid"/>
                     </a:lnB>
                     <a:solidFill>
-                      <a:srgbClr val="FBF3EF"/>
+                      <a:srgbClr val="FBF2EC"/>
                     </a:solidFill>
                   </a:tcPr>
                 </a:tc>
@@ -4112,7 +4297,7 @@
                       <a:r>
                         <a:rPr sz="1600" b="0">
                           <a:solidFill>
-                            <a:srgbClr val="2B2B2B"/>
+                            <a:srgbClr val="26231F"/>
                           </a:solidFill>
                         </a:rPr>
                         <a:t/>
@@ -4122,30 +4307,30 @@
                   <a:tcPr anchor="ctr" marL="73152" marR="73152">
                     <a:lnL w="9525" cap="flat" cmpd="sng" algn="ctr">
                       <a:solidFill>
-                        <a:srgbClr val="F4DBCD"/>
+                        <a:srgbClr val="F6E1D5"/>
                       </a:solidFill>
                       <a:prstDash val="solid"/>
                     </a:lnL>
                     <a:lnR w="9525" cap="flat" cmpd="sng" algn="ctr">
                       <a:solidFill>
-                        <a:srgbClr val="F4DBCD"/>
+                        <a:srgbClr val="F6E1D5"/>
                       </a:solidFill>
                       <a:prstDash val="solid"/>
                     </a:lnR>
                     <a:lnT w="9525" cap="flat" cmpd="sng" algn="ctr">
                       <a:solidFill>
-                        <a:srgbClr val="F4DBCD"/>
+                        <a:srgbClr val="F6E1D5"/>
                       </a:solidFill>
                       <a:prstDash val="solid"/>
                     </a:lnT>
                     <a:lnB w="9525" cap="flat" cmpd="sng" algn="ctr">
                       <a:solidFill>
-                        <a:srgbClr val="F4DBCD"/>
+                        <a:srgbClr val="F6E1D5"/>
                       </a:solidFill>
                       <a:prstDash val="solid"/>
                     </a:lnB>
                     <a:solidFill>
-                      <a:srgbClr val="FBF3EF"/>
+                      <a:srgbClr val="FBF2EC"/>
                     </a:solidFill>
                   </a:tcPr>
                 </a:tc>
@@ -4160,7 +4345,7 @@
                       <a:r>
                         <a:rPr sz="1600" b="1">
                           <a:solidFill>
-                            <a:srgbClr val="492713"/>
+                            <a:srgbClr val="493427"/>
                           </a:solidFill>
                         </a:rPr>
                         <a:t>직업·학교</a:t>
@@ -4170,30 +4355,30 @@
                   <a:tcPr anchor="ctr" marL="73152" marR="73152">
                     <a:lnL w="9525" cap="flat" cmpd="sng" algn="ctr">
                       <a:solidFill>
-                        <a:srgbClr val="F4DBCD"/>
+                        <a:srgbClr val="F6E1D5"/>
                       </a:solidFill>
                       <a:prstDash val="solid"/>
                     </a:lnL>
                     <a:lnR w="9525" cap="flat" cmpd="sng" algn="ctr">
                       <a:solidFill>
-                        <a:srgbClr val="F4DBCD"/>
+                        <a:srgbClr val="F6E1D5"/>
                       </a:solidFill>
                       <a:prstDash val="solid"/>
                     </a:lnR>
                     <a:lnT w="9525" cap="flat" cmpd="sng" algn="ctr">
                       <a:solidFill>
-                        <a:srgbClr val="F4DBCD"/>
+                        <a:srgbClr val="F6E1D5"/>
                       </a:solidFill>
                       <a:prstDash val="solid"/>
                     </a:lnT>
                     <a:lnB w="9525" cap="flat" cmpd="sng" algn="ctr">
                       <a:solidFill>
-                        <a:srgbClr val="F4DBCD"/>
+                        <a:srgbClr val="F6E1D5"/>
                       </a:solidFill>
                       <a:prstDash val="solid"/>
                     </a:lnB>
                     <a:solidFill>
-                      <a:srgbClr val="F4DBCD"/>
+                      <a:srgbClr val="F6E1D5"/>
                     </a:solidFill>
                   </a:tcPr>
                 </a:tc>
@@ -4206,7 +4391,7 @@
                       <a:r>
                         <a:rPr sz="1600" b="0">
                           <a:solidFill>
-                            <a:srgbClr val="2B2B2B"/>
+                            <a:srgbClr val="26231F"/>
                           </a:solidFill>
                         </a:rPr>
                         <a:t/>
@@ -4216,25 +4401,25 @@
                   <a:tcPr anchor="ctr" marL="73152" marR="73152">
                     <a:lnL w="9525" cap="flat" cmpd="sng" algn="ctr">
                       <a:solidFill>
-                        <a:srgbClr val="F4DBCD"/>
+                        <a:srgbClr val="F6E1D5"/>
                       </a:solidFill>
                       <a:prstDash val="solid"/>
                     </a:lnL>
                     <a:lnR w="9525" cap="flat" cmpd="sng" algn="ctr">
                       <a:solidFill>
-                        <a:srgbClr val="F4DBCD"/>
+                        <a:srgbClr val="F6E1D5"/>
                       </a:solidFill>
                       <a:prstDash val="solid"/>
                     </a:lnR>
                     <a:lnT w="9525" cap="flat" cmpd="sng" algn="ctr">
                       <a:solidFill>
-                        <a:srgbClr val="F4DBCD"/>
+                        <a:srgbClr val="F6E1D5"/>
                       </a:solidFill>
                       <a:prstDash val="solid"/>
                     </a:lnT>
                     <a:lnB w="9525" cap="flat" cmpd="sng" algn="ctr">
                       <a:solidFill>
-                        <a:srgbClr val="F4DBCD"/>
+                        <a:srgbClr val="F6E1D5"/>
                       </a:solidFill>
                       <a:prstDash val="solid"/>
                     </a:lnB>
@@ -4252,7 +4437,7 @@
                       <a:r>
                         <a:rPr sz="1600" b="0">
                           <a:solidFill>
-                            <a:srgbClr val="2B2B2B"/>
+                            <a:srgbClr val="26231F"/>
                           </a:solidFill>
                         </a:rPr>
                         <a:t/>
@@ -4262,25 +4447,25 @@
                   <a:tcPr anchor="ctr" marL="73152" marR="73152">
                     <a:lnL w="9525" cap="flat" cmpd="sng" algn="ctr">
                       <a:solidFill>
-                        <a:srgbClr val="F4DBCD"/>
+                        <a:srgbClr val="F6E1D5"/>
                       </a:solidFill>
                       <a:prstDash val="solid"/>
                     </a:lnL>
                     <a:lnR w="9525" cap="flat" cmpd="sng" algn="ctr">
                       <a:solidFill>
-                        <a:srgbClr val="F4DBCD"/>
+                        <a:srgbClr val="F6E1D5"/>
                       </a:solidFill>
                       <a:prstDash val="solid"/>
                     </a:lnR>
                     <a:lnT w="9525" cap="flat" cmpd="sng" algn="ctr">
                       <a:solidFill>
-                        <a:srgbClr val="F4DBCD"/>
+                        <a:srgbClr val="F6E1D5"/>
                       </a:solidFill>
                       <a:prstDash val="solid"/>
                     </a:lnT>
                     <a:lnB w="9525" cap="flat" cmpd="sng" algn="ctr">
                       <a:solidFill>
-                        <a:srgbClr val="F4DBCD"/>
+                        <a:srgbClr val="F6E1D5"/>
                       </a:solidFill>
                       <a:prstDash val="solid"/>
                     </a:lnB>
@@ -4298,7 +4483,7 @@
                       <a:r>
                         <a:rPr sz="1600" b="0">
                           <a:solidFill>
-                            <a:srgbClr val="2B2B2B"/>
+                            <a:srgbClr val="26231F"/>
                           </a:solidFill>
                         </a:rPr>
                         <a:t/>
@@ -4308,25 +4493,25 @@
                   <a:tcPr anchor="ctr" marL="73152" marR="73152">
                     <a:lnL w="9525" cap="flat" cmpd="sng" algn="ctr">
                       <a:solidFill>
-                        <a:srgbClr val="F4DBCD"/>
+                        <a:srgbClr val="F6E1D5"/>
                       </a:solidFill>
                       <a:prstDash val="solid"/>
                     </a:lnL>
                     <a:lnR w="9525" cap="flat" cmpd="sng" algn="ctr">
                       <a:solidFill>
-                        <a:srgbClr val="F4DBCD"/>
+                        <a:srgbClr val="F6E1D5"/>
                       </a:solidFill>
                       <a:prstDash val="solid"/>
                     </a:lnR>
                     <a:lnT w="9525" cap="flat" cmpd="sng" algn="ctr">
                       <a:solidFill>
-                        <a:srgbClr val="F4DBCD"/>
+                        <a:srgbClr val="F6E1D5"/>
                       </a:solidFill>
                       <a:prstDash val="solid"/>
                     </a:lnT>
                     <a:lnB w="9525" cap="flat" cmpd="sng" algn="ctr">
                       <a:solidFill>
-                        <a:srgbClr val="F4DBCD"/>
+                        <a:srgbClr val="F6E1D5"/>
                       </a:solidFill>
                       <a:prstDash val="solid"/>
                     </a:lnB>
@@ -4346,7 +4531,7 @@
                       <a:r>
                         <a:rPr sz="1600" b="1">
                           <a:solidFill>
-                            <a:srgbClr val="492713"/>
+                            <a:srgbClr val="493427"/>
                           </a:solidFill>
                         </a:rPr>
                         <a:t>메모</a:t>
@@ -4356,30 +4541,30 @@
                   <a:tcPr anchor="ctr" marL="73152" marR="73152">
                     <a:lnL w="9525" cap="flat" cmpd="sng" algn="ctr">
                       <a:solidFill>
-                        <a:srgbClr val="F4DBCD"/>
+                        <a:srgbClr val="F6E1D5"/>
                       </a:solidFill>
                       <a:prstDash val="solid"/>
                     </a:lnL>
                     <a:lnR w="9525" cap="flat" cmpd="sng" algn="ctr">
                       <a:solidFill>
-                        <a:srgbClr val="F4DBCD"/>
+                        <a:srgbClr val="F6E1D5"/>
                       </a:solidFill>
                       <a:prstDash val="solid"/>
                     </a:lnR>
                     <a:lnT w="9525" cap="flat" cmpd="sng" algn="ctr">
                       <a:solidFill>
-                        <a:srgbClr val="F4DBCD"/>
+                        <a:srgbClr val="F6E1D5"/>
                       </a:solidFill>
                       <a:prstDash val="solid"/>
                     </a:lnT>
                     <a:lnB w="9525" cap="flat" cmpd="sng" algn="ctr">
                       <a:solidFill>
-                        <a:srgbClr val="F4DBCD"/>
+                        <a:srgbClr val="F6E1D5"/>
                       </a:solidFill>
                       <a:prstDash val="solid"/>
                     </a:lnB>
                     <a:solidFill>
-                      <a:srgbClr val="F4DBCD"/>
+                      <a:srgbClr val="F6E1D5"/>
                     </a:solidFill>
                   </a:tcPr>
                 </a:tc>
@@ -4392,7 +4577,7 @@
                       <a:r>
                         <a:rPr sz="1600" b="0">
                           <a:solidFill>
-                            <a:srgbClr val="2B2B2B"/>
+                            <a:srgbClr val="26231F"/>
                           </a:solidFill>
                         </a:rPr>
                         <a:t/>
@@ -4402,30 +4587,30 @@
                   <a:tcPr anchor="ctr" marL="73152" marR="73152">
                     <a:lnL w="9525" cap="flat" cmpd="sng" algn="ctr">
                       <a:solidFill>
-                        <a:srgbClr val="F4DBCD"/>
+                        <a:srgbClr val="F6E1D5"/>
                       </a:solidFill>
                       <a:prstDash val="solid"/>
                     </a:lnL>
                     <a:lnR w="9525" cap="flat" cmpd="sng" algn="ctr">
                       <a:solidFill>
-                        <a:srgbClr val="F4DBCD"/>
+                        <a:srgbClr val="F6E1D5"/>
                       </a:solidFill>
                       <a:prstDash val="solid"/>
                     </a:lnR>
                     <a:lnT w="9525" cap="flat" cmpd="sng" algn="ctr">
                       <a:solidFill>
-                        <a:srgbClr val="F4DBCD"/>
+                        <a:srgbClr val="F6E1D5"/>
                       </a:solidFill>
                       <a:prstDash val="solid"/>
                     </a:lnT>
                     <a:lnB w="9525" cap="flat" cmpd="sng" algn="ctr">
                       <a:solidFill>
-                        <a:srgbClr val="F4DBCD"/>
+                        <a:srgbClr val="F6E1D5"/>
                       </a:solidFill>
                       <a:prstDash val="solid"/>
                     </a:lnB>
                     <a:solidFill>
-                      <a:srgbClr val="FBF3EF"/>
+                      <a:srgbClr val="FBF2EC"/>
                     </a:solidFill>
                   </a:tcPr>
                 </a:tc>
@@ -4438,7 +4623,7 @@
                       <a:r>
                         <a:rPr sz="1600" b="0">
                           <a:solidFill>
-                            <a:srgbClr val="2B2B2B"/>
+                            <a:srgbClr val="26231F"/>
                           </a:solidFill>
                         </a:rPr>
                         <a:t/>
@@ -4448,30 +4633,30 @@
                   <a:tcPr anchor="ctr" marL="73152" marR="73152">
                     <a:lnL w="9525" cap="flat" cmpd="sng" algn="ctr">
                       <a:solidFill>
-                        <a:srgbClr val="F4DBCD"/>
+                        <a:srgbClr val="F6E1D5"/>
                       </a:solidFill>
                       <a:prstDash val="solid"/>
                     </a:lnL>
                     <a:lnR w="9525" cap="flat" cmpd="sng" algn="ctr">
                       <a:solidFill>
-                        <a:srgbClr val="F4DBCD"/>
+                        <a:srgbClr val="F6E1D5"/>
                       </a:solidFill>
                       <a:prstDash val="solid"/>
                     </a:lnR>
                     <a:lnT w="9525" cap="flat" cmpd="sng" algn="ctr">
                       <a:solidFill>
-                        <a:srgbClr val="F4DBCD"/>
+                        <a:srgbClr val="F6E1D5"/>
                       </a:solidFill>
                       <a:prstDash val="solid"/>
                     </a:lnT>
                     <a:lnB w="9525" cap="flat" cmpd="sng" algn="ctr">
                       <a:solidFill>
-                        <a:srgbClr val="F4DBCD"/>
+                        <a:srgbClr val="F6E1D5"/>
                       </a:solidFill>
                       <a:prstDash val="solid"/>
                     </a:lnB>
                     <a:solidFill>
-                      <a:srgbClr val="FBF3EF"/>
+                      <a:srgbClr val="FBF2EC"/>
                     </a:solidFill>
                   </a:tcPr>
                 </a:tc>
@@ -4484,7 +4669,7 @@
                       <a:r>
                         <a:rPr sz="1600" b="0">
                           <a:solidFill>
-                            <a:srgbClr val="2B2B2B"/>
+                            <a:srgbClr val="26231F"/>
                           </a:solidFill>
                         </a:rPr>
                         <a:t/>
@@ -4494,30 +4679,30 @@
                   <a:tcPr anchor="ctr" marL="73152" marR="73152">
                     <a:lnL w="9525" cap="flat" cmpd="sng" algn="ctr">
                       <a:solidFill>
-                        <a:srgbClr val="F4DBCD"/>
+                        <a:srgbClr val="F6E1D5"/>
                       </a:solidFill>
                       <a:prstDash val="solid"/>
                     </a:lnL>
                     <a:lnR w="9525" cap="flat" cmpd="sng" algn="ctr">
                       <a:solidFill>
-                        <a:srgbClr val="F4DBCD"/>
+                        <a:srgbClr val="F6E1D5"/>
                       </a:solidFill>
                       <a:prstDash val="solid"/>
                     </a:lnR>
                     <a:lnT w="9525" cap="flat" cmpd="sng" algn="ctr">
                       <a:solidFill>
-                        <a:srgbClr val="F4DBCD"/>
+                        <a:srgbClr val="F6E1D5"/>
                       </a:solidFill>
                       <a:prstDash val="solid"/>
                     </a:lnT>
                     <a:lnB w="9525" cap="flat" cmpd="sng" algn="ctr">
                       <a:solidFill>
-                        <a:srgbClr val="F4DBCD"/>
+                        <a:srgbClr val="F6E1D5"/>
                       </a:solidFill>
                       <a:prstDash val="solid"/>
                     </a:lnB>
                     <a:solidFill>
-                      <a:srgbClr val="FBF3EF"/>
+                      <a:srgbClr val="FBF2EC"/>
                     </a:solidFill>
                   </a:tcPr>
                 </a:tc>
@@ -4540,7 +4725,7 @@
     <p:bg>
       <p:bgPr>
         <a:solidFill>
-          <a:srgbClr val="FBF3EF"/>
+          <a:srgbClr val="FFFFFF"/>
         </a:solidFill>
         <a:effectLst/>
       </p:bgPr>
@@ -4560,46 +4745,113 @@
         </p:nvSpPr>
         <p:spPr>
           <a:xfrm>
-            <a:off x="256032" y="256032"/>
-            <a:ext cx="11679631" cy="6345936"/>
+            <a:off x="0" y="6565392"/>
+            <a:ext cx="12191695" cy="292608"/>
+          </a:xfrm>
+          <a:prstGeom prst="rect">
+            <a:avLst/>
+          </a:prstGeom>
+          <a:solidFill>
+            <a:srgbClr val="EBC4AD"/>
+          </a:solidFill>
+          <a:ln>
+            <a:noFill/>
+          </a:ln>
+        </p:spPr>
+        <p:txBody>
+          <a:bodyPr rtlCol="0" anchor="ctr"/>
+          <a:lstStyle/>
+          <a:p>
+            <a:pPr algn="ctr"/>
+          </a:p>
+        </p:txBody>
+      </p:sp>
+      <p:sp>
+        <p:nvSpPr>
+          <p:cNvPr id="4" name="장식"/>
+          <p:cNvSpPr/>
+          <p:nvPr/>
+        </p:nvSpPr>
+        <p:spPr>
+          <a:xfrm>
+            <a:off x="640080" y="566928"/>
+            <a:ext cx="10911535" cy="10972"/>
+          </a:xfrm>
+          <a:prstGeom prst="rect">
+            <a:avLst/>
+          </a:prstGeom>
+          <a:solidFill>
+            <a:srgbClr val="26231F"/>
+          </a:solidFill>
+          <a:ln>
+            <a:noFill/>
+          </a:ln>
+        </p:spPr>
+        <p:txBody>
+          <a:bodyPr rtlCol="0" anchor="ctr"/>
+          <a:lstStyle/>
+          <a:p>
+            <a:pPr algn="ctr"/>
+          </a:p>
+        </p:txBody>
+      </p:sp>
+      <p:sp>
+        <p:nvSpPr>
+          <p:cNvPr id="5" name="상단 라벨"/>
+          <p:cNvSpPr txBox="1"/>
+          <p:nvPr/>
+        </p:nvSpPr>
+        <p:spPr>
+          <a:xfrm>
+            <a:off x="640080" y="237744"/>
+            <a:ext cx="5486400" cy="274320"/>
           </a:xfrm>
           <a:prstGeom prst="rect">
             <a:avLst/>
           </a:prstGeom>
           <a:noFill/>
-          <a:ln w="28575">
-            <a:solidFill>
-              <a:srgbClr val="995229"/>
-            </a:solidFill>
-          </a:ln>
-        </p:spPr>
-        <p:txBody>
-          <a:bodyPr rtlCol="0" anchor="ctr"/>
-          <a:lstStyle/>
-          <a:p>
-            <a:pPr algn="ctr"/>
-          </a:p>
-        </p:txBody>
-      </p:sp>
-      <p:sp>
-        <p:nvSpPr>
-          <p:cNvPr id="4" name="장식"/>
+        </p:spPr>
+        <p:txBody>
+          <a:bodyPr wrap="square" lIns="54864" rIns="54864" tIns="27432" bIns="27432" anchor="ctr">
+            <a:noAutofit/>
+          </a:bodyPr>
+          <a:lstStyle/>
+          <a:p>
+            <a:pPr algn="l">
+              <a:lnSpc>
+                <a:spcPct val="115000"/>
+              </a:lnSpc>
+            </a:pPr>
+            <a:r>
+              <a:rPr sz="900" b="1" i="0" spc="250">
+                <a:solidFill>
+                  <a:srgbClr val="26231F"/>
+                </a:solidFill>
+              </a:rPr>
+              <a:t>INSURANCE CHECK</a:t>
+            </a:r>
+          </a:p>
+        </p:txBody>
+      </p:sp>
+      <p:sp>
+        <p:nvSpPr>
+          <p:cNvPr id="6" name="포인트"/>
           <p:cNvSpPr/>
           <p:nvPr/>
         </p:nvSpPr>
         <p:spPr>
           <a:xfrm>
-            <a:off x="384048" y="384048"/>
-            <a:ext cx="11423599" cy="6089904"/>
-          </a:xfrm>
-          <a:prstGeom prst="rect">
+            <a:off x="11204143" y="246888"/>
+            <a:ext cx="237744" cy="237744"/>
+          </a:xfrm>
+          <a:prstGeom prst="ellipse">
             <a:avLst/>
           </a:prstGeom>
-          <a:noFill/>
-          <a:ln w="9525">
-            <a:solidFill>
-              <a:srgbClr val="F4DBCD"/>
-            </a:solidFill>
+          <a:solidFill>
+            <a:srgbClr val="D89C79"/>
+          </a:solidFill>
+          <a:ln>
+            <a:noFill/>
           </a:ln>
         </p:spPr>
         <p:txBody>
@@ -4622,8 +4874,8 @@
         </p:nvSpPr>
         <p:spPr>
           <a:xfrm>
-            <a:off x="822960" y="548640"/>
-            <a:ext cx="9265615" cy="822960"/>
+            <a:off x="640080" y="731520"/>
+            <a:ext cx="10911535" cy="822960"/>
           </a:xfrm>
         </p:spPr>
         <p:txBody>
@@ -4640,7 +4892,7 @@
             <a:r>
               <a:rPr sz="3000" b="1" i="0">
                 <a:solidFill>
-                  <a:srgbClr val="492713"/>
+                  <a:srgbClr val="26231F"/>
                 </a:solidFill>
               </a:rPr>
               <a:t>가입한 보험 목록</a:t>
@@ -4650,15 +4902,15 @@
       </p:sp>
       <p:graphicFrame>
         <p:nvGraphicFramePr>
-          <p:cNvPr id="5" name="표"/>
+          <p:cNvPr id="7" name="표"/>
           <p:cNvGraphicFramePr>
             <a:graphicFrameLocks noGrp="1"/>
           </p:cNvGraphicFramePr>
           <p:nvPr/>
         </p:nvGraphicFramePr>
         <p:xfrm>
-          <a:off x="822960" y="1554480"/>
-          <a:ext cx="10545775" cy="4224528"/>
+          <a:off x="640080" y="1783080"/>
+          <a:ext cx="10911535" cy="4224528"/>
         </p:xfrm>
         <a:graphic>
           <a:graphicData uri="http://schemas.openxmlformats.org/drawingml/2006/table">
@@ -4671,7 +4923,7 @@
                 <a:gridCol w="3108960"/>
                 <a:gridCol w="1828800"/>
                 <a:gridCol w="1828800"/>
-                <a:gridCol w="1767535"/>
+                <a:gridCol w="2133295"/>
               </a:tblGrid>
               <a:tr h="603504">
                 <a:tc>
@@ -4683,7 +4935,7 @@
                       <a:r>
                         <a:rPr sz="1400" b="1">
                           <a:solidFill>
-                            <a:srgbClr val="FFFFFF"/>
+                            <a:srgbClr val="26231F"/>
                           </a:solidFill>
                         </a:rPr>
                         <a:t>보험회사</a:t>
@@ -4693,30 +4945,30 @@
                   <a:tcPr anchor="ctr" marL="73152" marR="73152">
                     <a:lnL w="9525" cap="flat" cmpd="sng" algn="ctr">
                       <a:solidFill>
-                        <a:srgbClr val="995229"/>
+                        <a:srgbClr val="D89C79"/>
                       </a:solidFill>
                       <a:prstDash val="solid"/>
                     </a:lnL>
                     <a:lnR w="9525" cap="flat" cmpd="sng" algn="ctr">
                       <a:solidFill>
-                        <a:srgbClr val="995229"/>
+                        <a:srgbClr val="D89C79"/>
                       </a:solidFill>
                       <a:prstDash val="solid"/>
                     </a:lnR>
                     <a:lnT w="9525" cap="flat" cmpd="sng" algn="ctr">
                       <a:solidFill>
-                        <a:srgbClr val="995229"/>
+                        <a:srgbClr val="D89C79"/>
                       </a:solidFill>
                       <a:prstDash val="solid"/>
                     </a:lnT>
                     <a:lnB w="9525" cap="flat" cmpd="sng" algn="ctr">
                       <a:solidFill>
-                        <a:srgbClr val="995229"/>
+                        <a:srgbClr val="D89C79"/>
                       </a:solidFill>
                       <a:prstDash val="solid"/>
                     </a:lnB>
                     <a:solidFill>
-                      <a:srgbClr val="995229"/>
+                      <a:srgbClr val="D89C79"/>
                     </a:solidFill>
                   </a:tcPr>
                 </a:tc>
@@ -4729,7 +4981,7 @@
                       <a:r>
                         <a:rPr sz="1400" b="1">
                           <a:solidFill>
-                            <a:srgbClr val="FFFFFF"/>
+                            <a:srgbClr val="26231F"/>
                           </a:solidFill>
                         </a:rPr>
                         <a:t>상품명</a:t>
@@ -4739,30 +4991,30 @@
                   <a:tcPr anchor="ctr" marL="73152" marR="73152">
                     <a:lnL w="9525" cap="flat" cmpd="sng" algn="ctr">
                       <a:solidFill>
-                        <a:srgbClr val="995229"/>
+                        <a:srgbClr val="D89C79"/>
                       </a:solidFill>
                       <a:prstDash val="solid"/>
                     </a:lnL>
                     <a:lnR w="9525" cap="flat" cmpd="sng" algn="ctr">
                       <a:solidFill>
-                        <a:srgbClr val="995229"/>
+                        <a:srgbClr val="D89C79"/>
                       </a:solidFill>
                       <a:prstDash val="solid"/>
                     </a:lnR>
                     <a:lnT w="9525" cap="flat" cmpd="sng" algn="ctr">
                       <a:solidFill>
-                        <a:srgbClr val="995229"/>
+                        <a:srgbClr val="D89C79"/>
                       </a:solidFill>
                       <a:prstDash val="solid"/>
                     </a:lnT>
                     <a:lnB w="9525" cap="flat" cmpd="sng" algn="ctr">
                       <a:solidFill>
-                        <a:srgbClr val="995229"/>
+                        <a:srgbClr val="D89C79"/>
                       </a:solidFill>
                       <a:prstDash val="solid"/>
                     </a:lnB>
                     <a:solidFill>
-                      <a:srgbClr val="995229"/>
+                      <a:srgbClr val="D89C79"/>
                     </a:solidFill>
                   </a:tcPr>
                 </a:tc>
@@ -4775,7 +5027,7 @@
                       <a:r>
                         <a:rPr sz="1400" b="1">
                           <a:solidFill>
-                            <a:srgbClr val="FFFFFF"/>
+                            <a:srgbClr val="26231F"/>
                           </a:solidFill>
                         </a:rPr>
                         <a:t>종류</a:t>
@@ -4785,30 +5037,30 @@
                   <a:tcPr anchor="ctr" marL="73152" marR="73152">
                     <a:lnL w="9525" cap="flat" cmpd="sng" algn="ctr">
                       <a:solidFill>
-                        <a:srgbClr val="995229"/>
+                        <a:srgbClr val="D89C79"/>
                       </a:solidFill>
                       <a:prstDash val="solid"/>
                     </a:lnL>
                     <a:lnR w="9525" cap="flat" cmpd="sng" algn="ctr">
                       <a:solidFill>
-                        <a:srgbClr val="995229"/>
+                        <a:srgbClr val="D89C79"/>
                       </a:solidFill>
                       <a:prstDash val="solid"/>
                     </a:lnR>
                     <a:lnT w="9525" cap="flat" cmpd="sng" algn="ctr">
                       <a:solidFill>
-                        <a:srgbClr val="995229"/>
+                        <a:srgbClr val="D89C79"/>
                       </a:solidFill>
                       <a:prstDash val="solid"/>
                     </a:lnT>
                     <a:lnB w="9525" cap="flat" cmpd="sng" algn="ctr">
                       <a:solidFill>
-                        <a:srgbClr val="995229"/>
+                        <a:srgbClr val="D89C79"/>
                       </a:solidFill>
                       <a:prstDash val="solid"/>
                     </a:lnB>
                     <a:solidFill>
-                      <a:srgbClr val="995229"/>
+                      <a:srgbClr val="D89C79"/>
                     </a:solidFill>
                   </a:tcPr>
                 </a:tc>
@@ -4821,7 +5073,7 @@
                       <a:r>
                         <a:rPr sz="1400" b="1">
                           <a:solidFill>
-                            <a:srgbClr val="FFFFFF"/>
+                            <a:srgbClr val="26231F"/>
                           </a:solidFill>
                         </a:rPr>
                         <a:t>만기일</a:t>
@@ -4831,30 +5083,30 @@
                   <a:tcPr anchor="ctr" marL="73152" marR="73152">
                     <a:lnL w="9525" cap="flat" cmpd="sng" algn="ctr">
                       <a:solidFill>
-                        <a:srgbClr val="995229"/>
+                        <a:srgbClr val="D89C79"/>
                       </a:solidFill>
                       <a:prstDash val="solid"/>
                     </a:lnL>
                     <a:lnR w="9525" cap="flat" cmpd="sng" algn="ctr">
                       <a:solidFill>
-                        <a:srgbClr val="995229"/>
+                        <a:srgbClr val="D89C79"/>
                       </a:solidFill>
                       <a:prstDash val="solid"/>
                     </a:lnR>
                     <a:lnT w="9525" cap="flat" cmpd="sng" algn="ctr">
                       <a:solidFill>
-                        <a:srgbClr val="995229"/>
+                        <a:srgbClr val="D89C79"/>
                       </a:solidFill>
                       <a:prstDash val="solid"/>
                     </a:lnT>
                     <a:lnB w="9525" cap="flat" cmpd="sng" algn="ctr">
                       <a:solidFill>
-                        <a:srgbClr val="995229"/>
+                        <a:srgbClr val="D89C79"/>
                       </a:solidFill>
                       <a:prstDash val="solid"/>
                     </a:lnB>
                     <a:solidFill>
-                      <a:srgbClr val="995229"/>
+                      <a:srgbClr val="D89C79"/>
                     </a:solidFill>
                   </a:tcPr>
                 </a:tc>
@@ -4867,7 +5119,7 @@
                       <a:r>
                         <a:rPr sz="1400" b="1">
                           <a:solidFill>
-                            <a:srgbClr val="FFFFFF"/>
+                            <a:srgbClr val="26231F"/>
                           </a:solidFill>
                         </a:rPr>
                         <a:t>월 보험료</a:t>
@@ -4877,30 +5129,30 @@
                   <a:tcPr anchor="ctr" marL="73152" marR="73152">
                     <a:lnL w="9525" cap="flat" cmpd="sng" algn="ctr">
                       <a:solidFill>
-                        <a:srgbClr val="995229"/>
+                        <a:srgbClr val="D89C79"/>
                       </a:solidFill>
                       <a:prstDash val="solid"/>
                     </a:lnL>
                     <a:lnR w="9525" cap="flat" cmpd="sng" algn="ctr">
                       <a:solidFill>
-                        <a:srgbClr val="995229"/>
+                        <a:srgbClr val="D89C79"/>
                       </a:solidFill>
                       <a:prstDash val="solid"/>
                     </a:lnR>
                     <a:lnT w="9525" cap="flat" cmpd="sng" algn="ctr">
                       <a:solidFill>
-                        <a:srgbClr val="995229"/>
+                        <a:srgbClr val="D89C79"/>
                       </a:solidFill>
                       <a:prstDash val="solid"/>
                     </a:lnT>
                     <a:lnB w="9525" cap="flat" cmpd="sng" algn="ctr">
                       <a:solidFill>
-                        <a:srgbClr val="995229"/>
+                        <a:srgbClr val="D89C79"/>
                       </a:solidFill>
                       <a:prstDash val="solid"/>
                     </a:lnB>
                     <a:solidFill>
-                      <a:srgbClr val="995229"/>
+                      <a:srgbClr val="D89C79"/>
                     </a:solidFill>
                   </a:tcPr>
                 </a:tc>
@@ -4915,7 +5167,7 @@
                       <a:r>
                         <a:rPr sz="1400" b="0">
                           <a:solidFill>
-                            <a:srgbClr val="2B2B2B"/>
+                            <a:srgbClr val="26231F"/>
                           </a:solidFill>
                         </a:rPr>
                         <a:t/>
@@ -4925,25 +5177,25 @@
                   <a:tcPr anchor="ctr" marL="73152" marR="73152">
                     <a:lnL w="9525" cap="flat" cmpd="sng" algn="ctr">
                       <a:solidFill>
-                        <a:srgbClr val="F4DBCD"/>
+                        <a:srgbClr val="F6E1D5"/>
                       </a:solidFill>
                       <a:prstDash val="solid"/>
                     </a:lnL>
                     <a:lnR w="9525" cap="flat" cmpd="sng" algn="ctr">
                       <a:solidFill>
-                        <a:srgbClr val="F4DBCD"/>
+                        <a:srgbClr val="F6E1D5"/>
                       </a:solidFill>
                       <a:prstDash val="solid"/>
                     </a:lnR>
                     <a:lnT w="9525" cap="flat" cmpd="sng" algn="ctr">
                       <a:solidFill>
-                        <a:srgbClr val="F4DBCD"/>
+                        <a:srgbClr val="F6E1D5"/>
                       </a:solidFill>
                       <a:prstDash val="solid"/>
                     </a:lnT>
                     <a:lnB w="9525" cap="flat" cmpd="sng" algn="ctr">
                       <a:solidFill>
-                        <a:srgbClr val="F4DBCD"/>
+                        <a:srgbClr val="F6E1D5"/>
                       </a:solidFill>
                       <a:prstDash val="solid"/>
                     </a:lnB>
@@ -4961,7 +5213,7 @@
                       <a:r>
                         <a:rPr sz="1400" b="0">
                           <a:solidFill>
-                            <a:srgbClr val="2B2B2B"/>
+                            <a:srgbClr val="26231F"/>
                           </a:solidFill>
                         </a:rPr>
                         <a:t/>
@@ -4971,25 +5223,25 @@
                   <a:tcPr anchor="ctr" marL="73152" marR="73152">
                     <a:lnL w="9525" cap="flat" cmpd="sng" algn="ctr">
                       <a:solidFill>
-                        <a:srgbClr val="F4DBCD"/>
+                        <a:srgbClr val="F6E1D5"/>
                       </a:solidFill>
                       <a:prstDash val="solid"/>
                     </a:lnL>
                     <a:lnR w="9525" cap="flat" cmpd="sng" algn="ctr">
                       <a:solidFill>
-                        <a:srgbClr val="F4DBCD"/>
+                        <a:srgbClr val="F6E1D5"/>
                       </a:solidFill>
                       <a:prstDash val="solid"/>
                     </a:lnR>
                     <a:lnT w="9525" cap="flat" cmpd="sng" algn="ctr">
                       <a:solidFill>
-                        <a:srgbClr val="F4DBCD"/>
+                        <a:srgbClr val="F6E1D5"/>
                       </a:solidFill>
                       <a:prstDash val="solid"/>
                     </a:lnT>
                     <a:lnB w="9525" cap="flat" cmpd="sng" algn="ctr">
                       <a:solidFill>
-                        <a:srgbClr val="F4DBCD"/>
+                        <a:srgbClr val="F6E1D5"/>
                       </a:solidFill>
                       <a:prstDash val="solid"/>
                     </a:lnB>
@@ -5007,7 +5259,7 @@
                       <a:r>
                         <a:rPr sz="1400" b="0">
                           <a:solidFill>
-                            <a:srgbClr val="2B2B2B"/>
+                            <a:srgbClr val="26231F"/>
                           </a:solidFill>
                         </a:rPr>
                         <a:t/>
@@ -5017,25 +5269,25 @@
                   <a:tcPr anchor="ctr" marL="73152" marR="73152">
                     <a:lnL w="9525" cap="flat" cmpd="sng" algn="ctr">
                       <a:solidFill>
-                        <a:srgbClr val="F4DBCD"/>
+                        <a:srgbClr val="F6E1D5"/>
                       </a:solidFill>
                       <a:prstDash val="solid"/>
                     </a:lnL>
                     <a:lnR w="9525" cap="flat" cmpd="sng" algn="ctr">
                       <a:solidFill>
-                        <a:srgbClr val="F4DBCD"/>
+                        <a:srgbClr val="F6E1D5"/>
                       </a:solidFill>
                       <a:prstDash val="solid"/>
                     </a:lnR>
                     <a:lnT w="9525" cap="flat" cmpd="sng" algn="ctr">
                       <a:solidFill>
-                        <a:srgbClr val="F4DBCD"/>
+                        <a:srgbClr val="F6E1D5"/>
                       </a:solidFill>
                       <a:prstDash val="solid"/>
                     </a:lnT>
                     <a:lnB w="9525" cap="flat" cmpd="sng" algn="ctr">
                       <a:solidFill>
-                        <a:srgbClr val="F4DBCD"/>
+                        <a:srgbClr val="F6E1D5"/>
                       </a:solidFill>
                       <a:prstDash val="solid"/>
                     </a:lnB>
@@ -5053,7 +5305,7 @@
                       <a:r>
                         <a:rPr sz="1400" b="0">
                           <a:solidFill>
-                            <a:srgbClr val="2B2B2B"/>
+                            <a:srgbClr val="26231F"/>
                           </a:solidFill>
                         </a:rPr>
                         <a:t/>
@@ -5063,25 +5315,25 @@
                   <a:tcPr anchor="ctr" marL="73152" marR="73152">
                     <a:lnL w="9525" cap="flat" cmpd="sng" algn="ctr">
                       <a:solidFill>
-                        <a:srgbClr val="F4DBCD"/>
+                        <a:srgbClr val="F6E1D5"/>
                       </a:solidFill>
                       <a:prstDash val="solid"/>
                     </a:lnL>
                     <a:lnR w="9525" cap="flat" cmpd="sng" algn="ctr">
                       <a:solidFill>
-                        <a:srgbClr val="F4DBCD"/>
+                        <a:srgbClr val="F6E1D5"/>
                       </a:solidFill>
                       <a:prstDash val="solid"/>
                     </a:lnR>
                     <a:lnT w="9525" cap="flat" cmpd="sng" algn="ctr">
                       <a:solidFill>
-                        <a:srgbClr val="F4DBCD"/>
+                        <a:srgbClr val="F6E1D5"/>
                       </a:solidFill>
                       <a:prstDash val="solid"/>
                     </a:lnT>
                     <a:lnB w="9525" cap="flat" cmpd="sng" algn="ctr">
                       <a:solidFill>
-                        <a:srgbClr val="F4DBCD"/>
+                        <a:srgbClr val="F6E1D5"/>
                       </a:solidFill>
                       <a:prstDash val="solid"/>
                     </a:lnB>
@@ -5099,7 +5351,7 @@
                       <a:r>
                         <a:rPr sz="1400" b="0">
                           <a:solidFill>
-                            <a:srgbClr val="2B2B2B"/>
+                            <a:srgbClr val="26231F"/>
                           </a:solidFill>
                         </a:rPr>
                         <a:t/>
@@ -5109,25 +5361,25 @@
                   <a:tcPr anchor="ctr" marL="73152" marR="73152">
                     <a:lnL w="9525" cap="flat" cmpd="sng" algn="ctr">
                       <a:solidFill>
-                        <a:srgbClr val="F4DBCD"/>
+                        <a:srgbClr val="F6E1D5"/>
                       </a:solidFill>
                       <a:prstDash val="solid"/>
                     </a:lnL>
                     <a:lnR w="9525" cap="flat" cmpd="sng" algn="ctr">
                       <a:solidFill>
-                        <a:srgbClr val="F4DBCD"/>
+                        <a:srgbClr val="F6E1D5"/>
                       </a:solidFill>
                       <a:prstDash val="solid"/>
                     </a:lnR>
                     <a:lnT w="9525" cap="flat" cmpd="sng" algn="ctr">
                       <a:solidFill>
-                        <a:srgbClr val="F4DBCD"/>
+                        <a:srgbClr val="F6E1D5"/>
                       </a:solidFill>
                       <a:prstDash val="solid"/>
                     </a:lnT>
                     <a:lnB w="9525" cap="flat" cmpd="sng" algn="ctr">
                       <a:solidFill>
-                        <a:srgbClr val="F4DBCD"/>
+                        <a:srgbClr val="F6E1D5"/>
                       </a:solidFill>
                       <a:prstDash val="solid"/>
                     </a:lnB>
@@ -5147,7 +5399,7 @@
                       <a:r>
                         <a:rPr sz="1400" b="0">
                           <a:solidFill>
-                            <a:srgbClr val="2B2B2B"/>
+                            <a:srgbClr val="26231F"/>
                           </a:solidFill>
                         </a:rPr>
                         <a:t/>
@@ -5157,30 +5409,30 @@
                   <a:tcPr anchor="ctr" marL="73152" marR="73152">
                     <a:lnL w="9525" cap="flat" cmpd="sng" algn="ctr">
                       <a:solidFill>
-                        <a:srgbClr val="F4DBCD"/>
+                        <a:srgbClr val="F6E1D5"/>
                       </a:solidFill>
                       <a:prstDash val="solid"/>
                     </a:lnL>
                     <a:lnR w="9525" cap="flat" cmpd="sng" algn="ctr">
                       <a:solidFill>
-                        <a:srgbClr val="F4DBCD"/>
+                        <a:srgbClr val="F6E1D5"/>
                       </a:solidFill>
                       <a:prstDash val="solid"/>
                     </a:lnR>
                     <a:lnT w="9525" cap="flat" cmpd="sng" algn="ctr">
                       <a:solidFill>
-                        <a:srgbClr val="F4DBCD"/>
+                        <a:srgbClr val="F6E1D5"/>
                       </a:solidFill>
                       <a:prstDash val="solid"/>
                     </a:lnT>
                     <a:lnB w="9525" cap="flat" cmpd="sng" algn="ctr">
                       <a:solidFill>
-                        <a:srgbClr val="F4DBCD"/>
+                        <a:srgbClr val="F6E1D5"/>
                       </a:solidFill>
                       <a:prstDash val="solid"/>
                     </a:lnB>
                     <a:solidFill>
-                      <a:srgbClr val="FBF3EF"/>
+                      <a:srgbClr val="FBF2EC"/>
                     </a:solidFill>
                   </a:tcPr>
                 </a:tc>
@@ -5193,7 +5445,7 @@
                       <a:r>
                         <a:rPr sz="1400" b="0">
                           <a:solidFill>
-                            <a:srgbClr val="2B2B2B"/>
+                            <a:srgbClr val="26231F"/>
                           </a:solidFill>
                         </a:rPr>
                         <a:t/>
@@ -5203,30 +5455,30 @@
                   <a:tcPr anchor="ctr" marL="73152" marR="73152">
                     <a:lnL w="9525" cap="flat" cmpd="sng" algn="ctr">
                       <a:solidFill>
-                        <a:srgbClr val="F4DBCD"/>
+                        <a:srgbClr val="F6E1D5"/>
                       </a:solidFill>
                       <a:prstDash val="solid"/>
                     </a:lnL>
                     <a:lnR w="9525" cap="flat" cmpd="sng" algn="ctr">
                       <a:solidFill>
-                        <a:srgbClr val="F4DBCD"/>
+                        <a:srgbClr val="F6E1D5"/>
                       </a:solidFill>
                       <a:prstDash val="solid"/>
                     </a:lnR>
                     <a:lnT w="9525" cap="flat" cmpd="sng" algn="ctr">
                       <a:solidFill>
-                        <a:srgbClr val="F4DBCD"/>
+                        <a:srgbClr val="F6E1D5"/>
                       </a:solidFill>
                       <a:prstDash val="solid"/>
                     </a:lnT>
                     <a:lnB w="9525" cap="flat" cmpd="sng" algn="ctr">
                       <a:solidFill>
-                        <a:srgbClr val="F4DBCD"/>
+                        <a:srgbClr val="F6E1D5"/>
                       </a:solidFill>
                       <a:prstDash val="solid"/>
                     </a:lnB>
                     <a:solidFill>
-                      <a:srgbClr val="FBF3EF"/>
+                      <a:srgbClr val="FBF2EC"/>
                     </a:solidFill>
                   </a:tcPr>
                 </a:tc>
@@ -5239,7 +5491,7 @@
                       <a:r>
                         <a:rPr sz="1400" b="0">
                           <a:solidFill>
-                            <a:srgbClr val="2B2B2B"/>
+                            <a:srgbClr val="26231F"/>
                           </a:solidFill>
                         </a:rPr>
                         <a:t/>
@@ -5249,30 +5501,30 @@
                   <a:tcPr anchor="ctr" marL="73152" marR="73152">
                     <a:lnL w="9525" cap="flat" cmpd="sng" algn="ctr">
                       <a:solidFill>
-                        <a:srgbClr val="F4DBCD"/>
+                        <a:srgbClr val="F6E1D5"/>
                       </a:solidFill>
                       <a:prstDash val="solid"/>
                     </a:lnL>
                     <a:lnR w="9525" cap="flat" cmpd="sng" algn="ctr">
                       <a:solidFill>
-                        <a:srgbClr val="F4DBCD"/>
+                        <a:srgbClr val="F6E1D5"/>
                       </a:solidFill>
                       <a:prstDash val="solid"/>
                     </a:lnR>
                     <a:lnT w="9525" cap="flat" cmpd="sng" algn="ctr">
                       <a:solidFill>
-                        <a:srgbClr val="F4DBCD"/>
+                        <a:srgbClr val="F6E1D5"/>
                       </a:solidFill>
                       <a:prstDash val="solid"/>
                     </a:lnT>
                     <a:lnB w="9525" cap="flat" cmpd="sng" algn="ctr">
                       <a:solidFill>
-                        <a:srgbClr val="F4DBCD"/>
+                        <a:srgbClr val="F6E1D5"/>
                       </a:solidFill>
                       <a:prstDash val="solid"/>
                     </a:lnB>
                     <a:solidFill>
-                      <a:srgbClr val="FBF3EF"/>
+                      <a:srgbClr val="FBF2EC"/>
                     </a:solidFill>
                   </a:tcPr>
                 </a:tc>
@@ -5285,7 +5537,7 @@
                       <a:r>
                         <a:rPr sz="1400" b="0">
                           <a:solidFill>
-                            <a:srgbClr val="2B2B2B"/>
+                            <a:srgbClr val="26231F"/>
                           </a:solidFill>
                         </a:rPr>
                         <a:t/>
@@ -5295,30 +5547,30 @@
                   <a:tcPr anchor="ctr" marL="73152" marR="73152">
                     <a:lnL w="9525" cap="flat" cmpd="sng" algn="ctr">
                       <a:solidFill>
-                        <a:srgbClr val="F4DBCD"/>
+                        <a:srgbClr val="F6E1D5"/>
                       </a:solidFill>
                       <a:prstDash val="solid"/>
                     </a:lnL>
                     <a:lnR w="9525" cap="flat" cmpd="sng" algn="ctr">
                       <a:solidFill>
-                        <a:srgbClr val="F4DBCD"/>
+                        <a:srgbClr val="F6E1D5"/>
                       </a:solidFill>
                       <a:prstDash val="solid"/>
                     </a:lnR>
                     <a:lnT w="9525" cap="flat" cmpd="sng" algn="ctr">
                       <a:solidFill>
-                        <a:srgbClr val="F4DBCD"/>
+                        <a:srgbClr val="F6E1D5"/>
                       </a:solidFill>
                       <a:prstDash val="solid"/>
                     </a:lnT>
                     <a:lnB w="9525" cap="flat" cmpd="sng" algn="ctr">
                       <a:solidFill>
-                        <a:srgbClr val="F4DBCD"/>
+                        <a:srgbClr val="F6E1D5"/>
                       </a:solidFill>
                       <a:prstDash val="solid"/>
                     </a:lnB>
                     <a:solidFill>
-                      <a:srgbClr val="FBF3EF"/>
+                      <a:srgbClr val="FBF2EC"/>
                     </a:solidFill>
                   </a:tcPr>
                 </a:tc>
@@ -5331,7 +5583,7 @@
                       <a:r>
                         <a:rPr sz="1400" b="0">
                           <a:solidFill>
-                            <a:srgbClr val="2B2B2B"/>
+                            <a:srgbClr val="26231F"/>
                           </a:solidFill>
                         </a:rPr>
                         <a:t/>
@@ -5341,30 +5593,30 @@
                   <a:tcPr anchor="ctr" marL="73152" marR="73152">
                     <a:lnL w="9525" cap="flat" cmpd="sng" algn="ctr">
                       <a:solidFill>
-                        <a:srgbClr val="F4DBCD"/>
+                        <a:srgbClr val="F6E1D5"/>
                       </a:solidFill>
                       <a:prstDash val="solid"/>
                     </a:lnL>
                     <a:lnR w="9525" cap="flat" cmpd="sng" algn="ctr">
                       <a:solidFill>
-                        <a:srgbClr val="F4DBCD"/>
+                        <a:srgbClr val="F6E1D5"/>
                       </a:solidFill>
                       <a:prstDash val="solid"/>
                     </a:lnR>
                     <a:lnT w="9525" cap="flat" cmpd="sng" algn="ctr">
                       <a:solidFill>
-                        <a:srgbClr val="F4DBCD"/>
+                        <a:srgbClr val="F6E1D5"/>
                       </a:solidFill>
                       <a:prstDash val="solid"/>
                     </a:lnT>
                     <a:lnB w="9525" cap="flat" cmpd="sng" algn="ctr">
                       <a:solidFill>
-                        <a:srgbClr val="F4DBCD"/>
+                        <a:srgbClr val="F6E1D5"/>
                       </a:solidFill>
                       <a:prstDash val="solid"/>
                     </a:lnB>
                     <a:solidFill>
-                      <a:srgbClr val="FBF3EF"/>
+                      <a:srgbClr val="FBF2EC"/>
                     </a:solidFill>
                   </a:tcPr>
                 </a:tc>
@@ -5379,7 +5631,7 @@
                       <a:r>
                         <a:rPr sz="1400" b="0">
                           <a:solidFill>
-                            <a:srgbClr val="2B2B2B"/>
+                            <a:srgbClr val="26231F"/>
                           </a:solidFill>
                         </a:rPr>
                         <a:t/>
@@ -5389,25 +5641,25 @@
                   <a:tcPr anchor="ctr" marL="73152" marR="73152">
                     <a:lnL w="9525" cap="flat" cmpd="sng" algn="ctr">
                       <a:solidFill>
-                        <a:srgbClr val="F4DBCD"/>
+                        <a:srgbClr val="F6E1D5"/>
                       </a:solidFill>
                       <a:prstDash val="solid"/>
                     </a:lnL>
                     <a:lnR w="9525" cap="flat" cmpd="sng" algn="ctr">
                       <a:solidFill>
-                        <a:srgbClr val="F4DBCD"/>
+                        <a:srgbClr val="F6E1D5"/>
                       </a:solidFill>
                       <a:prstDash val="solid"/>
                     </a:lnR>
                     <a:lnT w="9525" cap="flat" cmpd="sng" algn="ctr">
                       <a:solidFill>
-                        <a:srgbClr val="F4DBCD"/>
+                        <a:srgbClr val="F6E1D5"/>
                       </a:solidFill>
                       <a:prstDash val="solid"/>
                     </a:lnT>
                     <a:lnB w="9525" cap="flat" cmpd="sng" algn="ctr">
                       <a:solidFill>
-                        <a:srgbClr val="F4DBCD"/>
+                        <a:srgbClr val="F6E1D5"/>
                       </a:solidFill>
                       <a:prstDash val="solid"/>
                     </a:lnB>
@@ -5425,7 +5677,7 @@
                       <a:r>
                         <a:rPr sz="1400" b="0">
                           <a:solidFill>
-                            <a:srgbClr val="2B2B2B"/>
+                            <a:srgbClr val="26231F"/>
                           </a:solidFill>
                         </a:rPr>
                         <a:t/>
@@ -5435,25 +5687,25 @@
                   <a:tcPr anchor="ctr" marL="73152" marR="73152">
                     <a:lnL w="9525" cap="flat" cmpd="sng" algn="ctr">
                       <a:solidFill>
-                        <a:srgbClr val="F4DBCD"/>
+                        <a:srgbClr val="F6E1D5"/>
                       </a:solidFill>
                       <a:prstDash val="solid"/>
                     </a:lnL>
                     <a:lnR w="9525" cap="flat" cmpd="sng" algn="ctr">
                       <a:solidFill>
-                        <a:srgbClr val="F4DBCD"/>
+                        <a:srgbClr val="F6E1D5"/>
                       </a:solidFill>
                       <a:prstDash val="solid"/>
                     </a:lnR>
                     <a:lnT w="9525" cap="flat" cmpd="sng" algn="ctr">
                       <a:solidFill>
-                        <a:srgbClr val="F4DBCD"/>
+                        <a:srgbClr val="F6E1D5"/>
                       </a:solidFill>
                       <a:prstDash val="solid"/>
                     </a:lnT>
                     <a:lnB w="9525" cap="flat" cmpd="sng" algn="ctr">
                       <a:solidFill>
-                        <a:srgbClr val="F4DBCD"/>
+                        <a:srgbClr val="F6E1D5"/>
                       </a:solidFill>
                       <a:prstDash val="solid"/>
                     </a:lnB>
@@ -5471,7 +5723,7 @@
                       <a:r>
                         <a:rPr sz="1400" b="0">
                           <a:solidFill>
-                            <a:srgbClr val="2B2B2B"/>
+                            <a:srgbClr val="26231F"/>
                           </a:solidFill>
                         </a:rPr>
                         <a:t/>
@@ -5481,25 +5733,25 @@
                   <a:tcPr anchor="ctr" marL="73152" marR="73152">
                     <a:lnL w="9525" cap="flat" cmpd="sng" algn="ctr">
                       <a:solidFill>
-                        <a:srgbClr val="F4DBCD"/>
+                        <a:srgbClr val="F6E1D5"/>
                       </a:solidFill>
                       <a:prstDash val="solid"/>
                     </a:lnL>
                     <a:lnR w="9525" cap="flat" cmpd="sng" algn="ctr">
                       <a:solidFill>
-                        <a:srgbClr val="F4DBCD"/>
+                        <a:srgbClr val="F6E1D5"/>
                       </a:solidFill>
                       <a:prstDash val="solid"/>
                     </a:lnR>
                     <a:lnT w="9525" cap="flat" cmpd="sng" algn="ctr">
                       <a:solidFill>
-                        <a:srgbClr val="F4DBCD"/>
+                        <a:srgbClr val="F6E1D5"/>
                       </a:solidFill>
                       <a:prstDash val="solid"/>
                     </a:lnT>
                     <a:lnB w="9525" cap="flat" cmpd="sng" algn="ctr">
                       <a:solidFill>
-                        <a:srgbClr val="F4DBCD"/>
+                        <a:srgbClr val="F6E1D5"/>
                       </a:solidFill>
                       <a:prstDash val="solid"/>
                     </a:lnB>
@@ -5517,7 +5769,7 @@
                       <a:r>
                         <a:rPr sz="1400" b="0">
                           <a:solidFill>
-                            <a:srgbClr val="2B2B2B"/>
+                            <a:srgbClr val="26231F"/>
                           </a:solidFill>
                         </a:rPr>
                         <a:t/>
@@ -5527,25 +5779,25 @@
                   <a:tcPr anchor="ctr" marL="73152" marR="73152">
                     <a:lnL w="9525" cap="flat" cmpd="sng" algn="ctr">
                       <a:solidFill>
-                        <a:srgbClr val="F4DBCD"/>
+                        <a:srgbClr val="F6E1D5"/>
                       </a:solidFill>
                       <a:prstDash val="solid"/>
                     </a:lnL>
                     <a:lnR w="9525" cap="flat" cmpd="sng" algn="ctr">
                       <a:solidFill>
-                        <a:srgbClr val="F4DBCD"/>
+                        <a:srgbClr val="F6E1D5"/>
                       </a:solidFill>
                       <a:prstDash val="solid"/>
                     </a:lnR>
                     <a:lnT w="9525" cap="flat" cmpd="sng" algn="ctr">
                       <a:solidFill>
-                        <a:srgbClr val="F4DBCD"/>
+                        <a:srgbClr val="F6E1D5"/>
                       </a:solidFill>
                       <a:prstDash val="solid"/>
                     </a:lnT>
                     <a:lnB w="9525" cap="flat" cmpd="sng" algn="ctr">
                       <a:solidFill>
-                        <a:srgbClr val="F4DBCD"/>
+                        <a:srgbClr val="F6E1D5"/>
                       </a:solidFill>
                       <a:prstDash val="solid"/>
                     </a:lnB>
@@ -5563,7 +5815,7 @@
                       <a:r>
                         <a:rPr sz="1400" b="0">
                           <a:solidFill>
-                            <a:srgbClr val="2B2B2B"/>
+                            <a:srgbClr val="26231F"/>
                           </a:solidFill>
                         </a:rPr>
                         <a:t/>
@@ -5573,25 +5825,25 @@
                   <a:tcPr anchor="ctr" marL="73152" marR="73152">
                     <a:lnL w="9525" cap="flat" cmpd="sng" algn="ctr">
                       <a:solidFill>
-                        <a:srgbClr val="F4DBCD"/>
+                        <a:srgbClr val="F6E1D5"/>
                       </a:solidFill>
                       <a:prstDash val="solid"/>
                     </a:lnL>
                     <a:lnR w="9525" cap="flat" cmpd="sng" algn="ctr">
                       <a:solidFill>
-                        <a:srgbClr val="F4DBCD"/>
+                        <a:srgbClr val="F6E1D5"/>
                       </a:solidFill>
                       <a:prstDash val="solid"/>
                     </a:lnR>
                     <a:lnT w="9525" cap="flat" cmpd="sng" algn="ctr">
                       <a:solidFill>
-                        <a:srgbClr val="F4DBCD"/>
+                        <a:srgbClr val="F6E1D5"/>
                       </a:solidFill>
                       <a:prstDash val="solid"/>
                     </a:lnT>
                     <a:lnB w="9525" cap="flat" cmpd="sng" algn="ctr">
                       <a:solidFill>
-                        <a:srgbClr val="F4DBCD"/>
+                        <a:srgbClr val="F6E1D5"/>
                       </a:solidFill>
                       <a:prstDash val="solid"/>
                     </a:lnB>
@@ -5611,7 +5863,7 @@
                       <a:r>
                         <a:rPr sz="1400" b="0">
                           <a:solidFill>
-                            <a:srgbClr val="2B2B2B"/>
+                            <a:srgbClr val="26231F"/>
                           </a:solidFill>
                         </a:rPr>
                         <a:t/>
@@ -5621,30 +5873,30 @@
                   <a:tcPr anchor="ctr" marL="73152" marR="73152">
                     <a:lnL w="9525" cap="flat" cmpd="sng" algn="ctr">
                       <a:solidFill>
-                        <a:srgbClr val="F4DBCD"/>
+                        <a:srgbClr val="F6E1D5"/>
                       </a:solidFill>
                       <a:prstDash val="solid"/>
                     </a:lnL>
                     <a:lnR w="9525" cap="flat" cmpd="sng" algn="ctr">
                       <a:solidFill>
-                        <a:srgbClr val="F4DBCD"/>
+                        <a:srgbClr val="F6E1D5"/>
                       </a:solidFill>
                       <a:prstDash val="solid"/>
                     </a:lnR>
                     <a:lnT w="9525" cap="flat" cmpd="sng" algn="ctr">
                       <a:solidFill>
-                        <a:srgbClr val="F4DBCD"/>
+                        <a:srgbClr val="F6E1D5"/>
                       </a:solidFill>
                       <a:prstDash val="solid"/>
                     </a:lnT>
                     <a:lnB w="9525" cap="flat" cmpd="sng" algn="ctr">
                       <a:solidFill>
-                        <a:srgbClr val="F4DBCD"/>
+                        <a:srgbClr val="F6E1D5"/>
                       </a:solidFill>
                       <a:prstDash val="solid"/>
                     </a:lnB>
                     <a:solidFill>
-                      <a:srgbClr val="FBF3EF"/>
+                      <a:srgbClr val="FBF2EC"/>
                     </a:solidFill>
                   </a:tcPr>
                 </a:tc>
@@ -5657,7 +5909,7 @@
                       <a:r>
                         <a:rPr sz="1400" b="0">
                           <a:solidFill>
-                            <a:srgbClr val="2B2B2B"/>
+                            <a:srgbClr val="26231F"/>
                           </a:solidFill>
                         </a:rPr>
                         <a:t/>
@@ -5667,30 +5919,30 @@
                   <a:tcPr anchor="ctr" marL="73152" marR="73152">
                     <a:lnL w="9525" cap="flat" cmpd="sng" algn="ctr">
                       <a:solidFill>
-                        <a:srgbClr val="F4DBCD"/>
+                        <a:srgbClr val="F6E1D5"/>
                       </a:solidFill>
                       <a:prstDash val="solid"/>
                     </a:lnL>
                     <a:lnR w="9525" cap="flat" cmpd="sng" algn="ctr">
                       <a:solidFill>
-                        <a:srgbClr val="F4DBCD"/>
+                        <a:srgbClr val="F6E1D5"/>
                       </a:solidFill>
                       <a:prstDash val="solid"/>
                     </a:lnR>
                     <a:lnT w="9525" cap="flat" cmpd="sng" algn="ctr">
                       <a:solidFill>
-                        <a:srgbClr val="F4DBCD"/>
+                        <a:srgbClr val="F6E1D5"/>
                       </a:solidFill>
                       <a:prstDash val="solid"/>
                     </a:lnT>
                     <a:lnB w="9525" cap="flat" cmpd="sng" algn="ctr">
                       <a:solidFill>
-                        <a:srgbClr val="F4DBCD"/>
+                        <a:srgbClr val="F6E1D5"/>
                       </a:solidFill>
                       <a:prstDash val="solid"/>
                     </a:lnB>
                     <a:solidFill>
-                      <a:srgbClr val="FBF3EF"/>
+                      <a:srgbClr val="FBF2EC"/>
                     </a:solidFill>
                   </a:tcPr>
                 </a:tc>
@@ -5703,7 +5955,7 @@
                       <a:r>
                         <a:rPr sz="1400" b="0">
                           <a:solidFill>
-                            <a:srgbClr val="2B2B2B"/>
+                            <a:srgbClr val="26231F"/>
                           </a:solidFill>
                         </a:rPr>
                         <a:t/>
@@ -5713,30 +5965,30 @@
                   <a:tcPr anchor="ctr" marL="73152" marR="73152">
                     <a:lnL w="9525" cap="flat" cmpd="sng" algn="ctr">
                       <a:solidFill>
-                        <a:srgbClr val="F4DBCD"/>
+                        <a:srgbClr val="F6E1D5"/>
                       </a:solidFill>
                       <a:prstDash val="solid"/>
                     </a:lnL>
                     <a:lnR w="9525" cap="flat" cmpd="sng" algn="ctr">
                       <a:solidFill>
-                        <a:srgbClr val="F4DBCD"/>
+                        <a:srgbClr val="F6E1D5"/>
                       </a:solidFill>
                       <a:prstDash val="solid"/>
                     </a:lnR>
                     <a:lnT w="9525" cap="flat" cmpd="sng" algn="ctr">
                       <a:solidFill>
-                        <a:srgbClr val="F4DBCD"/>
+                        <a:srgbClr val="F6E1D5"/>
                       </a:solidFill>
                       <a:prstDash val="solid"/>
                     </a:lnT>
                     <a:lnB w="9525" cap="flat" cmpd="sng" algn="ctr">
                       <a:solidFill>
-                        <a:srgbClr val="F4DBCD"/>
+                        <a:srgbClr val="F6E1D5"/>
                       </a:solidFill>
                       <a:prstDash val="solid"/>
                     </a:lnB>
                     <a:solidFill>
-                      <a:srgbClr val="FBF3EF"/>
+                      <a:srgbClr val="FBF2EC"/>
                     </a:solidFill>
                   </a:tcPr>
                 </a:tc>
@@ -5749,7 +6001,7 @@
                       <a:r>
                         <a:rPr sz="1400" b="0">
                           <a:solidFill>
-                            <a:srgbClr val="2B2B2B"/>
+                            <a:srgbClr val="26231F"/>
                           </a:solidFill>
                         </a:rPr>
                         <a:t/>
@@ -5759,30 +6011,30 @@
                   <a:tcPr anchor="ctr" marL="73152" marR="73152">
                     <a:lnL w="9525" cap="flat" cmpd="sng" algn="ctr">
                       <a:solidFill>
-                        <a:srgbClr val="F4DBCD"/>
+                        <a:srgbClr val="F6E1D5"/>
                       </a:solidFill>
                       <a:prstDash val="solid"/>
                     </a:lnL>
                     <a:lnR w="9525" cap="flat" cmpd="sng" algn="ctr">
                       <a:solidFill>
-                        <a:srgbClr val="F4DBCD"/>
+                        <a:srgbClr val="F6E1D5"/>
                       </a:solidFill>
                       <a:prstDash val="solid"/>
                     </a:lnR>
                     <a:lnT w="9525" cap="flat" cmpd="sng" algn="ctr">
                       <a:solidFill>
-                        <a:srgbClr val="F4DBCD"/>
+                        <a:srgbClr val="F6E1D5"/>
                       </a:solidFill>
                       <a:prstDash val="solid"/>
                     </a:lnT>
                     <a:lnB w="9525" cap="flat" cmpd="sng" algn="ctr">
                       <a:solidFill>
-                        <a:srgbClr val="F4DBCD"/>
+                        <a:srgbClr val="F6E1D5"/>
                       </a:solidFill>
                       <a:prstDash val="solid"/>
                     </a:lnB>
                     <a:solidFill>
-                      <a:srgbClr val="FBF3EF"/>
+                      <a:srgbClr val="FBF2EC"/>
                     </a:solidFill>
                   </a:tcPr>
                 </a:tc>
@@ -5795,7 +6047,7 @@
                       <a:r>
                         <a:rPr sz="1400" b="0">
                           <a:solidFill>
-                            <a:srgbClr val="2B2B2B"/>
+                            <a:srgbClr val="26231F"/>
                           </a:solidFill>
                         </a:rPr>
                         <a:t/>
@@ -5805,30 +6057,30 @@
                   <a:tcPr anchor="ctr" marL="73152" marR="73152">
                     <a:lnL w="9525" cap="flat" cmpd="sng" algn="ctr">
                       <a:solidFill>
-                        <a:srgbClr val="F4DBCD"/>
+                        <a:srgbClr val="F6E1D5"/>
                       </a:solidFill>
                       <a:prstDash val="solid"/>
                     </a:lnL>
                     <a:lnR w="9525" cap="flat" cmpd="sng" algn="ctr">
                       <a:solidFill>
-                        <a:srgbClr val="F4DBCD"/>
+                        <a:srgbClr val="F6E1D5"/>
                       </a:solidFill>
                       <a:prstDash val="solid"/>
                     </a:lnR>
                     <a:lnT w="9525" cap="flat" cmpd="sng" algn="ctr">
                       <a:solidFill>
-                        <a:srgbClr val="F4DBCD"/>
+                        <a:srgbClr val="F6E1D5"/>
                       </a:solidFill>
                       <a:prstDash val="solid"/>
                     </a:lnT>
                     <a:lnB w="9525" cap="flat" cmpd="sng" algn="ctr">
                       <a:solidFill>
-                        <a:srgbClr val="F4DBCD"/>
+                        <a:srgbClr val="F6E1D5"/>
                       </a:solidFill>
                       <a:prstDash val="solid"/>
                     </a:lnB>
                     <a:solidFill>
-                      <a:srgbClr val="FBF3EF"/>
+                      <a:srgbClr val="FBF2EC"/>
                     </a:solidFill>
                   </a:tcPr>
                 </a:tc>
@@ -5843,7 +6095,7 @@
                       <a:r>
                         <a:rPr sz="1400" b="0">
                           <a:solidFill>
-                            <a:srgbClr val="2B2B2B"/>
+                            <a:srgbClr val="26231F"/>
                           </a:solidFill>
                         </a:rPr>
                         <a:t/>
@@ -5853,25 +6105,25 @@
                   <a:tcPr anchor="ctr" marL="73152" marR="73152">
                     <a:lnL w="9525" cap="flat" cmpd="sng" algn="ctr">
                       <a:solidFill>
-                        <a:srgbClr val="F4DBCD"/>
+                        <a:srgbClr val="F6E1D5"/>
                       </a:solidFill>
                       <a:prstDash val="solid"/>
                     </a:lnL>
                     <a:lnR w="9525" cap="flat" cmpd="sng" algn="ctr">
                       <a:solidFill>
-                        <a:srgbClr val="F4DBCD"/>
+                        <a:srgbClr val="F6E1D5"/>
                       </a:solidFill>
                       <a:prstDash val="solid"/>
                     </a:lnR>
                     <a:lnT w="9525" cap="flat" cmpd="sng" algn="ctr">
                       <a:solidFill>
-                        <a:srgbClr val="F4DBCD"/>
+                        <a:srgbClr val="F6E1D5"/>
                       </a:solidFill>
                       <a:prstDash val="solid"/>
                     </a:lnT>
                     <a:lnB w="9525" cap="flat" cmpd="sng" algn="ctr">
                       <a:solidFill>
-                        <a:srgbClr val="F4DBCD"/>
+                        <a:srgbClr val="F6E1D5"/>
                       </a:solidFill>
                       <a:prstDash val="solid"/>
                     </a:lnB>
@@ -5889,7 +6141,7 @@
                       <a:r>
                         <a:rPr sz="1400" b="0">
                           <a:solidFill>
-                            <a:srgbClr val="2B2B2B"/>
+                            <a:srgbClr val="26231F"/>
                           </a:solidFill>
                         </a:rPr>
                         <a:t/>
@@ -5899,25 +6151,25 @@
                   <a:tcPr anchor="ctr" marL="73152" marR="73152">
                     <a:lnL w="9525" cap="flat" cmpd="sng" algn="ctr">
                       <a:solidFill>
-                        <a:srgbClr val="F4DBCD"/>
+                        <a:srgbClr val="F6E1D5"/>
                       </a:solidFill>
                       <a:prstDash val="solid"/>
                     </a:lnL>
                     <a:lnR w="9525" cap="flat" cmpd="sng" algn="ctr">
                       <a:solidFill>
-                        <a:srgbClr val="F4DBCD"/>
+                        <a:srgbClr val="F6E1D5"/>
                       </a:solidFill>
                       <a:prstDash val="solid"/>
                     </a:lnR>
                     <a:lnT w="9525" cap="flat" cmpd="sng" algn="ctr">
                       <a:solidFill>
-                        <a:srgbClr val="F4DBCD"/>
+                        <a:srgbClr val="F6E1D5"/>
                       </a:solidFill>
                       <a:prstDash val="solid"/>
                     </a:lnT>
                     <a:lnB w="9525" cap="flat" cmpd="sng" algn="ctr">
                       <a:solidFill>
-                        <a:srgbClr val="F4DBCD"/>
+                        <a:srgbClr val="F6E1D5"/>
                       </a:solidFill>
                       <a:prstDash val="solid"/>
                     </a:lnB>
@@ -5935,7 +6187,7 @@
                       <a:r>
                         <a:rPr sz="1400" b="0">
                           <a:solidFill>
-                            <a:srgbClr val="2B2B2B"/>
+                            <a:srgbClr val="26231F"/>
                           </a:solidFill>
                         </a:rPr>
                         <a:t/>
@@ -5945,25 +6197,25 @@
                   <a:tcPr anchor="ctr" marL="73152" marR="73152">
                     <a:lnL w="9525" cap="flat" cmpd="sng" algn="ctr">
                       <a:solidFill>
-                        <a:srgbClr val="F4DBCD"/>
+                        <a:srgbClr val="F6E1D5"/>
                       </a:solidFill>
                       <a:prstDash val="solid"/>
                     </a:lnL>
                     <a:lnR w="9525" cap="flat" cmpd="sng" algn="ctr">
                       <a:solidFill>
-                        <a:srgbClr val="F4DBCD"/>
+                        <a:srgbClr val="F6E1D5"/>
                       </a:solidFill>
                       <a:prstDash val="solid"/>
                     </a:lnR>
                     <a:lnT w="9525" cap="flat" cmpd="sng" algn="ctr">
                       <a:solidFill>
-                        <a:srgbClr val="F4DBCD"/>
+                        <a:srgbClr val="F6E1D5"/>
                       </a:solidFill>
                       <a:prstDash val="solid"/>
                     </a:lnT>
                     <a:lnB w="9525" cap="flat" cmpd="sng" algn="ctr">
                       <a:solidFill>
-                        <a:srgbClr val="F4DBCD"/>
+                        <a:srgbClr val="F6E1D5"/>
                       </a:solidFill>
                       <a:prstDash val="solid"/>
                     </a:lnB>
@@ -5981,7 +6233,7 @@
                       <a:r>
                         <a:rPr sz="1400" b="0">
                           <a:solidFill>
-                            <a:srgbClr val="2B2B2B"/>
+                            <a:srgbClr val="26231F"/>
                           </a:solidFill>
                         </a:rPr>
                         <a:t/>
@@ -5991,25 +6243,25 @@
                   <a:tcPr anchor="ctr" marL="73152" marR="73152">
                     <a:lnL w="9525" cap="flat" cmpd="sng" algn="ctr">
                       <a:solidFill>
-                        <a:srgbClr val="F4DBCD"/>
+                        <a:srgbClr val="F6E1D5"/>
                       </a:solidFill>
                       <a:prstDash val="solid"/>
                     </a:lnL>
                     <a:lnR w="9525" cap="flat" cmpd="sng" algn="ctr">
                       <a:solidFill>
-                        <a:srgbClr val="F4DBCD"/>
+                        <a:srgbClr val="F6E1D5"/>
                       </a:solidFill>
                       <a:prstDash val="solid"/>
                     </a:lnR>
                     <a:lnT w="9525" cap="flat" cmpd="sng" algn="ctr">
                       <a:solidFill>
-                        <a:srgbClr val="F4DBCD"/>
+                        <a:srgbClr val="F6E1D5"/>
                       </a:solidFill>
                       <a:prstDash val="solid"/>
                     </a:lnT>
                     <a:lnB w="9525" cap="flat" cmpd="sng" algn="ctr">
                       <a:solidFill>
-                        <a:srgbClr val="F4DBCD"/>
+                        <a:srgbClr val="F6E1D5"/>
                       </a:solidFill>
                       <a:prstDash val="solid"/>
                     </a:lnB>
@@ -6027,7 +6279,7 @@
                       <a:r>
                         <a:rPr sz="1400" b="0">
                           <a:solidFill>
-                            <a:srgbClr val="2B2B2B"/>
+                            <a:srgbClr val="26231F"/>
                           </a:solidFill>
                         </a:rPr>
                         <a:t/>
@@ -6037,25 +6289,25 @@
                   <a:tcPr anchor="ctr" marL="73152" marR="73152">
                     <a:lnL w="9525" cap="flat" cmpd="sng" algn="ctr">
                       <a:solidFill>
-                        <a:srgbClr val="F4DBCD"/>
+                        <a:srgbClr val="F6E1D5"/>
                       </a:solidFill>
                       <a:prstDash val="solid"/>
                     </a:lnL>
                     <a:lnR w="9525" cap="flat" cmpd="sng" algn="ctr">
                       <a:solidFill>
-                        <a:srgbClr val="F4DBCD"/>
+                        <a:srgbClr val="F6E1D5"/>
                       </a:solidFill>
                       <a:prstDash val="solid"/>
                     </a:lnR>
                     <a:lnT w="9525" cap="flat" cmpd="sng" algn="ctr">
                       <a:solidFill>
-                        <a:srgbClr val="F4DBCD"/>
+                        <a:srgbClr val="F6E1D5"/>
                       </a:solidFill>
                       <a:prstDash val="solid"/>
                     </a:lnT>
                     <a:lnB w="9525" cap="flat" cmpd="sng" algn="ctr">
                       <a:solidFill>
-                        <a:srgbClr val="F4DBCD"/>
+                        <a:srgbClr val="F6E1D5"/>
                       </a:solidFill>
                       <a:prstDash val="solid"/>
                     </a:lnB>
@@ -6075,7 +6327,7 @@
                       <a:r>
                         <a:rPr sz="1400" b="0">
                           <a:solidFill>
-                            <a:srgbClr val="2B2B2B"/>
+                            <a:srgbClr val="26231F"/>
                           </a:solidFill>
                         </a:rPr>
                         <a:t/>
@@ -6085,30 +6337,30 @@
                   <a:tcPr anchor="ctr" marL="73152" marR="73152">
                     <a:lnL w="9525" cap="flat" cmpd="sng" algn="ctr">
                       <a:solidFill>
-                        <a:srgbClr val="F4DBCD"/>
+                        <a:srgbClr val="F6E1D5"/>
                       </a:solidFill>
                       <a:prstDash val="solid"/>
                     </a:lnL>
                     <a:lnR w="9525" cap="flat" cmpd="sng" algn="ctr">
                       <a:solidFill>
-                        <a:srgbClr val="F4DBCD"/>
+                        <a:srgbClr val="F6E1D5"/>
                       </a:solidFill>
                       <a:prstDash val="solid"/>
                     </a:lnR>
                     <a:lnT w="9525" cap="flat" cmpd="sng" algn="ctr">
                       <a:solidFill>
-                        <a:srgbClr val="F4DBCD"/>
+                        <a:srgbClr val="F6E1D5"/>
                       </a:solidFill>
                       <a:prstDash val="solid"/>
                     </a:lnT>
                     <a:lnB w="9525" cap="flat" cmpd="sng" algn="ctr">
                       <a:solidFill>
-                        <a:srgbClr val="F4DBCD"/>
+                        <a:srgbClr val="F6E1D5"/>
                       </a:solidFill>
                       <a:prstDash val="solid"/>
                     </a:lnB>
                     <a:solidFill>
-                      <a:srgbClr val="FBF3EF"/>
+                      <a:srgbClr val="FBF2EC"/>
                     </a:solidFill>
                   </a:tcPr>
                 </a:tc>
@@ -6121,7 +6373,7 @@
                       <a:r>
                         <a:rPr sz="1400" b="0">
                           <a:solidFill>
-                            <a:srgbClr val="2B2B2B"/>
+                            <a:srgbClr val="26231F"/>
                           </a:solidFill>
                         </a:rPr>
                         <a:t/>
@@ -6131,30 +6383,30 @@
                   <a:tcPr anchor="ctr" marL="73152" marR="73152">
                     <a:lnL w="9525" cap="flat" cmpd="sng" algn="ctr">
                       <a:solidFill>
-                        <a:srgbClr val="F4DBCD"/>
+                        <a:srgbClr val="F6E1D5"/>
                       </a:solidFill>
                       <a:prstDash val="solid"/>
                     </a:lnL>
                     <a:lnR w="9525" cap="flat" cmpd="sng" algn="ctr">
                       <a:solidFill>
-                        <a:srgbClr val="F4DBCD"/>
+                        <a:srgbClr val="F6E1D5"/>
                       </a:solidFill>
                       <a:prstDash val="solid"/>
                     </a:lnR>
                     <a:lnT w="9525" cap="flat" cmpd="sng" algn="ctr">
                       <a:solidFill>
-                        <a:srgbClr val="F4DBCD"/>
+                        <a:srgbClr val="F6E1D5"/>
                       </a:solidFill>
                       <a:prstDash val="solid"/>
                     </a:lnT>
                     <a:lnB w="9525" cap="flat" cmpd="sng" algn="ctr">
                       <a:solidFill>
-                        <a:srgbClr val="F4DBCD"/>
+                        <a:srgbClr val="F6E1D5"/>
                       </a:solidFill>
                       <a:prstDash val="solid"/>
                     </a:lnB>
                     <a:solidFill>
-                      <a:srgbClr val="FBF3EF"/>
+                      <a:srgbClr val="FBF2EC"/>
                     </a:solidFill>
                   </a:tcPr>
                 </a:tc>
@@ -6167,7 +6419,7 @@
                       <a:r>
                         <a:rPr sz="1400" b="0">
                           <a:solidFill>
-                            <a:srgbClr val="2B2B2B"/>
+                            <a:srgbClr val="26231F"/>
                           </a:solidFill>
                         </a:rPr>
                         <a:t/>
@@ -6177,30 +6429,30 @@
                   <a:tcPr anchor="ctr" marL="73152" marR="73152">
                     <a:lnL w="9525" cap="flat" cmpd="sng" algn="ctr">
                       <a:solidFill>
-                        <a:srgbClr val="F4DBCD"/>
+                        <a:srgbClr val="F6E1D5"/>
                       </a:solidFill>
                       <a:prstDash val="solid"/>
                     </a:lnL>
                     <a:lnR w="9525" cap="flat" cmpd="sng" algn="ctr">
                       <a:solidFill>
-                        <a:srgbClr val="F4DBCD"/>
+                        <a:srgbClr val="F6E1D5"/>
                       </a:solidFill>
                       <a:prstDash val="solid"/>
                     </a:lnR>
                     <a:lnT w="9525" cap="flat" cmpd="sng" algn="ctr">
                       <a:solidFill>
-                        <a:srgbClr val="F4DBCD"/>
+                        <a:srgbClr val="F6E1D5"/>
                       </a:solidFill>
                       <a:prstDash val="solid"/>
                     </a:lnT>
                     <a:lnB w="9525" cap="flat" cmpd="sng" algn="ctr">
                       <a:solidFill>
-                        <a:srgbClr val="F4DBCD"/>
+                        <a:srgbClr val="F6E1D5"/>
                       </a:solidFill>
                       <a:prstDash val="solid"/>
                     </a:lnB>
                     <a:solidFill>
-                      <a:srgbClr val="FBF3EF"/>
+                      <a:srgbClr val="FBF2EC"/>
                     </a:solidFill>
                   </a:tcPr>
                 </a:tc>
@@ -6213,7 +6465,7 @@
                       <a:r>
                         <a:rPr sz="1400" b="0">
                           <a:solidFill>
-                            <a:srgbClr val="2B2B2B"/>
+                            <a:srgbClr val="26231F"/>
                           </a:solidFill>
                         </a:rPr>
                         <a:t/>
@@ -6223,30 +6475,30 @@
                   <a:tcPr anchor="ctr" marL="73152" marR="73152">
                     <a:lnL w="9525" cap="flat" cmpd="sng" algn="ctr">
                       <a:solidFill>
-                        <a:srgbClr val="F4DBCD"/>
+                        <a:srgbClr val="F6E1D5"/>
                       </a:solidFill>
                       <a:prstDash val="solid"/>
                     </a:lnL>
                     <a:lnR w="9525" cap="flat" cmpd="sng" algn="ctr">
                       <a:solidFill>
-                        <a:srgbClr val="F4DBCD"/>
+                        <a:srgbClr val="F6E1D5"/>
                       </a:solidFill>
                       <a:prstDash val="solid"/>
                     </a:lnR>
                     <a:lnT w="9525" cap="flat" cmpd="sng" algn="ctr">
                       <a:solidFill>
-                        <a:srgbClr val="F4DBCD"/>
+                        <a:srgbClr val="F6E1D5"/>
                       </a:solidFill>
                       <a:prstDash val="solid"/>
                     </a:lnT>
                     <a:lnB w="9525" cap="flat" cmpd="sng" algn="ctr">
                       <a:solidFill>
-                        <a:srgbClr val="F4DBCD"/>
+                        <a:srgbClr val="F6E1D5"/>
                       </a:solidFill>
                       <a:prstDash val="solid"/>
                     </a:lnB>
                     <a:solidFill>
-                      <a:srgbClr val="FBF3EF"/>
+                      <a:srgbClr val="FBF2EC"/>
                     </a:solidFill>
                   </a:tcPr>
                 </a:tc>
@@ -6259,7 +6511,7 @@
                       <a:r>
                         <a:rPr sz="1400" b="0">
                           <a:solidFill>
-                            <a:srgbClr val="2B2B2B"/>
+                            <a:srgbClr val="26231F"/>
                           </a:solidFill>
                         </a:rPr>
                         <a:t/>
@@ -6269,30 +6521,30 @@
                   <a:tcPr anchor="ctr" marL="73152" marR="73152">
                     <a:lnL w="9525" cap="flat" cmpd="sng" algn="ctr">
                       <a:solidFill>
-                        <a:srgbClr val="F4DBCD"/>
+                        <a:srgbClr val="F6E1D5"/>
                       </a:solidFill>
                       <a:prstDash val="solid"/>
                     </a:lnL>
                     <a:lnR w="9525" cap="flat" cmpd="sng" algn="ctr">
                       <a:solidFill>
-                        <a:srgbClr val="F4DBCD"/>
+                        <a:srgbClr val="F6E1D5"/>
                       </a:solidFill>
                       <a:prstDash val="solid"/>
                     </a:lnR>
                     <a:lnT w="9525" cap="flat" cmpd="sng" algn="ctr">
                       <a:solidFill>
-                        <a:srgbClr val="F4DBCD"/>
+                        <a:srgbClr val="F6E1D5"/>
                       </a:solidFill>
                       <a:prstDash val="solid"/>
                     </a:lnT>
                     <a:lnB w="9525" cap="flat" cmpd="sng" algn="ctr">
                       <a:solidFill>
-                        <a:srgbClr val="F4DBCD"/>
+                        <a:srgbClr val="F6E1D5"/>
                       </a:solidFill>
                       <a:prstDash val="solid"/>
                     </a:lnB>
                     <a:solidFill>
-                      <a:srgbClr val="FBF3EF"/>
+                      <a:srgbClr val="FBF2EC"/>
                     </a:solidFill>
                   </a:tcPr>
                 </a:tc>
@@ -6315,7 +6567,7 @@
     <p:bg>
       <p:bgPr>
         <a:solidFill>
-          <a:srgbClr val="FBF3EF"/>
+          <a:srgbClr val="FFFFFF"/>
         </a:solidFill>
         <a:effectLst/>
       </p:bgPr>
@@ -6335,46 +6587,113 @@
         </p:nvSpPr>
         <p:spPr>
           <a:xfrm>
-            <a:off x="256032" y="256032"/>
-            <a:ext cx="11679631" cy="6345936"/>
+            <a:off x="0" y="6565392"/>
+            <a:ext cx="12191695" cy="292608"/>
+          </a:xfrm>
+          <a:prstGeom prst="rect">
+            <a:avLst/>
+          </a:prstGeom>
+          <a:solidFill>
+            <a:srgbClr val="EBC4AD"/>
+          </a:solidFill>
+          <a:ln>
+            <a:noFill/>
+          </a:ln>
+        </p:spPr>
+        <p:txBody>
+          <a:bodyPr rtlCol="0" anchor="ctr"/>
+          <a:lstStyle/>
+          <a:p>
+            <a:pPr algn="ctr"/>
+          </a:p>
+        </p:txBody>
+      </p:sp>
+      <p:sp>
+        <p:nvSpPr>
+          <p:cNvPr id="4" name="장식"/>
+          <p:cNvSpPr/>
+          <p:nvPr/>
+        </p:nvSpPr>
+        <p:spPr>
+          <a:xfrm>
+            <a:off x="640080" y="566928"/>
+            <a:ext cx="10911535" cy="10972"/>
+          </a:xfrm>
+          <a:prstGeom prst="rect">
+            <a:avLst/>
+          </a:prstGeom>
+          <a:solidFill>
+            <a:srgbClr val="26231F"/>
+          </a:solidFill>
+          <a:ln>
+            <a:noFill/>
+          </a:ln>
+        </p:spPr>
+        <p:txBody>
+          <a:bodyPr rtlCol="0" anchor="ctr"/>
+          <a:lstStyle/>
+          <a:p>
+            <a:pPr algn="ctr"/>
+          </a:p>
+        </p:txBody>
+      </p:sp>
+      <p:sp>
+        <p:nvSpPr>
+          <p:cNvPr id="5" name="상단 라벨"/>
+          <p:cNvSpPr txBox="1"/>
+          <p:nvPr/>
+        </p:nvSpPr>
+        <p:spPr>
+          <a:xfrm>
+            <a:off x="640080" y="237744"/>
+            <a:ext cx="5486400" cy="274320"/>
           </a:xfrm>
           <a:prstGeom prst="rect">
             <a:avLst/>
           </a:prstGeom>
           <a:noFill/>
-          <a:ln w="28575">
-            <a:solidFill>
-              <a:srgbClr val="995229"/>
-            </a:solidFill>
-          </a:ln>
-        </p:spPr>
-        <p:txBody>
-          <a:bodyPr rtlCol="0" anchor="ctr"/>
-          <a:lstStyle/>
-          <a:p>
-            <a:pPr algn="ctr"/>
-          </a:p>
-        </p:txBody>
-      </p:sp>
-      <p:sp>
-        <p:nvSpPr>
-          <p:cNvPr id="4" name="장식"/>
+        </p:spPr>
+        <p:txBody>
+          <a:bodyPr wrap="square" lIns="54864" rIns="54864" tIns="27432" bIns="27432" anchor="ctr">
+            <a:noAutofit/>
+          </a:bodyPr>
+          <a:lstStyle/>
+          <a:p>
+            <a:pPr algn="l">
+              <a:lnSpc>
+                <a:spcPct val="115000"/>
+              </a:lnSpc>
+            </a:pPr>
+            <a:r>
+              <a:rPr sz="900" b="1" i="0" spc="250">
+                <a:solidFill>
+                  <a:srgbClr val="26231F"/>
+                </a:solidFill>
+              </a:rPr>
+              <a:t>INSURANCE CHECK</a:t>
+            </a:r>
+          </a:p>
+        </p:txBody>
+      </p:sp>
+      <p:sp>
+        <p:nvSpPr>
+          <p:cNvPr id="6" name="포인트"/>
           <p:cNvSpPr/>
           <p:nvPr/>
         </p:nvSpPr>
         <p:spPr>
           <a:xfrm>
-            <a:off x="384048" y="384048"/>
-            <a:ext cx="11423599" cy="6089904"/>
-          </a:xfrm>
-          <a:prstGeom prst="rect">
+            <a:off x="11204143" y="246888"/>
+            <a:ext cx="237744" cy="237744"/>
+          </a:xfrm>
+          <a:prstGeom prst="ellipse">
             <a:avLst/>
           </a:prstGeom>
-          <a:noFill/>
-          <a:ln w="9525">
-            <a:solidFill>
-              <a:srgbClr val="F4DBCD"/>
-            </a:solidFill>
+          <a:solidFill>
+            <a:srgbClr val="D89C79"/>
+          </a:solidFill>
+          <a:ln>
+            <a:noFill/>
           </a:ln>
         </p:spPr>
         <p:txBody>
@@ -6397,8 +6716,8 @@
         </p:nvSpPr>
         <p:spPr>
           <a:xfrm>
-            <a:off x="822960" y="548640"/>
-            <a:ext cx="9265615" cy="822960"/>
+            <a:off x="640080" y="731520"/>
+            <a:ext cx="10911535" cy="822960"/>
           </a:xfrm>
         </p:spPr>
         <p:txBody>
@@ -6415,7 +6734,7 @@
             <a:r>
               <a:rPr sz="3000" b="1" i="0">
                 <a:solidFill>
-                  <a:srgbClr val="492713"/>
+                  <a:srgbClr val="26231F"/>
                 </a:solidFill>
               </a:rPr>
               <a:t>보장 항목 체크</a:t>
@@ -6425,15 +6744,15 @@
       </p:sp>
       <p:graphicFrame>
         <p:nvGraphicFramePr>
-          <p:cNvPr id="5" name="표"/>
+          <p:cNvPr id="7" name="표"/>
           <p:cNvGraphicFramePr>
             <a:graphicFrameLocks noGrp="1"/>
           </p:cNvGraphicFramePr>
           <p:nvPr/>
         </p:nvGraphicFramePr>
         <p:xfrm>
-          <a:off x="822960" y="1554480"/>
-          <a:ext cx="10545774" cy="4773168"/>
+          <a:off x="640080" y="1783080"/>
+          <a:ext cx="10911534" cy="4773168"/>
         </p:xfrm>
         <a:graphic>
           <a:graphicData uri="http://schemas.openxmlformats.org/drawingml/2006/table">
@@ -6443,9 +6762,9 @@
               </a:tblPr>
               <a:tblGrid>
                 <a:gridCol w="3657600"/>
-                <a:gridCol w="2296058"/>
-                <a:gridCol w="2296058"/>
-                <a:gridCol w="2296058"/>
+                <a:gridCol w="2417978"/>
+                <a:gridCol w="2417978"/>
+                <a:gridCol w="2417978"/>
               </a:tblGrid>
               <a:tr h="530352">
                 <a:tc>
@@ -6457,7 +6776,7 @@
                       <a:r>
                         <a:rPr sz="1400" b="1">
                           <a:solidFill>
-                            <a:srgbClr val="FFFFFF"/>
+                            <a:srgbClr val="26231F"/>
                           </a:solidFill>
                         </a:rPr>
                         <a:t>보장 항목</a:t>
@@ -6467,30 +6786,30 @@
                   <a:tcPr anchor="ctr" marL="73152" marR="73152">
                     <a:lnL w="9525" cap="flat" cmpd="sng" algn="ctr">
                       <a:solidFill>
-                        <a:srgbClr val="995229"/>
+                        <a:srgbClr val="D89C79"/>
                       </a:solidFill>
                       <a:prstDash val="solid"/>
                     </a:lnL>
                     <a:lnR w="9525" cap="flat" cmpd="sng" algn="ctr">
                       <a:solidFill>
-                        <a:srgbClr val="995229"/>
+                        <a:srgbClr val="D89C79"/>
                       </a:solidFill>
                       <a:prstDash val="solid"/>
                     </a:lnR>
                     <a:lnT w="9525" cap="flat" cmpd="sng" algn="ctr">
                       <a:solidFill>
-                        <a:srgbClr val="995229"/>
+                        <a:srgbClr val="D89C79"/>
                       </a:solidFill>
                       <a:prstDash val="solid"/>
                     </a:lnT>
                     <a:lnB w="9525" cap="flat" cmpd="sng" algn="ctr">
                       <a:solidFill>
-                        <a:srgbClr val="995229"/>
+                        <a:srgbClr val="D89C79"/>
                       </a:solidFill>
                       <a:prstDash val="solid"/>
                     </a:lnB>
                     <a:solidFill>
-                      <a:srgbClr val="995229"/>
+                      <a:srgbClr val="D89C79"/>
                     </a:solidFill>
                   </a:tcPr>
                 </a:tc>
@@ -6503,7 +6822,7 @@
                       <a:r>
                         <a:rPr sz="1400" b="1">
                           <a:solidFill>
-                            <a:srgbClr val="FFFFFF"/>
+                            <a:srgbClr val="26231F"/>
                           </a:solidFill>
                         </a:rPr>
                         <a:t>가입 확인</a:t>
@@ -6513,30 +6832,30 @@
                   <a:tcPr anchor="ctr" marL="73152" marR="73152">
                     <a:lnL w="9525" cap="flat" cmpd="sng" algn="ctr">
                       <a:solidFill>
-                        <a:srgbClr val="995229"/>
+                        <a:srgbClr val="D89C79"/>
                       </a:solidFill>
                       <a:prstDash val="solid"/>
                     </a:lnL>
                     <a:lnR w="9525" cap="flat" cmpd="sng" algn="ctr">
                       <a:solidFill>
-                        <a:srgbClr val="995229"/>
+                        <a:srgbClr val="D89C79"/>
                       </a:solidFill>
                       <a:prstDash val="solid"/>
                     </a:lnR>
                     <a:lnT w="9525" cap="flat" cmpd="sng" algn="ctr">
                       <a:solidFill>
-                        <a:srgbClr val="995229"/>
+                        <a:srgbClr val="D89C79"/>
                       </a:solidFill>
                       <a:prstDash val="solid"/>
                     </a:lnT>
                     <a:lnB w="9525" cap="flat" cmpd="sng" algn="ctr">
                       <a:solidFill>
-                        <a:srgbClr val="995229"/>
+                        <a:srgbClr val="D89C79"/>
                       </a:solidFill>
                       <a:prstDash val="solid"/>
                     </a:lnB>
                     <a:solidFill>
-                      <a:srgbClr val="995229"/>
+                      <a:srgbClr val="D89C79"/>
                     </a:solidFill>
                   </a:tcPr>
                 </a:tc>
@@ -6549,7 +6868,7 @@
                       <a:r>
                         <a:rPr sz="1400" b="1">
                           <a:solidFill>
-                            <a:srgbClr val="FFFFFF"/>
+                            <a:srgbClr val="26231F"/>
                           </a:solidFill>
                         </a:rPr>
                         <a:t>확인 필요</a:t>
@@ -6559,30 +6878,30 @@
                   <a:tcPr anchor="ctr" marL="73152" marR="73152">
                     <a:lnL w="9525" cap="flat" cmpd="sng" algn="ctr">
                       <a:solidFill>
-                        <a:srgbClr val="995229"/>
+                        <a:srgbClr val="D89C79"/>
                       </a:solidFill>
                       <a:prstDash val="solid"/>
                     </a:lnL>
                     <a:lnR w="9525" cap="flat" cmpd="sng" algn="ctr">
                       <a:solidFill>
-                        <a:srgbClr val="995229"/>
+                        <a:srgbClr val="D89C79"/>
                       </a:solidFill>
                       <a:prstDash val="solid"/>
                     </a:lnR>
                     <a:lnT w="9525" cap="flat" cmpd="sng" algn="ctr">
                       <a:solidFill>
-                        <a:srgbClr val="995229"/>
+                        <a:srgbClr val="D89C79"/>
                       </a:solidFill>
                       <a:prstDash val="solid"/>
                     </a:lnT>
                     <a:lnB w="9525" cap="flat" cmpd="sng" algn="ctr">
                       <a:solidFill>
-                        <a:srgbClr val="995229"/>
+                        <a:srgbClr val="D89C79"/>
                       </a:solidFill>
                       <a:prstDash val="solid"/>
                     </a:lnB>
                     <a:solidFill>
-                      <a:srgbClr val="995229"/>
+                      <a:srgbClr val="D89C79"/>
                     </a:solidFill>
                   </a:tcPr>
                 </a:tc>
@@ -6595,7 +6914,7 @@
                       <a:r>
                         <a:rPr sz="1400" b="1">
                           <a:solidFill>
-                            <a:srgbClr val="FFFFFF"/>
+                            <a:srgbClr val="26231F"/>
                           </a:solidFill>
                         </a:rPr>
                         <a:t>해당 없음</a:t>
@@ -6605,30 +6924,30 @@
                   <a:tcPr anchor="ctr" marL="73152" marR="73152">
                     <a:lnL w="9525" cap="flat" cmpd="sng" algn="ctr">
                       <a:solidFill>
-                        <a:srgbClr val="995229"/>
+                        <a:srgbClr val="D89C79"/>
                       </a:solidFill>
                       <a:prstDash val="solid"/>
                     </a:lnL>
                     <a:lnR w="9525" cap="flat" cmpd="sng" algn="ctr">
                       <a:solidFill>
-                        <a:srgbClr val="995229"/>
+                        <a:srgbClr val="D89C79"/>
                       </a:solidFill>
                       <a:prstDash val="solid"/>
                     </a:lnR>
                     <a:lnT w="9525" cap="flat" cmpd="sng" algn="ctr">
                       <a:solidFill>
-                        <a:srgbClr val="995229"/>
+                        <a:srgbClr val="D89C79"/>
                       </a:solidFill>
                       <a:prstDash val="solid"/>
                     </a:lnT>
                     <a:lnB w="9525" cap="flat" cmpd="sng" algn="ctr">
                       <a:solidFill>
-                        <a:srgbClr val="995229"/>
+                        <a:srgbClr val="D89C79"/>
                       </a:solidFill>
                       <a:prstDash val="solid"/>
                     </a:lnB>
                     <a:solidFill>
-                      <a:srgbClr val="995229"/>
+                      <a:srgbClr val="D89C79"/>
                     </a:solidFill>
                   </a:tcPr>
                 </a:tc>
@@ -6643,7 +6962,7 @@
                       <a:r>
                         <a:rPr sz="1400" b="1">
                           <a:solidFill>
-                            <a:srgbClr val="492713"/>
+                            <a:srgbClr val="493427"/>
                           </a:solidFill>
                         </a:rPr>
                         <a:t>사망·재해</a:t>
@@ -6653,30 +6972,30 @@
                   <a:tcPr anchor="ctr" marL="73152" marR="73152">
                     <a:lnL w="9525" cap="flat" cmpd="sng" algn="ctr">
                       <a:solidFill>
-                        <a:srgbClr val="F4DBCD"/>
+                        <a:srgbClr val="F6E1D5"/>
                       </a:solidFill>
                       <a:prstDash val="solid"/>
                     </a:lnL>
                     <a:lnR w="9525" cap="flat" cmpd="sng" algn="ctr">
                       <a:solidFill>
-                        <a:srgbClr val="F4DBCD"/>
+                        <a:srgbClr val="F6E1D5"/>
                       </a:solidFill>
                       <a:prstDash val="solid"/>
                     </a:lnR>
                     <a:lnT w="9525" cap="flat" cmpd="sng" algn="ctr">
                       <a:solidFill>
-                        <a:srgbClr val="F4DBCD"/>
+                        <a:srgbClr val="F6E1D5"/>
                       </a:solidFill>
                       <a:prstDash val="solid"/>
                     </a:lnT>
                     <a:lnB w="9525" cap="flat" cmpd="sng" algn="ctr">
                       <a:solidFill>
-                        <a:srgbClr val="F4DBCD"/>
+                        <a:srgbClr val="F6E1D5"/>
                       </a:solidFill>
                       <a:prstDash val="solid"/>
                     </a:lnB>
                     <a:solidFill>
-                      <a:srgbClr val="F4DBCD"/>
+                      <a:srgbClr val="F6E1D5"/>
                     </a:solidFill>
                   </a:tcPr>
                 </a:tc>
@@ -6689,7 +7008,7 @@
                       <a:r>
                         <a:rPr sz="1400" b="0">
                           <a:solidFill>
-                            <a:srgbClr val="2B2B2B"/>
+                            <a:srgbClr val="26231F"/>
                           </a:solidFill>
                         </a:rPr>
                         <a:t>□</a:t>
@@ -6699,25 +7018,25 @@
                   <a:tcPr anchor="ctr" marL="73152" marR="73152">
                     <a:lnL w="9525" cap="flat" cmpd="sng" algn="ctr">
                       <a:solidFill>
-                        <a:srgbClr val="F4DBCD"/>
+                        <a:srgbClr val="F6E1D5"/>
                       </a:solidFill>
                       <a:prstDash val="solid"/>
                     </a:lnL>
                     <a:lnR w="9525" cap="flat" cmpd="sng" algn="ctr">
                       <a:solidFill>
-                        <a:srgbClr val="F4DBCD"/>
+                        <a:srgbClr val="F6E1D5"/>
                       </a:solidFill>
                       <a:prstDash val="solid"/>
                     </a:lnR>
                     <a:lnT w="9525" cap="flat" cmpd="sng" algn="ctr">
                       <a:solidFill>
-                        <a:srgbClr val="F4DBCD"/>
+                        <a:srgbClr val="F6E1D5"/>
                       </a:solidFill>
                       <a:prstDash val="solid"/>
                     </a:lnT>
                     <a:lnB w="9525" cap="flat" cmpd="sng" algn="ctr">
                       <a:solidFill>
-                        <a:srgbClr val="F4DBCD"/>
+                        <a:srgbClr val="F6E1D5"/>
                       </a:solidFill>
                       <a:prstDash val="solid"/>
                     </a:lnB>
@@ -6735,7 +7054,7 @@
                       <a:r>
                         <a:rPr sz="1400" b="0">
                           <a:solidFill>
-                            <a:srgbClr val="2B2B2B"/>
+                            <a:srgbClr val="26231F"/>
                           </a:solidFill>
                         </a:rPr>
                         <a:t>□</a:t>
@@ -6745,25 +7064,25 @@
                   <a:tcPr anchor="ctr" marL="73152" marR="73152">
                     <a:lnL w="9525" cap="flat" cmpd="sng" algn="ctr">
                       <a:solidFill>
-                        <a:srgbClr val="F4DBCD"/>
+                        <a:srgbClr val="F6E1D5"/>
                       </a:solidFill>
                       <a:prstDash val="solid"/>
                     </a:lnL>
                     <a:lnR w="9525" cap="flat" cmpd="sng" algn="ctr">
                       <a:solidFill>
-                        <a:srgbClr val="F4DBCD"/>
+                        <a:srgbClr val="F6E1D5"/>
                       </a:solidFill>
                       <a:prstDash val="solid"/>
                     </a:lnR>
                     <a:lnT w="9525" cap="flat" cmpd="sng" algn="ctr">
                       <a:solidFill>
-                        <a:srgbClr val="F4DBCD"/>
+                        <a:srgbClr val="F6E1D5"/>
                       </a:solidFill>
                       <a:prstDash val="solid"/>
                     </a:lnT>
                     <a:lnB w="9525" cap="flat" cmpd="sng" algn="ctr">
                       <a:solidFill>
-                        <a:srgbClr val="F4DBCD"/>
+                        <a:srgbClr val="F6E1D5"/>
                       </a:solidFill>
                       <a:prstDash val="solid"/>
                     </a:lnB>
@@ -6781,7 +7100,7 @@
                       <a:r>
                         <a:rPr sz="1400" b="0">
                           <a:solidFill>
-                            <a:srgbClr val="2B2B2B"/>
+                            <a:srgbClr val="26231F"/>
                           </a:solidFill>
                         </a:rPr>
                         <a:t>□</a:t>
@@ -6791,25 +7110,25 @@
                   <a:tcPr anchor="ctr" marL="73152" marR="73152">
                     <a:lnL w="9525" cap="flat" cmpd="sng" algn="ctr">
                       <a:solidFill>
-                        <a:srgbClr val="F4DBCD"/>
+                        <a:srgbClr val="F6E1D5"/>
                       </a:solidFill>
                       <a:prstDash val="solid"/>
                     </a:lnL>
                     <a:lnR w="9525" cap="flat" cmpd="sng" algn="ctr">
                       <a:solidFill>
-                        <a:srgbClr val="F4DBCD"/>
+                        <a:srgbClr val="F6E1D5"/>
                       </a:solidFill>
                       <a:prstDash val="solid"/>
                     </a:lnR>
                     <a:lnT w="9525" cap="flat" cmpd="sng" algn="ctr">
                       <a:solidFill>
-                        <a:srgbClr val="F4DBCD"/>
+                        <a:srgbClr val="F6E1D5"/>
                       </a:solidFill>
                       <a:prstDash val="solid"/>
                     </a:lnT>
                     <a:lnB w="9525" cap="flat" cmpd="sng" algn="ctr">
                       <a:solidFill>
-                        <a:srgbClr val="F4DBCD"/>
+                        <a:srgbClr val="F6E1D5"/>
                       </a:solidFill>
                       <a:prstDash val="solid"/>
                     </a:lnB>
@@ -6829,7 +7148,7 @@
                       <a:r>
                         <a:rPr sz="1400" b="1">
                           <a:solidFill>
-                            <a:srgbClr val="492713"/>
+                            <a:srgbClr val="493427"/>
                           </a:solidFill>
                         </a:rPr>
                         <a:t>질병 진단</a:t>
@@ -6839,30 +7158,30 @@
                   <a:tcPr anchor="ctr" marL="73152" marR="73152">
                     <a:lnL w="9525" cap="flat" cmpd="sng" algn="ctr">
                       <a:solidFill>
-                        <a:srgbClr val="F4DBCD"/>
+                        <a:srgbClr val="F6E1D5"/>
                       </a:solidFill>
                       <a:prstDash val="solid"/>
                     </a:lnL>
                     <a:lnR w="9525" cap="flat" cmpd="sng" algn="ctr">
                       <a:solidFill>
-                        <a:srgbClr val="F4DBCD"/>
+                        <a:srgbClr val="F6E1D5"/>
                       </a:solidFill>
                       <a:prstDash val="solid"/>
                     </a:lnR>
                     <a:lnT w="9525" cap="flat" cmpd="sng" algn="ctr">
                       <a:solidFill>
-                        <a:srgbClr val="F4DBCD"/>
+                        <a:srgbClr val="F6E1D5"/>
                       </a:solidFill>
                       <a:prstDash val="solid"/>
                     </a:lnT>
                     <a:lnB w="9525" cap="flat" cmpd="sng" algn="ctr">
                       <a:solidFill>
-                        <a:srgbClr val="F4DBCD"/>
+                        <a:srgbClr val="F6E1D5"/>
                       </a:solidFill>
                       <a:prstDash val="solid"/>
                     </a:lnB>
                     <a:solidFill>
-                      <a:srgbClr val="F4DBCD"/>
+                      <a:srgbClr val="F6E1D5"/>
                     </a:solidFill>
                   </a:tcPr>
                 </a:tc>
@@ -6875,7 +7194,7 @@
                       <a:r>
                         <a:rPr sz="1400" b="0">
                           <a:solidFill>
-                            <a:srgbClr val="2B2B2B"/>
+                            <a:srgbClr val="26231F"/>
                           </a:solidFill>
                         </a:rPr>
                         <a:t>□</a:t>
@@ -6885,30 +7204,30 @@
                   <a:tcPr anchor="ctr" marL="73152" marR="73152">
                     <a:lnL w="9525" cap="flat" cmpd="sng" algn="ctr">
                       <a:solidFill>
-                        <a:srgbClr val="F4DBCD"/>
+                        <a:srgbClr val="F6E1D5"/>
                       </a:solidFill>
                       <a:prstDash val="solid"/>
                     </a:lnL>
                     <a:lnR w="9525" cap="flat" cmpd="sng" algn="ctr">
                       <a:solidFill>
-                        <a:srgbClr val="F4DBCD"/>
+                        <a:srgbClr val="F6E1D5"/>
                       </a:solidFill>
                       <a:prstDash val="solid"/>
                     </a:lnR>
                     <a:lnT w="9525" cap="flat" cmpd="sng" algn="ctr">
                       <a:solidFill>
-                        <a:srgbClr val="F4DBCD"/>
+                        <a:srgbClr val="F6E1D5"/>
                       </a:solidFill>
                       <a:prstDash val="solid"/>
                     </a:lnT>
                     <a:lnB w="9525" cap="flat" cmpd="sng" algn="ctr">
                       <a:solidFill>
-                        <a:srgbClr val="F4DBCD"/>
+                        <a:srgbClr val="F6E1D5"/>
                       </a:solidFill>
                       <a:prstDash val="solid"/>
                     </a:lnB>
                     <a:solidFill>
-                      <a:srgbClr val="FBF3EF"/>
+                      <a:srgbClr val="FBF2EC"/>
                     </a:solidFill>
                   </a:tcPr>
                 </a:tc>
@@ -6921,7 +7240,7 @@
                       <a:r>
                         <a:rPr sz="1400" b="0">
                           <a:solidFill>
-                            <a:srgbClr val="2B2B2B"/>
+                            <a:srgbClr val="26231F"/>
                           </a:solidFill>
                         </a:rPr>
                         <a:t>□</a:t>
@@ -6931,30 +7250,30 @@
                   <a:tcPr anchor="ctr" marL="73152" marR="73152">
                     <a:lnL w="9525" cap="flat" cmpd="sng" algn="ctr">
                       <a:solidFill>
-                        <a:srgbClr val="F4DBCD"/>
+                        <a:srgbClr val="F6E1D5"/>
                       </a:solidFill>
                       <a:prstDash val="solid"/>
                     </a:lnL>
                     <a:lnR w="9525" cap="flat" cmpd="sng" algn="ctr">
                       <a:solidFill>
-                        <a:srgbClr val="F4DBCD"/>
+                        <a:srgbClr val="F6E1D5"/>
                       </a:solidFill>
                       <a:prstDash val="solid"/>
                     </a:lnR>
                     <a:lnT w="9525" cap="flat" cmpd="sng" algn="ctr">
                       <a:solidFill>
-                        <a:srgbClr val="F4DBCD"/>
+                        <a:srgbClr val="F6E1D5"/>
                       </a:solidFill>
                       <a:prstDash val="solid"/>
                     </a:lnT>
                     <a:lnB w="9525" cap="flat" cmpd="sng" algn="ctr">
                       <a:solidFill>
-                        <a:srgbClr val="F4DBCD"/>
+                        <a:srgbClr val="F6E1D5"/>
                       </a:solidFill>
                       <a:prstDash val="solid"/>
                     </a:lnB>
                     <a:solidFill>
-                      <a:srgbClr val="FBF3EF"/>
+                      <a:srgbClr val="FBF2EC"/>
                     </a:solidFill>
                   </a:tcPr>
                 </a:tc>
@@ -6967,7 +7286,7 @@
                       <a:r>
                         <a:rPr sz="1400" b="0">
                           <a:solidFill>
-                            <a:srgbClr val="2B2B2B"/>
+                            <a:srgbClr val="26231F"/>
                           </a:solidFill>
                         </a:rPr>
                         <a:t>□</a:t>
@@ -6977,30 +7296,30 @@
                   <a:tcPr anchor="ctr" marL="73152" marR="73152">
                     <a:lnL w="9525" cap="flat" cmpd="sng" algn="ctr">
                       <a:solidFill>
-                        <a:srgbClr val="F4DBCD"/>
+                        <a:srgbClr val="F6E1D5"/>
                       </a:solidFill>
                       <a:prstDash val="solid"/>
                     </a:lnL>
                     <a:lnR w="9525" cap="flat" cmpd="sng" algn="ctr">
                       <a:solidFill>
-                        <a:srgbClr val="F4DBCD"/>
+                        <a:srgbClr val="F6E1D5"/>
                       </a:solidFill>
                       <a:prstDash val="solid"/>
                     </a:lnR>
                     <a:lnT w="9525" cap="flat" cmpd="sng" algn="ctr">
                       <a:solidFill>
-                        <a:srgbClr val="F4DBCD"/>
+                        <a:srgbClr val="F6E1D5"/>
                       </a:solidFill>
                       <a:prstDash val="solid"/>
                     </a:lnT>
                     <a:lnB w="9525" cap="flat" cmpd="sng" algn="ctr">
                       <a:solidFill>
-                        <a:srgbClr val="F4DBCD"/>
+                        <a:srgbClr val="F6E1D5"/>
                       </a:solidFill>
                       <a:prstDash val="solid"/>
                     </a:lnB>
                     <a:solidFill>
-                      <a:srgbClr val="FBF3EF"/>
+                      <a:srgbClr val="FBF2EC"/>
                     </a:solidFill>
                   </a:tcPr>
                 </a:tc>
@@ -7015,7 +7334,7 @@
                       <a:r>
                         <a:rPr sz="1400" b="1">
                           <a:solidFill>
-                            <a:srgbClr val="492713"/>
+                            <a:srgbClr val="493427"/>
                           </a:solidFill>
                         </a:rPr>
                         <a:t>암</a:t>
@@ -7025,30 +7344,30 @@
                   <a:tcPr anchor="ctr" marL="73152" marR="73152">
                     <a:lnL w="9525" cap="flat" cmpd="sng" algn="ctr">
                       <a:solidFill>
-                        <a:srgbClr val="F4DBCD"/>
+                        <a:srgbClr val="F6E1D5"/>
                       </a:solidFill>
                       <a:prstDash val="solid"/>
                     </a:lnL>
                     <a:lnR w="9525" cap="flat" cmpd="sng" algn="ctr">
                       <a:solidFill>
-                        <a:srgbClr val="F4DBCD"/>
+                        <a:srgbClr val="F6E1D5"/>
                       </a:solidFill>
                       <a:prstDash val="solid"/>
                     </a:lnR>
                     <a:lnT w="9525" cap="flat" cmpd="sng" algn="ctr">
                       <a:solidFill>
-                        <a:srgbClr val="F4DBCD"/>
+                        <a:srgbClr val="F6E1D5"/>
                       </a:solidFill>
                       <a:prstDash val="solid"/>
                     </a:lnT>
                     <a:lnB w="9525" cap="flat" cmpd="sng" algn="ctr">
                       <a:solidFill>
-                        <a:srgbClr val="F4DBCD"/>
+                        <a:srgbClr val="F6E1D5"/>
                       </a:solidFill>
                       <a:prstDash val="solid"/>
                     </a:lnB>
                     <a:solidFill>
-                      <a:srgbClr val="F4DBCD"/>
+                      <a:srgbClr val="F6E1D5"/>
                     </a:solidFill>
                   </a:tcPr>
                 </a:tc>
@@ -7061,7 +7380,7 @@
                       <a:r>
                         <a:rPr sz="1400" b="0">
                           <a:solidFill>
-                            <a:srgbClr val="2B2B2B"/>
+                            <a:srgbClr val="26231F"/>
                           </a:solidFill>
                         </a:rPr>
                         <a:t>□</a:t>
@@ -7071,25 +7390,25 @@
                   <a:tcPr anchor="ctr" marL="73152" marR="73152">
                     <a:lnL w="9525" cap="flat" cmpd="sng" algn="ctr">
                       <a:solidFill>
-                        <a:srgbClr val="F4DBCD"/>
+                        <a:srgbClr val="F6E1D5"/>
                       </a:solidFill>
                       <a:prstDash val="solid"/>
                     </a:lnL>
                     <a:lnR w="9525" cap="flat" cmpd="sng" algn="ctr">
                       <a:solidFill>
-                        <a:srgbClr val="F4DBCD"/>
+                        <a:srgbClr val="F6E1D5"/>
                       </a:solidFill>
                       <a:prstDash val="solid"/>
                     </a:lnR>
                     <a:lnT w="9525" cap="flat" cmpd="sng" algn="ctr">
                       <a:solidFill>
-                        <a:srgbClr val="F4DBCD"/>
+                        <a:srgbClr val="F6E1D5"/>
                       </a:solidFill>
                       <a:prstDash val="solid"/>
                     </a:lnT>
                     <a:lnB w="9525" cap="flat" cmpd="sng" algn="ctr">
                       <a:solidFill>
-                        <a:srgbClr val="F4DBCD"/>
+                        <a:srgbClr val="F6E1D5"/>
                       </a:solidFill>
                       <a:prstDash val="solid"/>
                     </a:lnB>
@@ -7107,7 +7426,7 @@
                       <a:r>
                         <a:rPr sz="1400" b="0">
                           <a:solidFill>
-                            <a:srgbClr val="2B2B2B"/>
+                            <a:srgbClr val="26231F"/>
                           </a:solidFill>
                         </a:rPr>
                         <a:t>□</a:t>
@@ -7117,25 +7436,25 @@
                   <a:tcPr anchor="ctr" marL="73152" marR="73152">
                     <a:lnL w="9525" cap="flat" cmpd="sng" algn="ctr">
                       <a:solidFill>
-                        <a:srgbClr val="F4DBCD"/>
+                        <a:srgbClr val="F6E1D5"/>
                       </a:solidFill>
                       <a:prstDash val="solid"/>
                     </a:lnL>
                     <a:lnR w="9525" cap="flat" cmpd="sng" algn="ctr">
                       <a:solidFill>
-                        <a:srgbClr val="F4DBCD"/>
+                        <a:srgbClr val="F6E1D5"/>
                       </a:solidFill>
                       <a:prstDash val="solid"/>
                     </a:lnR>
                     <a:lnT w="9525" cap="flat" cmpd="sng" algn="ctr">
                       <a:solidFill>
-                        <a:srgbClr val="F4DBCD"/>
+                        <a:srgbClr val="F6E1D5"/>
                       </a:solidFill>
                       <a:prstDash val="solid"/>
                     </a:lnT>
                     <a:lnB w="9525" cap="flat" cmpd="sng" algn="ctr">
                       <a:solidFill>
-                        <a:srgbClr val="F4DBCD"/>
+                        <a:srgbClr val="F6E1D5"/>
                       </a:solidFill>
                       <a:prstDash val="solid"/>
                     </a:lnB>
@@ -7153,7 +7472,7 @@
                       <a:r>
                         <a:rPr sz="1400" b="0">
                           <a:solidFill>
-                            <a:srgbClr val="2B2B2B"/>
+                            <a:srgbClr val="26231F"/>
                           </a:solidFill>
                         </a:rPr>
                         <a:t>□</a:t>
@@ -7163,25 +7482,25 @@
                   <a:tcPr anchor="ctr" marL="73152" marR="73152">
                     <a:lnL w="9525" cap="flat" cmpd="sng" algn="ctr">
                       <a:solidFill>
-                        <a:srgbClr val="F4DBCD"/>
+                        <a:srgbClr val="F6E1D5"/>
                       </a:solidFill>
                       <a:prstDash val="solid"/>
                     </a:lnL>
                     <a:lnR w="9525" cap="flat" cmpd="sng" algn="ctr">
                       <a:solidFill>
-                        <a:srgbClr val="F4DBCD"/>
+                        <a:srgbClr val="F6E1D5"/>
                       </a:solidFill>
                       <a:prstDash val="solid"/>
                     </a:lnR>
                     <a:lnT w="9525" cap="flat" cmpd="sng" algn="ctr">
                       <a:solidFill>
-                        <a:srgbClr val="F4DBCD"/>
+                        <a:srgbClr val="F6E1D5"/>
                       </a:solidFill>
                       <a:prstDash val="solid"/>
                     </a:lnT>
                     <a:lnB w="9525" cap="flat" cmpd="sng" algn="ctr">
                       <a:solidFill>
-                        <a:srgbClr val="F4DBCD"/>
+                        <a:srgbClr val="F6E1D5"/>
                       </a:solidFill>
                       <a:prstDash val="solid"/>
                     </a:lnB>
@@ -7201,7 +7520,7 @@
                       <a:r>
                         <a:rPr sz="1400" b="1">
                           <a:solidFill>
-                            <a:srgbClr val="492713"/>
+                            <a:srgbClr val="493427"/>
                           </a:solidFill>
                         </a:rPr>
                         <a:t>뇌·심장</a:t>
@@ -7211,30 +7530,30 @@
                   <a:tcPr anchor="ctr" marL="73152" marR="73152">
                     <a:lnL w="9525" cap="flat" cmpd="sng" algn="ctr">
                       <a:solidFill>
-                        <a:srgbClr val="F4DBCD"/>
+                        <a:srgbClr val="F6E1D5"/>
                       </a:solidFill>
                       <a:prstDash val="solid"/>
                     </a:lnL>
                     <a:lnR w="9525" cap="flat" cmpd="sng" algn="ctr">
                       <a:solidFill>
-                        <a:srgbClr val="F4DBCD"/>
+                        <a:srgbClr val="F6E1D5"/>
                       </a:solidFill>
                       <a:prstDash val="solid"/>
                     </a:lnR>
                     <a:lnT w="9525" cap="flat" cmpd="sng" algn="ctr">
                       <a:solidFill>
-                        <a:srgbClr val="F4DBCD"/>
+                        <a:srgbClr val="F6E1D5"/>
                       </a:solidFill>
                       <a:prstDash val="solid"/>
                     </a:lnT>
                     <a:lnB w="9525" cap="flat" cmpd="sng" algn="ctr">
                       <a:solidFill>
-                        <a:srgbClr val="F4DBCD"/>
+                        <a:srgbClr val="F6E1D5"/>
                       </a:solidFill>
                       <a:prstDash val="solid"/>
                     </a:lnB>
                     <a:solidFill>
-                      <a:srgbClr val="F4DBCD"/>
+                      <a:srgbClr val="F6E1D5"/>
                     </a:solidFill>
                   </a:tcPr>
                 </a:tc>
@@ -7247,7 +7566,7 @@
                       <a:r>
                         <a:rPr sz="1400" b="0">
                           <a:solidFill>
-                            <a:srgbClr val="2B2B2B"/>
+                            <a:srgbClr val="26231F"/>
                           </a:solidFill>
                         </a:rPr>
                         <a:t>□</a:t>
@@ -7257,30 +7576,30 @@
                   <a:tcPr anchor="ctr" marL="73152" marR="73152">
                     <a:lnL w="9525" cap="flat" cmpd="sng" algn="ctr">
                       <a:solidFill>
-                        <a:srgbClr val="F4DBCD"/>
+                        <a:srgbClr val="F6E1D5"/>
                       </a:solidFill>
                       <a:prstDash val="solid"/>
                     </a:lnL>
                     <a:lnR w="9525" cap="flat" cmpd="sng" algn="ctr">
                       <a:solidFill>
-                        <a:srgbClr val="F4DBCD"/>
+                        <a:srgbClr val="F6E1D5"/>
                       </a:solidFill>
                       <a:prstDash val="solid"/>
                     </a:lnR>
                     <a:lnT w="9525" cap="flat" cmpd="sng" algn="ctr">
                       <a:solidFill>
-                        <a:srgbClr val="F4DBCD"/>
+                        <a:srgbClr val="F6E1D5"/>
                       </a:solidFill>
                       <a:prstDash val="solid"/>
                     </a:lnT>
                     <a:lnB w="9525" cap="flat" cmpd="sng" algn="ctr">
                       <a:solidFill>
-                        <a:srgbClr val="F4DBCD"/>
+                        <a:srgbClr val="F6E1D5"/>
                       </a:solidFill>
                       <a:prstDash val="solid"/>
                     </a:lnB>
                     <a:solidFill>
-                      <a:srgbClr val="FBF3EF"/>
+                      <a:srgbClr val="FBF2EC"/>
                     </a:solidFill>
                   </a:tcPr>
                 </a:tc>
@@ -7293,7 +7612,7 @@
                       <a:r>
                         <a:rPr sz="1400" b="0">
                           <a:solidFill>
-                            <a:srgbClr val="2B2B2B"/>
+                            <a:srgbClr val="26231F"/>
                           </a:solidFill>
                         </a:rPr>
                         <a:t>□</a:t>
@@ -7303,30 +7622,30 @@
                   <a:tcPr anchor="ctr" marL="73152" marR="73152">
                     <a:lnL w="9525" cap="flat" cmpd="sng" algn="ctr">
                       <a:solidFill>
-                        <a:srgbClr val="F4DBCD"/>
+                        <a:srgbClr val="F6E1D5"/>
                       </a:solidFill>
                       <a:prstDash val="solid"/>
                     </a:lnL>
                     <a:lnR w="9525" cap="flat" cmpd="sng" algn="ctr">
                       <a:solidFill>
-                        <a:srgbClr val="F4DBCD"/>
+                        <a:srgbClr val="F6E1D5"/>
                       </a:solidFill>
                       <a:prstDash val="solid"/>
                     </a:lnR>
                     <a:lnT w="9525" cap="flat" cmpd="sng" algn="ctr">
                       <a:solidFill>
-                        <a:srgbClr val="F4DBCD"/>
+                        <a:srgbClr val="F6E1D5"/>
                       </a:solidFill>
                       <a:prstDash val="solid"/>
                     </a:lnT>
                     <a:lnB w="9525" cap="flat" cmpd="sng" algn="ctr">
                       <a:solidFill>
-                        <a:srgbClr val="F4DBCD"/>
+                        <a:srgbClr val="F6E1D5"/>
                       </a:solidFill>
                       <a:prstDash val="solid"/>
                     </a:lnB>
                     <a:solidFill>
-                      <a:srgbClr val="FBF3EF"/>
+                      <a:srgbClr val="FBF2EC"/>
                     </a:solidFill>
                   </a:tcPr>
                 </a:tc>
@@ -7339,7 +7658,7 @@
                       <a:r>
                         <a:rPr sz="1400" b="0">
                           <a:solidFill>
-                            <a:srgbClr val="2B2B2B"/>
+                            <a:srgbClr val="26231F"/>
                           </a:solidFill>
                         </a:rPr>
                         <a:t>□</a:t>
@@ -7349,30 +7668,30 @@
                   <a:tcPr anchor="ctr" marL="73152" marR="73152">
                     <a:lnL w="9525" cap="flat" cmpd="sng" algn="ctr">
                       <a:solidFill>
-                        <a:srgbClr val="F4DBCD"/>
+                        <a:srgbClr val="F6E1D5"/>
                       </a:solidFill>
                       <a:prstDash val="solid"/>
                     </a:lnL>
                     <a:lnR w="9525" cap="flat" cmpd="sng" algn="ctr">
                       <a:solidFill>
-                        <a:srgbClr val="F4DBCD"/>
+                        <a:srgbClr val="F6E1D5"/>
                       </a:solidFill>
                       <a:prstDash val="solid"/>
                     </a:lnR>
                     <a:lnT w="9525" cap="flat" cmpd="sng" algn="ctr">
                       <a:solidFill>
-                        <a:srgbClr val="F4DBCD"/>
+                        <a:srgbClr val="F6E1D5"/>
                       </a:solidFill>
                       <a:prstDash val="solid"/>
                     </a:lnT>
                     <a:lnB w="9525" cap="flat" cmpd="sng" algn="ctr">
                       <a:solidFill>
-                        <a:srgbClr val="F4DBCD"/>
+                        <a:srgbClr val="F6E1D5"/>
                       </a:solidFill>
                       <a:prstDash val="solid"/>
                     </a:lnB>
                     <a:solidFill>
-                      <a:srgbClr val="FBF3EF"/>
+                      <a:srgbClr val="FBF2EC"/>
                     </a:solidFill>
                   </a:tcPr>
                 </a:tc>
@@ -7387,7 +7706,7 @@
                       <a:r>
                         <a:rPr sz="1400" b="1">
                           <a:solidFill>
-                            <a:srgbClr val="492713"/>
+                            <a:srgbClr val="493427"/>
                           </a:solidFill>
                         </a:rPr>
                         <a:t>입원·수술</a:t>
@@ -7397,30 +7716,30 @@
                   <a:tcPr anchor="ctr" marL="73152" marR="73152">
                     <a:lnL w="9525" cap="flat" cmpd="sng" algn="ctr">
                       <a:solidFill>
-                        <a:srgbClr val="F4DBCD"/>
+                        <a:srgbClr val="F6E1D5"/>
                       </a:solidFill>
                       <a:prstDash val="solid"/>
                     </a:lnL>
                     <a:lnR w="9525" cap="flat" cmpd="sng" algn="ctr">
                       <a:solidFill>
-                        <a:srgbClr val="F4DBCD"/>
+                        <a:srgbClr val="F6E1D5"/>
                       </a:solidFill>
                       <a:prstDash val="solid"/>
                     </a:lnR>
                     <a:lnT w="9525" cap="flat" cmpd="sng" algn="ctr">
                       <a:solidFill>
-                        <a:srgbClr val="F4DBCD"/>
+                        <a:srgbClr val="F6E1D5"/>
                       </a:solidFill>
                       <a:prstDash val="solid"/>
                     </a:lnT>
                     <a:lnB w="9525" cap="flat" cmpd="sng" algn="ctr">
                       <a:solidFill>
-                        <a:srgbClr val="F4DBCD"/>
+                        <a:srgbClr val="F6E1D5"/>
                       </a:solidFill>
                       <a:prstDash val="solid"/>
                     </a:lnB>
                     <a:solidFill>
-                      <a:srgbClr val="F4DBCD"/>
+                      <a:srgbClr val="F6E1D5"/>
                     </a:solidFill>
                   </a:tcPr>
                 </a:tc>
@@ -7433,7 +7752,7 @@
                       <a:r>
                         <a:rPr sz="1400" b="0">
                           <a:solidFill>
-                            <a:srgbClr val="2B2B2B"/>
+                            <a:srgbClr val="26231F"/>
                           </a:solidFill>
                         </a:rPr>
                         <a:t>□</a:t>
@@ -7443,25 +7762,25 @@
                   <a:tcPr anchor="ctr" marL="73152" marR="73152">
                     <a:lnL w="9525" cap="flat" cmpd="sng" algn="ctr">
                       <a:solidFill>
-                        <a:srgbClr val="F4DBCD"/>
+                        <a:srgbClr val="F6E1D5"/>
                       </a:solidFill>
                       <a:prstDash val="solid"/>
                     </a:lnL>
                     <a:lnR w="9525" cap="flat" cmpd="sng" algn="ctr">
                       <a:solidFill>
-                        <a:srgbClr val="F4DBCD"/>
+                        <a:srgbClr val="F6E1D5"/>
                       </a:solidFill>
                       <a:prstDash val="solid"/>
                     </a:lnR>
                     <a:lnT w="9525" cap="flat" cmpd="sng" algn="ctr">
                       <a:solidFill>
-                        <a:srgbClr val="F4DBCD"/>
+                        <a:srgbClr val="F6E1D5"/>
                       </a:solidFill>
                       <a:prstDash val="solid"/>
                     </a:lnT>
                     <a:lnB w="9525" cap="flat" cmpd="sng" algn="ctr">
                       <a:solidFill>
-                        <a:srgbClr val="F4DBCD"/>
+                        <a:srgbClr val="F6E1D5"/>
                       </a:solidFill>
                       <a:prstDash val="solid"/>
                     </a:lnB>
@@ -7479,7 +7798,7 @@
                       <a:r>
                         <a:rPr sz="1400" b="0">
                           <a:solidFill>
-                            <a:srgbClr val="2B2B2B"/>
+                            <a:srgbClr val="26231F"/>
                           </a:solidFill>
                         </a:rPr>
                         <a:t>□</a:t>
@@ -7489,25 +7808,25 @@
                   <a:tcPr anchor="ctr" marL="73152" marR="73152">
                     <a:lnL w="9525" cap="flat" cmpd="sng" algn="ctr">
                       <a:solidFill>
-                        <a:srgbClr val="F4DBCD"/>
+                        <a:srgbClr val="F6E1D5"/>
                       </a:solidFill>
                       <a:prstDash val="solid"/>
                     </a:lnL>
                     <a:lnR w="9525" cap="flat" cmpd="sng" algn="ctr">
                       <a:solidFill>
-                        <a:srgbClr val="F4DBCD"/>
+                        <a:srgbClr val="F6E1D5"/>
                       </a:solidFill>
                       <a:prstDash val="solid"/>
                     </a:lnR>
                     <a:lnT w="9525" cap="flat" cmpd="sng" algn="ctr">
                       <a:solidFill>
-                        <a:srgbClr val="F4DBCD"/>
+                        <a:srgbClr val="F6E1D5"/>
                       </a:solidFill>
                       <a:prstDash val="solid"/>
                     </a:lnT>
                     <a:lnB w="9525" cap="flat" cmpd="sng" algn="ctr">
                       <a:solidFill>
-                        <a:srgbClr val="F4DBCD"/>
+                        <a:srgbClr val="F6E1D5"/>
                       </a:solidFill>
                       <a:prstDash val="solid"/>
                     </a:lnB>
@@ -7525,7 +7844,7 @@
                       <a:r>
                         <a:rPr sz="1400" b="0">
                           <a:solidFill>
-                            <a:srgbClr val="2B2B2B"/>
+                            <a:srgbClr val="26231F"/>
                           </a:solidFill>
                         </a:rPr>
                         <a:t>□</a:t>
@@ -7535,25 +7854,25 @@
                   <a:tcPr anchor="ctr" marL="73152" marR="73152">
                     <a:lnL w="9525" cap="flat" cmpd="sng" algn="ctr">
                       <a:solidFill>
-                        <a:srgbClr val="F4DBCD"/>
+                        <a:srgbClr val="F6E1D5"/>
                       </a:solidFill>
                       <a:prstDash val="solid"/>
                     </a:lnL>
                     <a:lnR w="9525" cap="flat" cmpd="sng" algn="ctr">
                       <a:solidFill>
-                        <a:srgbClr val="F4DBCD"/>
+                        <a:srgbClr val="F6E1D5"/>
                       </a:solidFill>
                       <a:prstDash val="solid"/>
                     </a:lnR>
                     <a:lnT w="9525" cap="flat" cmpd="sng" algn="ctr">
                       <a:solidFill>
-                        <a:srgbClr val="F4DBCD"/>
+                        <a:srgbClr val="F6E1D5"/>
                       </a:solidFill>
                       <a:prstDash val="solid"/>
                     </a:lnT>
                     <a:lnB w="9525" cap="flat" cmpd="sng" algn="ctr">
                       <a:solidFill>
-                        <a:srgbClr val="F4DBCD"/>
+                        <a:srgbClr val="F6E1D5"/>
                       </a:solidFill>
                       <a:prstDash val="solid"/>
                     </a:lnB>
@@ -7573,7 +7892,7 @@
                       <a:r>
                         <a:rPr sz="1400" b="1">
                           <a:solidFill>
-                            <a:srgbClr val="492713"/>
+                            <a:srgbClr val="493427"/>
                           </a:solidFill>
                         </a:rPr>
                         <a:t>상해</a:t>
@@ -7583,30 +7902,30 @@
                   <a:tcPr anchor="ctr" marL="73152" marR="73152">
                     <a:lnL w="9525" cap="flat" cmpd="sng" algn="ctr">
                       <a:solidFill>
-                        <a:srgbClr val="F4DBCD"/>
+                        <a:srgbClr val="F6E1D5"/>
                       </a:solidFill>
                       <a:prstDash val="solid"/>
                     </a:lnL>
                     <a:lnR w="9525" cap="flat" cmpd="sng" algn="ctr">
                       <a:solidFill>
-                        <a:srgbClr val="F4DBCD"/>
+                        <a:srgbClr val="F6E1D5"/>
                       </a:solidFill>
                       <a:prstDash val="solid"/>
                     </a:lnR>
                     <a:lnT w="9525" cap="flat" cmpd="sng" algn="ctr">
                       <a:solidFill>
-                        <a:srgbClr val="F4DBCD"/>
+                        <a:srgbClr val="F6E1D5"/>
                       </a:solidFill>
                       <a:prstDash val="solid"/>
                     </a:lnT>
                     <a:lnB w="9525" cap="flat" cmpd="sng" algn="ctr">
                       <a:solidFill>
-                        <a:srgbClr val="F4DBCD"/>
+                        <a:srgbClr val="F6E1D5"/>
                       </a:solidFill>
                       <a:prstDash val="solid"/>
                     </a:lnB>
                     <a:solidFill>
-                      <a:srgbClr val="F4DBCD"/>
+                      <a:srgbClr val="F6E1D5"/>
                     </a:solidFill>
                   </a:tcPr>
                 </a:tc>
@@ -7619,7 +7938,7 @@
                       <a:r>
                         <a:rPr sz="1400" b="0">
                           <a:solidFill>
-                            <a:srgbClr val="2B2B2B"/>
+                            <a:srgbClr val="26231F"/>
                           </a:solidFill>
                         </a:rPr>
                         <a:t>□</a:t>
@@ -7629,30 +7948,30 @@
                   <a:tcPr anchor="ctr" marL="73152" marR="73152">
                     <a:lnL w="9525" cap="flat" cmpd="sng" algn="ctr">
                       <a:solidFill>
-                        <a:srgbClr val="F4DBCD"/>
+                        <a:srgbClr val="F6E1D5"/>
                       </a:solidFill>
                       <a:prstDash val="solid"/>
                     </a:lnL>
                     <a:lnR w="9525" cap="flat" cmpd="sng" algn="ctr">
                       <a:solidFill>
-                        <a:srgbClr val="F4DBCD"/>
+                        <a:srgbClr val="F6E1D5"/>
                       </a:solidFill>
                       <a:prstDash val="solid"/>
                     </a:lnR>
                     <a:lnT w="9525" cap="flat" cmpd="sng" algn="ctr">
                       <a:solidFill>
-                        <a:srgbClr val="F4DBCD"/>
+                        <a:srgbClr val="F6E1D5"/>
                       </a:solidFill>
                       <a:prstDash val="solid"/>
                     </a:lnT>
                     <a:lnB w="9525" cap="flat" cmpd="sng" algn="ctr">
                       <a:solidFill>
-                        <a:srgbClr val="F4DBCD"/>
+                        <a:srgbClr val="F6E1D5"/>
                       </a:solidFill>
                       <a:prstDash val="solid"/>
                     </a:lnB>
                     <a:solidFill>
-                      <a:srgbClr val="FBF3EF"/>
+                      <a:srgbClr val="FBF2EC"/>
                     </a:solidFill>
                   </a:tcPr>
                 </a:tc>
@@ -7665,7 +7984,7 @@
                       <a:r>
                         <a:rPr sz="1400" b="0">
                           <a:solidFill>
-                            <a:srgbClr val="2B2B2B"/>
+                            <a:srgbClr val="26231F"/>
                           </a:solidFill>
                         </a:rPr>
                         <a:t>□</a:t>
@@ -7675,30 +7994,30 @@
                   <a:tcPr anchor="ctr" marL="73152" marR="73152">
                     <a:lnL w="9525" cap="flat" cmpd="sng" algn="ctr">
                       <a:solidFill>
-                        <a:srgbClr val="F4DBCD"/>
+                        <a:srgbClr val="F6E1D5"/>
                       </a:solidFill>
                       <a:prstDash val="solid"/>
                     </a:lnL>
                     <a:lnR w="9525" cap="flat" cmpd="sng" algn="ctr">
                       <a:solidFill>
-                        <a:srgbClr val="F4DBCD"/>
+                        <a:srgbClr val="F6E1D5"/>
                       </a:solidFill>
                       <a:prstDash val="solid"/>
                     </a:lnR>
                     <a:lnT w="9525" cap="flat" cmpd="sng" algn="ctr">
                       <a:solidFill>
-                        <a:srgbClr val="F4DBCD"/>
+                        <a:srgbClr val="F6E1D5"/>
                       </a:solidFill>
                       <a:prstDash val="solid"/>
                     </a:lnT>
                     <a:lnB w="9525" cap="flat" cmpd="sng" algn="ctr">
                       <a:solidFill>
-                        <a:srgbClr val="F4DBCD"/>
+                        <a:srgbClr val="F6E1D5"/>
                       </a:solidFill>
                       <a:prstDash val="solid"/>
                     </a:lnB>
                     <a:solidFill>
-                      <a:srgbClr val="FBF3EF"/>
+                      <a:srgbClr val="FBF2EC"/>
                     </a:solidFill>
                   </a:tcPr>
                 </a:tc>
@@ -7711,7 +8030,7 @@
                       <a:r>
                         <a:rPr sz="1400" b="0">
                           <a:solidFill>
-                            <a:srgbClr val="2B2B2B"/>
+                            <a:srgbClr val="26231F"/>
                           </a:solidFill>
                         </a:rPr>
                         <a:t>□</a:t>
@@ -7721,30 +8040,30 @@
                   <a:tcPr anchor="ctr" marL="73152" marR="73152">
                     <a:lnL w="9525" cap="flat" cmpd="sng" algn="ctr">
                       <a:solidFill>
-                        <a:srgbClr val="F4DBCD"/>
+                        <a:srgbClr val="F6E1D5"/>
                       </a:solidFill>
                       <a:prstDash val="solid"/>
                     </a:lnL>
                     <a:lnR w="9525" cap="flat" cmpd="sng" algn="ctr">
                       <a:solidFill>
-                        <a:srgbClr val="F4DBCD"/>
+                        <a:srgbClr val="F6E1D5"/>
                       </a:solidFill>
                       <a:prstDash val="solid"/>
                     </a:lnR>
                     <a:lnT w="9525" cap="flat" cmpd="sng" algn="ctr">
                       <a:solidFill>
-                        <a:srgbClr val="F4DBCD"/>
+                        <a:srgbClr val="F6E1D5"/>
                       </a:solidFill>
                       <a:prstDash val="solid"/>
                     </a:lnT>
                     <a:lnB w="9525" cap="flat" cmpd="sng" algn="ctr">
                       <a:solidFill>
-                        <a:srgbClr val="F4DBCD"/>
+                        <a:srgbClr val="F6E1D5"/>
                       </a:solidFill>
                       <a:prstDash val="solid"/>
                     </a:lnB>
                     <a:solidFill>
-                      <a:srgbClr val="FBF3EF"/>
+                      <a:srgbClr val="FBF2EC"/>
                     </a:solidFill>
                   </a:tcPr>
                 </a:tc>
@@ -7759,7 +8078,7 @@
                       <a:r>
                         <a:rPr sz="1400" b="1">
                           <a:solidFill>
-                            <a:srgbClr val="492713"/>
+                            <a:srgbClr val="493427"/>
                           </a:solidFill>
                         </a:rPr>
                         <a:t>실손의료</a:t>
@@ -7769,30 +8088,30 @@
                   <a:tcPr anchor="ctr" marL="73152" marR="73152">
                     <a:lnL w="9525" cap="flat" cmpd="sng" algn="ctr">
                       <a:solidFill>
-                        <a:srgbClr val="F4DBCD"/>
+                        <a:srgbClr val="F6E1D5"/>
                       </a:solidFill>
                       <a:prstDash val="solid"/>
                     </a:lnL>
                     <a:lnR w="9525" cap="flat" cmpd="sng" algn="ctr">
                       <a:solidFill>
-                        <a:srgbClr val="F4DBCD"/>
+                        <a:srgbClr val="F6E1D5"/>
                       </a:solidFill>
                       <a:prstDash val="solid"/>
                     </a:lnR>
                     <a:lnT w="9525" cap="flat" cmpd="sng" algn="ctr">
                       <a:solidFill>
-                        <a:srgbClr val="F4DBCD"/>
+                        <a:srgbClr val="F6E1D5"/>
                       </a:solidFill>
                       <a:prstDash val="solid"/>
                     </a:lnT>
                     <a:lnB w="9525" cap="flat" cmpd="sng" algn="ctr">
                       <a:solidFill>
-                        <a:srgbClr val="F4DBCD"/>
+                        <a:srgbClr val="F6E1D5"/>
                       </a:solidFill>
                       <a:prstDash val="solid"/>
                     </a:lnB>
                     <a:solidFill>
-                      <a:srgbClr val="F4DBCD"/>
+                      <a:srgbClr val="F6E1D5"/>
                     </a:solidFill>
                   </a:tcPr>
                 </a:tc>
@@ -7805,7 +8124,7 @@
                       <a:r>
                         <a:rPr sz="1400" b="0">
                           <a:solidFill>
-                            <a:srgbClr val="2B2B2B"/>
+                            <a:srgbClr val="26231F"/>
                           </a:solidFill>
                         </a:rPr>
                         <a:t>□</a:t>
@@ -7815,25 +8134,25 @@
                   <a:tcPr anchor="ctr" marL="73152" marR="73152">
                     <a:lnL w="9525" cap="flat" cmpd="sng" algn="ctr">
                       <a:solidFill>
-                        <a:srgbClr val="F4DBCD"/>
+                        <a:srgbClr val="F6E1D5"/>
                       </a:solidFill>
                       <a:prstDash val="solid"/>
                     </a:lnL>
                     <a:lnR w="9525" cap="flat" cmpd="sng" algn="ctr">
                       <a:solidFill>
-                        <a:srgbClr val="F4DBCD"/>
+                        <a:srgbClr val="F6E1D5"/>
                       </a:solidFill>
                       <a:prstDash val="solid"/>
                     </a:lnR>
                     <a:lnT w="9525" cap="flat" cmpd="sng" algn="ctr">
                       <a:solidFill>
-                        <a:srgbClr val="F4DBCD"/>
+                        <a:srgbClr val="F6E1D5"/>
                       </a:solidFill>
                       <a:prstDash val="solid"/>
                     </a:lnT>
                     <a:lnB w="9525" cap="flat" cmpd="sng" algn="ctr">
                       <a:solidFill>
-                        <a:srgbClr val="F4DBCD"/>
+                        <a:srgbClr val="F6E1D5"/>
                       </a:solidFill>
                       <a:prstDash val="solid"/>
                     </a:lnB>
@@ -7851,7 +8170,7 @@
                       <a:r>
                         <a:rPr sz="1400" b="0">
                           <a:solidFill>
-                            <a:srgbClr val="2B2B2B"/>
+                            <a:srgbClr val="26231F"/>
                           </a:solidFill>
                         </a:rPr>
                         <a:t>□</a:t>
@@ -7861,25 +8180,25 @@
                   <a:tcPr anchor="ctr" marL="73152" marR="73152">
                     <a:lnL w="9525" cap="flat" cmpd="sng" algn="ctr">
                       <a:solidFill>
-                        <a:srgbClr val="F4DBCD"/>
+                        <a:srgbClr val="F6E1D5"/>
                       </a:solidFill>
                       <a:prstDash val="solid"/>
                     </a:lnL>
                     <a:lnR w="9525" cap="flat" cmpd="sng" algn="ctr">
                       <a:solidFill>
-                        <a:srgbClr val="F4DBCD"/>
+                        <a:srgbClr val="F6E1D5"/>
                       </a:solidFill>
                       <a:prstDash val="solid"/>
                     </a:lnR>
                     <a:lnT w="9525" cap="flat" cmpd="sng" algn="ctr">
                       <a:solidFill>
-                        <a:srgbClr val="F4DBCD"/>
+                        <a:srgbClr val="F6E1D5"/>
                       </a:solidFill>
                       <a:prstDash val="solid"/>
                     </a:lnT>
                     <a:lnB w="9525" cap="flat" cmpd="sng" algn="ctr">
                       <a:solidFill>
-                        <a:srgbClr val="F4DBCD"/>
+                        <a:srgbClr val="F6E1D5"/>
                       </a:solidFill>
                       <a:prstDash val="solid"/>
                     </a:lnB>
@@ -7897,7 +8216,7 @@
                       <a:r>
                         <a:rPr sz="1400" b="0">
                           <a:solidFill>
-                            <a:srgbClr val="2B2B2B"/>
+                            <a:srgbClr val="26231F"/>
                           </a:solidFill>
                         </a:rPr>
                         <a:t>□</a:t>
@@ -7907,25 +8226,25 @@
                   <a:tcPr anchor="ctr" marL="73152" marR="73152">
                     <a:lnL w="9525" cap="flat" cmpd="sng" algn="ctr">
                       <a:solidFill>
-                        <a:srgbClr val="F4DBCD"/>
+                        <a:srgbClr val="F6E1D5"/>
                       </a:solidFill>
                       <a:prstDash val="solid"/>
                     </a:lnL>
                     <a:lnR w="9525" cap="flat" cmpd="sng" algn="ctr">
                       <a:solidFill>
-                        <a:srgbClr val="F4DBCD"/>
+                        <a:srgbClr val="F6E1D5"/>
                       </a:solidFill>
                       <a:prstDash val="solid"/>
                     </a:lnR>
                     <a:lnT w="9525" cap="flat" cmpd="sng" algn="ctr">
                       <a:solidFill>
-                        <a:srgbClr val="F4DBCD"/>
+                        <a:srgbClr val="F6E1D5"/>
                       </a:solidFill>
                       <a:prstDash val="solid"/>
                     </a:lnT>
                     <a:lnB w="9525" cap="flat" cmpd="sng" algn="ctr">
                       <a:solidFill>
-                        <a:srgbClr val="F4DBCD"/>
+                        <a:srgbClr val="F6E1D5"/>
                       </a:solidFill>
                       <a:prstDash val="solid"/>
                     </a:lnB>
@@ -7945,7 +8264,7 @@
                       <a:r>
                         <a:rPr sz="1400" b="1">
                           <a:solidFill>
-                            <a:srgbClr val="492713"/>
+                            <a:srgbClr val="493427"/>
                           </a:solidFill>
                         </a:rPr>
                         <a:t>연금·노후자금</a:t>
@@ -7955,30 +8274,30 @@
                   <a:tcPr anchor="ctr" marL="73152" marR="73152">
                     <a:lnL w="9525" cap="flat" cmpd="sng" algn="ctr">
                       <a:solidFill>
-                        <a:srgbClr val="F4DBCD"/>
+                        <a:srgbClr val="F6E1D5"/>
                       </a:solidFill>
                       <a:prstDash val="solid"/>
                     </a:lnL>
                     <a:lnR w="9525" cap="flat" cmpd="sng" algn="ctr">
                       <a:solidFill>
-                        <a:srgbClr val="F4DBCD"/>
+                        <a:srgbClr val="F6E1D5"/>
                       </a:solidFill>
                       <a:prstDash val="solid"/>
                     </a:lnR>
                     <a:lnT w="9525" cap="flat" cmpd="sng" algn="ctr">
                       <a:solidFill>
-                        <a:srgbClr val="F4DBCD"/>
+                        <a:srgbClr val="F6E1D5"/>
                       </a:solidFill>
                       <a:prstDash val="solid"/>
                     </a:lnT>
                     <a:lnB w="9525" cap="flat" cmpd="sng" algn="ctr">
                       <a:solidFill>
-                        <a:srgbClr val="F4DBCD"/>
+                        <a:srgbClr val="F6E1D5"/>
                       </a:solidFill>
                       <a:prstDash val="solid"/>
                     </a:lnB>
                     <a:solidFill>
-                      <a:srgbClr val="F4DBCD"/>
+                      <a:srgbClr val="F6E1D5"/>
                     </a:solidFill>
                   </a:tcPr>
                 </a:tc>
@@ -7991,7 +8310,7 @@
                       <a:r>
                         <a:rPr sz="1400" b="0">
                           <a:solidFill>
-                            <a:srgbClr val="2B2B2B"/>
+                            <a:srgbClr val="26231F"/>
                           </a:solidFill>
                         </a:rPr>
                         <a:t>□</a:t>
@@ -8001,30 +8320,30 @@
                   <a:tcPr anchor="ctr" marL="73152" marR="73152">
                     <a:lnL w="9525" cap="flat" cmpd="sng" algn="ctr">
                       <a:solidFill>
-                        <a:srgbClr val="F4DBCD"/>
+                        <a:srgbClr val="F6E1D5"/>
                       </a:solidFill>
                       <a:prstDash val="solid"/>
                     </a:lnL>
                     <a:lnR w="9525" cap="flat" cmpd="sng" algn="ctr">
                       <a:solidFill>
-                        <a:srgbClr val="F4DBCD"/>
+                        <a:srgbClr val="F6E1D5"/>
                       </a:solidFill>
                       <a:prstDash val="solid"/>
                     </a:lnR>
                     <a:lnT w="9525" cap="flat" cmpd="sng" algn="ctr">
                       <a:solidFill>
-                        <a:srgbClr val="F4DBCD"/>
+                        <a:srgbClr val="F6E1D5"/>
                       </a:solidFill>
                       <a:prstDash val="solid"/>
                     </a:lnT>
                     <a:lnB w="9525" cap="flat" cmpd="sng" algn="ctr">
                       <a:solidFill>
-                        <a:srgbClr val="F4DBCD"/>
+                        <a:srgbClr val="F6E1D5"/>
                       </a:solidFill>
                       <a:prstDash val="solid"/>
                     </a:lnB>
                     <a:solidFill>
-                      <a:srgbClr val="FBF3EF"/>
+                      <a:srgbClr val="FBF2EC"/>
                     </a:solidFill>
                   </a:tcPr>
                 </a:tc>
@@ -8037,7 +8356,7 @@
                       <a:r>
                         <a:rPr sz="1400" b="0">
                           <a:solidFill>
-                            <a:srgbClr val="2B2B2B"/>
+                            <a:srgbClr val="26231F"/>
                           </a:solidFill>
                         </a:rPr>
                         <a:t>□</a:t>
@@ -8047,30 +8366,30 @@
                   <a:tcPr anchor="ctr" marL="73152" marR="73152">
                     <a:lnL w="9525" cap="flat" cmpd="sng" algn="ctr">
                       <a:solidFill>
-                        <a:srgbClr val="F4DBCD"/>
+                        <a:srgbClr val="F6E1D5"/>
                       </a:solidFill>
                       <a:prstDash val="solid"/>
                     </a:lnL>
                     <a:lnR w="9525" cap="flat" cmpd="sng" algn="ctr">
                       <a:solidFill>
-                        <a:srgbClr val="F4DBCD"/>
+                        <a:srgbClr val="F6E1D5"/>
                       </a:solidFill>
                       <a:prstDash val="solid"/>
                     </a:lnR>
                     <a:lnT w="9525" cap="flat" cmpd="sng" algn="ctr">
                       <a:solidFill>
-                        <a:srgbClr val="F4DBCD"/>
+                        <a:srgbClr val="F6E1D5"/>
                       </a:solidFill>
                       <a:prstDash val="solid"/>
                     </a:lnT>
                     <a:lnB w="9525" cap="flat" cmpd="sng" algn="ctr">
                       <a:solidFill>
-                        <a:srgbClr val="F4DBCD"/>
+                        <a:srgbClr val="F6E1D5"/>
                       </a:solidFill>
                       <a:prstDash val="solid"/>
                     </a:lnB>
                     <a:solidFill>
-                      <a:srgbClr val="FBF3EF"/>
+                      <a:srgbClr val="FBF2EC"/>
                     </a:solidFill>
                   </a:tcPr>
                 </a:tc>
@@ -8083,7 +8402,7 @@
                       <a:r>
                         <a:rPr sz="1400" b="0">
                           <a:solidFill>
-                            <a:srgbClr val="2B2B2B"/>
+                            <a:srgbClr val="26231F"/>
                           </a:solidFill>
                         </a:rPr>
                         <a:t>□</a:t>
@@ -8093,30 +8412,30 @@
                   <a:tcPr anchor="ctr" marL="73152" marR="73152">
                     <a:lnL w="9525" cap="flat" cmpd="sng" algn="ctr">
                       <a:solidFill>
-                        <a:srgbClr val="F4DBCD"/>
+                        <a:srgbClr val="F6E1D5"/>
                       </a:solidFill>
                       <a:prstDash val="solid"/>
                     </a:lnL>
                     <a:lnR w="9525" cap="flat" cmpd="sng" algn="ctr">
                       <a:solidFill>
-                        <a:srgbClr val="F4DBCD"/>
+                        <a:srgbClr val="F6E1D5"/>
                       </a:solidFill>
                       <a:prstDash val="solid"/>
                     </a:lnR>
                     <a:lnT w="9525" cap="flat" cmpd="sng" algn="ctr">
                       <a:solidFill>
-                        <a:srgbClr val="F4DBCD"/>
+                        <a:srgbClr val="F6E1D5"/>
                       </a:solidFill>
                       <a:prstDash val="solid"/>
                     </a:lnT>
                     <a:lnB w="9525" cap="flat" cmpd="sng" algn="ctr">
                       <a:solidFill>
-                        <a:srgbClr val="F4DBCD"/>
+                        <a:srgbClr val="F6E1D5"/>
                       </a:solidFill>
                       <a:prstDash val="solid"/>
                     </a:lnB>
                     <a:solidFill>
-                      <a:srgbClr val="FBF3EF"/>
+                      <a:srgbClr val="FBF2EC"/>
                     </a:solidFill>
                   </a:tcPr>
                 </a:tc>
@@ -8139,7 +8458,7 @@
     <p:bg>
       <p:bgPr>
         <a:solidFill>
-          <a:srgbClr val="FBF3EF"/>
+          <a:srgbClr val="FFFFFF"/>
         </a:solidFill>
         <a:effectLst/>
       </p:bgPr>
@@ -8159,46 +8478,113 @@
         </p:nvSpPr>
         <p:spPr>
           <a:xfrm>
-            <a:off x="256032" y="256032"/>
-            <a:ext cx="11679631" cy="6345936"/>
+            <a:off x="0" y="6565392"/>
+            <a:ext cx="12191695" cy="292608"/>
+          </a:xfrm>
+          <a:prstGeom prst="rect">
+            <a:avLst/>
+          </a:prstGeom>
+          <a:solidFill>
+            <a:srgbClr val="EBC4AD"/>
+          </a:solidFill>
+          <a:ln>
+            <a:noFill/>
+          </a:ln>
+        </p:spPr>
+        <p:txBody>
+          <a:bodyPr rtlCol="0" anchor="ctr"/>
+          <a:lstStyle/>
+          <a:p>
+            <a:pPr algn="ctr"/>
+          </a:p>
+        </p:txBody>
+      </p:sp>
+      <p:sp>
+        <p:nvSpPr>
+          <p:cNvPr id="4" name="장식"/>
+          <p:cNvSpPr/>
+          <p:nvPr/>
+        </p:nvSpPr>
+        <p:spPr>
+          <a:xfrm>
+            <a:off x="640080" y="566928"/>
+            <a:ext cx="10911535" cy="10972"/>
+          </a:xfrm>
+          <a:prstGeom prst="rect">
+            <a:avLst/>
+          </a:prstGeom>
+          <a:solidFill>
+            <a:srgbClr val="26231F"/>
+          </a:solidFill>
+          <a:ln>
+            <a:noFill/>
+          </a:ln>
+        </p:spPr>
+        <p:txBody>
+          <a:bodyPr rtlCol="0" anchor="ctr"/>
+          <a:lstStyle/>
+          <a:p>
+            <a:pPr algn="ctr"/>
+          </a:p>
+        </p:txBody>
+      </p:sp>
+      <p:sp>
+        <p:nvSpPr>
+          <p:cNvPr id="5" name="상단 라벨"/>
+          <p:cNvSpPr txBox="1"/>
+          <p:nvPr/>
+        </p:nvSpPr>
+        <p:spPr>
+          <a:xfrm>
+            <a:off x="640080" y="237744"/>
+            <a:ext cx="5486400" cy="274320"/>
           </a:xfrm>
           <a:prstGeom prst="rect">
             <a:avLst/>
           </a:prstGeom>
           <a:noFill/>
-          <a:ln w="28575">
-            <a:solidFill>
-              <a:srgbClr val="995229"/>
-            </a:solidFill>
-          </a:ln>
-        </p:spPr>
-        <p:txBody>
-          <a:bodyPr rtlCol="0" anchor="ctr"/>
-          <a:lstStyle/>
-          <a:p>
-            <a:pPr algn="ctr"/>
-          </a:p>
-        </p:txBody>
-      </p:sp>
-      <p:sp>
-        <p:nvSpPr>
-          <p:cNvPr id="4" name="장식"/>
+        </p:spPr>
+        <p:txBody>
+          <a:bodyPr wrap="square" lIns="54864" rIns="54864" tIns="27432" bIns="27432" anchor="ctr">
+            <a:noAutofit/>
+          </a:bodyPr>
+          <a:lstStyle/>
+          <a:p>
+            <a:pPr algn="l">
+              <a:lnSpc>
+                <a:spcPct val="115000"/>
+              </a:lnSpc>
+            </a:pPr>
+            <a:r>
+              <a:rPr sz="900" b="1" i="0" spc="250">
+                <a:solidFill>
+                  <a:srgbClr val="26231F"/>
+                </a:solidFill>
+              </a:rPr>
+              <a:t>INSURANCE CHECK</a:t>
+            </a:r>
+          </a:p>
+        </p:txBody>
+      </p:sp>
+      <p:sp>
+        <p:nvSpPr>
+          <p:cNvPr id="6" name="포인트"/>
           <p:cNvSpPr/>
           <p:nvPr/>
         </p:nvSpPr>
         <p:spPr>
           <a:xfrm>
-            <a:off x="384048" y="384048"/>
-            <a:ext cx="11423599" cy="6089904"/>
-          </a:xfrm>
-          <a:prstGeom prst="rect">
+            <a:off x="11204143" y="246888"/>
+            <a:ext cx="237744" cy="237744"/>
+          </a:xfrm>
+          <a:prstGeom prst="ellipse">
             <a:avLst/>
           </a:prstGeom>
-          <a:noFill/>
-          <a:ln w="9525">
-            <a:solidFill>
-              <a:srgbClr val="F4DBCD"/>
-            </a:solidFill>
+          <a:solidFill>
+            <a:srgbClr val="D89C79"/>
+          </a:solidFill>
+          <a:ln>
+            <a:noFill/>
           </a:ln>
         </p:spPr>
         <p:txBody>
@@ -8221,8 +8607,8 @@
         </p:nvSpPr>
         <p:spPr>
           <a:xfrm>
-            <a:off x="822960" y="548640"/>
-            <a:ext cx="9265615" cy="822960"/>
+            <a:off x="640080" y="731520"/>
+            <a:ext cx="10911535" cy="822960"/>
           </a:xfrm>
         </p:spPr>
         <p:txBody>
@@ -8239,7 +8625,7 @@
             <a:r>
               <a:rPr sz="3000" b="1" i="0">
                 <a:solidFill>
-                  <a:srgbClr val="492713"/>
+                  <a:srgbClr val="26231F"/>
                 </a:solidFill>
               </a:rPr>
               <a:t>월 보험료 한눈에</a:t>
@@ -8249,27 +8635,25 @@
       </p:sp>
       <p:sp>
         <p:nvSpPr>
-          <p:cNvPr id="5" name="카드 1"/>
+          <p:cNvPr id="7" name="카드 1"/>
           <p:cNvSpPr/>
           <p:nvPr/>
         </p:nvSpPr>
         <p:spPr>
           <a:xfrm>
-            <a:off x="822960" y="1554480"/>
-            <a:ext cx="3362858" cy="2926080"/>
+            <a:off x="640080" y="1783080"/>
+            <a:ext cx="3484778" cy="2926080"/>
           </a:xfrm>
           <a:prstGeom prst="roundRect">
             <a:avLst>
-              <a:gd name="adj" fmla="val 8000"/>
+              <a:gd name="adj" fmla="val 4000"/>
             </a:avLst>
           </a:prstGeom>
           <a:solidFill>
-            <a:srgbClr val="FBF3EF"/>
+            <a:srgbClr val="FBF2EC"/>
           </a:solidFill>
-          <a:ln w="15875">
-            <a:solidFill>
-              <a:srgbClr val="F4DBCD"/>
-            </a:solidFill>
+          <a:ln>
+            <a:noFill/>
           </a:ln>
         </p:spPr>
         <p:txBody>
@@ -8282,20 +8666,49 @@
       </p:sp>
       <p:sp>
         <p:nvSpPr>
-          <p:cNvPr id="6" name="번호 1"/>
+          <p:cNvPr id="8" name="포인트 막대"/>
           <p:cNvSpPr/>
           <p:nvPr/>
         </p:nvSpPr>
         <p:spPr>
           <a:xfrm>
-            <a:off x="1005840" y="1737360"/>
+            <a:off x="640080" y="1892807"/>
+            <a:ext cx="54864" cy="2706624"/>
+          </a:xfrm>
+          <a:prstGeom prst="rect">
+            <a:avLst/>
+          </a:prstGeom>
+          <a:solidFill>
+            <a:srgbClr val="D89C79"/>
+          </a:solidFill>
+          <a:ln>
+            <a:noFill/>
+          </a:ln>
+        </p:spPr>
+        <p:txBody>
+          <a:bodyPr rtlCol="0" anchor="ctr"/>
+          <a:lstStyle/>
+          <a:p>
+            <a:pPr algn="ctr"/>
+          </a:p>
+        </p:txBody>
+      </p:sp>
+      <p:sp>
+        <p:nvSpPr>
+          <p:cNvPr id="9" name="번호 1"/>
+          <p:cNvSpPr/>
+          <p:nvPr/>
+        </p:nvSpPr>
+        <p:spPr>
+          <a:xfrm>
+            <a:off x="822959" y="1965960"/>
             <a:ext cx="457200" cy="457200"/>
           </a:xfrm>
           <a:prstGeom prst="ellipse">
             <a:avLst/>
           </a:prstGeom>
           <a:solidFill>
-            <a:srgbClr val="995229"/>
+            <a:srgbClr val="D89C79"/>
           </a:solidFill>
           <a:ln>
             <a:noFill/>
@@ -8315,7 +8728,7 @@
             <a:r>
               <a:rPr sz="1600" b="1" i="0">
                 <a:solidFill>
-                  <a:srgbClr val="FFFFFF"/>
+                  <a:srgbClr val="26231F"/>
                 </a:solidFill>
               </a:rPr>
               <a:t>1</a:t>
@@ -8325,14 +8738,14 @@
       </p:sp>
       <p:sp>
         <p:nvSpPr>
-          <p:cNvPr id="7" name="TextBox 6"/>
+          <p:cNvPr id="10" name="TextBox 9"/>
           <p:cNvSpPr txBox="1"/>
           <p:nvPr/>
         </p:nvSpPr>
         <p:spPr>
           <a:xfrm>
-            <a:off x="960120" y="2331720"/>
-            <a:ext cx="3088538" cy="640080"/>
+            <a:off x="777240" y="2560320"/>
+            <a:ext cx="3210458" cy="640080"/>
           </a:xfrm>
           <a:prstGeom prst="rect">
             <a:avLst/>
@@ -8353,7 +8766,7 @@
             <a:r>
               <a:rPr sz="1700" b="1" i="0">
                 <a:solidFill>
-                  <a:srgbClr val="492713"/>
+                  <a:srgbClr val="493427"/>
                 </a:solidFill>
               </a:rPr>
               <a:t>월 보험료 합계</a:t>
@@ -8363,14 +8776,14 @@
       </p:sp>
       <p:sp>
         <p:nvSpPr>
-          <p:cNvPr id="8" name="TextBox 7"/>
+          <p:cNvPr id="11" name="TextBox 10"/>
           <p:cNvSpPr txBox="1"/>
           <p:nvPr/>
         </p:nvSpPr>
         <p:spPr>
           <a:xfrm>
-            <a:off x="960120" y="3017520"/>
-            <a:ext cx="3088538" cy="1325880"/>
+            <a:off x="777240" y="3246120"/>
+            <a:ext cx="3210458" cy="1325880"/>
           </a:xfrm>
           <a:prstGeom prst="rect">
             <a:avLst/>
@@ -8391,7 +8804,7 @@
             <a:r>
               <a:rPr sz="3000" b="0" i="0">
                 <a:solidFill>
-                  <a:srgbClr val="2B2B2B"/>
+                  <a:srgbClr val="26231F"/>
                 </a:solidFill>
               </a:rPr>
               <a:t>0원</a:t>
@@ -8401,27 +8814,25 @@
       </p:sp>
       <p:sp>
         <p:nvSpPr>
-          <p:cNvPr id="9" name="카드 2"/>
+          <p:cNvPr id="12" name="카드 2"/>
           <p:cNvSpPr/>
           <p:nvPr/>
         </p:nvSpPr>
         <p:spPr>
           <a:xfrm>
-            <a:off x="4414418" y="1554480"/>
-            <a:ext cx="3362858" cy="2926080"/>
+            <a:off x="4353458" y="1783080"/>
+            <a:ext cx="3484778" cy="2926080"/>
           </a:xfrm>
           <a:prstGeom prst="roundRect">
             <a:avLst>
-              <a:gd name="adj" fmla="val 8000"/>
+              <a:gd name="adj" fmla="val 4000"/>
             </a:avLst>
           </a:prstGeom>
           <a:solidFill>
-            <a:srgbClr val="FBF3EF"/>
+            <a:srgbClr val="FBF2EC"/>
           </a:solidFill>
-          <a:ln w="15875">
-            <a:solidFill>
-              <a:srgbClr val="F4DBCD"/>
-            </a:solidFill>
+          <a:ln>
+            <a:noFill/>
           </a:ln>
         </p:spPr>
         <p:txBody>
@@ -8434,20 +8845,49 @@
       </p:sp>
       <p:sp>
         <p:nvSpPr>
-          <p:cNvPr id="10" name="번호 2"/>
+          <p:cNvPr id="13" name="포인트 막대"/>
           <p:cNvSpPr/>
           <p:nvPr/>
         </p:nvSpPr>
         <p:spPr>
           <a:xfrm>
-            <a:off x="4597298" y="1737360"/>
+            <a:off x="4353458" y="1892807"/>
+            <a:ext cx="54864" cy="2706624"/>
+          </a:xfrm>
+          <a:prstGeom prst="rect">
+            <a:avLst/>
+          </a:prstGeom>
+          <a:solidFill>
+            <a:srgbClr val="D89C79"/>
+          </a:solidFill>
+          <a:ln>
+            <a:noFill/>
+          </a:ln>
+        </p:spPr>
+        <p:txBody>
+          <a:bodyPr rtlCol="0" anchor="ctr"/>
+          <a:lstStyle/>
+          <a:p>
+            <a:pPr algn="ctr"/>
+          </a:p>
+        </p:txBody>
+      </p:sp>
+      <p:sp>
+        <p:nvSpPr>
+          <p:cNvPr id="14" name="번호 2"/>
+          <p:cNvSpPr/>
+          <p:nvPr/>
+        </p:nvSpPr>
+        <p:spPr>
+          <a:xfrm>
+            <a:off x="4536338" y="1965960"/>
             <a:ext cx="457200" cy="457200"/>
           </a:xfrm>
           <a:prstGeom prst="ellipse">
             <a:avLst/>
           </a:prstGeom>
           <a:solidFill>
-            <a:srgbClr val="995229"/>
+            <a:srgbClr val="D89C79"/>
           </a:solidFill>
           <a:ln>
             <a:noFill/>
@@ -8467,7 +8907,7 @@
             <a:r>
               <a:rPr sz="1600" b="1" i="0">
                 <a:solidFill>
-                  <a:srgbClr val="FFFFFF"/>
+                  <a:srgbClr val="26231F"/>
                 </a:solidFill>
               </a:rPr>
               <a:t>2</a:t>
@@ -8477,14 +8917,14 @@
       </p:sp>
       <p:sp>
         <p:nvSpPr>
-          <p:cNvPr id="11" name="TextBox 10"/>
+          <p:cNvPr id="15" name="TextBox 14"/>
           <p:cNvSpPr txBox="1"/>
           <p:nvPr/>
         </p:nvSpPr>
         <p:spPr>
           <a:xfrm>
-            <a:off x="4551578" y="2331720"/>
-            <a:ext cx="3088538" cy="640080"/>
+            <a:off x="4490618" y="2560320"/>
+            <a:ext cx="3210458" cy="640080"/>
           </a:xfrm>
           <a:prstGeom prst="rect">
             <a:avLst/>
@@ -8505,7 +8945,7 @@
             <a:r>
               <a:rPr sz="1700" b="1" i="0">
                 <a:solidFill>
-                  <a:srgbClr val="492713"/>
+                  <a:srgbClr val="493427"/>
                 </a:solidFill>
               </a:rPr>
               <a:t>연 보험료 합계</a:t>
@@ -8515,14 +8955,14 @@
       </p:sp>
       <p:sp>
         <p:nvSpPr>
-          <p:cNvPr id="12" name="TextBox 11"/>
+          <p:cNvPr id="16" name="TextBox 15"/>
           <p:cNvSpPr txBox="1"/>
           <p:nvPr/>
         </p:nvSpPr>
         <p:spPr>
           <a:xfrm>
-            <a:off x="4551578" y="3017520"/>
-            <a:ext cx="3088538" cy="1325880"/>
+            <a:off x="4490618" y="3246120"/>
+            <a:ext cx="3210458" cy="1325880"/>
           </a:xfrm>
           <a:prstGeom prst="rect">
             <a:avLst/>
@@ -8543,7 +8983,7 @@
             <a:r>
               <a:rPr sz="3000" b="0" i="0">
                 <a:solidFill>
-                  <a:srgbClr val="2B2B2B"/>
+                  <a:srgbClr val="26231F"/>
                 </a:solidFill>
               </a:rPr>
               <a:t>0원</a:t>
@@ -8553,27 +8993,25 @@
       </p:sp>
       <p:sp>
         <p:nvSpPr>
-          <p:cNvPr id="13" name="카드 3"/>
+          <p:cNvPr id="17" name="카드 3"/>
           <p:cNvSpPr/>
           <p:nvPr/>
         </p:nvSpPr>
         <p:spPr>
           <a:xfrm>
-            <a:off x="8005876" y="1554480"/>
-            <a:ext cx="3362858" cy="2926080"/>
+            <a:off x="8066836" y="1783080"/>
+            <a:ext cx="3484778" cy="2926080"/>
           </a:xfrm>
           <a:prstGeom prst="roundRect">
             <a:avLst>
-              <a:gd name="adj" fmla="val 8000"/>
+              <a:gd name="adj" fmla="val 4000"/>
             </a:avLst>
           </a:prstGeom>
           <a:solidFill>
-            <a:srgbClr val="FBF3EF"/>
+            <a:srgbClr val="FBF2EC"/>
           </a:solidFill>
-          <a:ln w="15875">
-            <a:solidFill>
-              <a:srgbClr val="F4DBCD"/>
-            </a:solidFill>
+          <a:ln>
+            <a:noFill/>
           </a:ln>
         </p:spPr>
         <p:txBody>
@@ -8586,20 +9024,49 @@
       </p:sp>
       <p:sp>
         <p:nvSpPr>
-          <p:cNvPr id="14" name="번호 3"/>
+          <p:cNvPr id="18" name="포인트 막대"/>
           <p:cNvSpPr/>
           <p:nvPr/>
         </p:nvSpPr>
         <p:spPr>
           <a:xfrm>
-            <a:off x="8188756" y="1737360"/>
+            <a:off x="8066836" y="1892807"/>
+            <a:ext cx="54864" cy="2706624"/>
+          </a:xfrm>
+          <a:prstGeom prst="rect">
+            <a:avLst/>
+          </a:prstGeom>
+          <a:solidFill>
+            <a:srgbClr val="D89C79"/>
+          </a:solidFill>
+          <a:ln>
+            <a:noFill/>
+          </a:ln>
+        </p:spPr>
+        <p:txBody>
+          <a:bodyPr rtlCol="0" anchor="ctr"/>
+          <a:lstStyle/>
+          <a:p>
+            <a:pPr algn="ctr"/>
+          </a:p>
+        </p:txBody>
+      </p:sp>
+      <p:sp>
+        <p:nvSpPr>
+          <p:cNvPr id="19" name="번호 3"/>
+          <p:cNvSpPr/>
+          <p:nvPr/>
+        </p:nvSpPr>
+        <p:spPr>
+          <a:xfrm>
+            <a:off x="8249716" y="1965960"/>
             <a:ext cx="457200" cy="457200"/>
           </a:xfrm>
           <a:prstGeom prst="ellipse">
             <a:avLst/>
           </a:prstGeom>
           <a:solidFill>
-            <a:srgbClr val="995229"/>
+            <a:srgbClr val="D89C79"/>
           </a:solidFill>
           <a:ln>
             <a:noFill/>
@@ -8619,7 +9086,7 @@
             <a:r>
               <a:rPr sz="1600" b="1" i="0">
                 <a:solidFill>
-                  <a:srgbClr val="FFFFFF"/>
+                  <a:srgbClr val="26231F"/>
                 </a:solidFill>
               </a:rPr>
               <a:t>3</a:t>
@@ -8629,14 +9096,14 @@
       </p:sp>
       <p:sp>
         <p:nvSpPr>
-          <p:cNvPr id="15" name="TextBox 14"/>
+          <p:cNvPr id="20" name="TextBox 19"/>
           <p:cNvSpPr txBox="1"/>
           <p:nvPr/>
         </p:nvSpPr>
         <p:spPr>
           <a:xfrm>
-            <a:off x="8143036" y="2331720"/>
-            <a:ext cx="3088538" cy="640080"/>
+            <a:off x="8203996" y="2560320"/>
+            <a:ext cx="3210458" cy="640080"/>
           </a:xfrm>
           <a:prstGeom prst="rect">
             <a:avLst/>
@@ -8657,7 +9124,7 @@
             <a:r>
               <a:rPr sz="1700" b="1" i="0">
                 <a:solidFill>
-                  <a:srgbClr val="492713"/>
+                  <a:srgbClr val="493427"/>
                 </a:solidFill>
               </a:rPr>
               <a:t>월 소득 대비</a:t>
@@ -8667,14 +9134,14 @@
       </p:sp>
       <p:sp>
         <p:nvSpPr>
-          <p:cNvPr id="16" name="TextBox 15"/>
+          <p:cNvPr id="21" name="TextBox 20"/>
           <p:cNvSpPr txBox="1"/>
           <p:nvPr/>
         </p:nvSpPr>
         <p:spPr>
           <a:xfrm>
-            <a:off x="8143036" y="3017520"/>
-            <a:ext cx="3088538" cy="1325880"/>
+            <a:off x="8203996" y="3246120"/>
+            <a:ext cx="3210458" cy="1325880"/>
           </a:xfrm>
           <a:prstGeom prst="rect">
             <a:avLst/>
@@ -8695,7 +9162,7 @@
             <a:r>
               <a:rPr sz="3000" b="0" i="0">
                 <a:solidFill>
-                  <a:srgbClr val="2B2B2B"/>
+                  <a:srgbClr val="26231F"/>
                 </a:solidFill>
               </a:rPr>
               <a:t>0 %</a:t>
@@ -8705,14 +9172,14 @@
       </p:sp>
       <p:sp>
         <p:nvSpPr>
-          <p:cNvPr id="17" name="안내"/>
+          <p:cNvPr id="22" name="안내"/>
           <p:cNvSpPr txBox="1"/>
           <p:nvPr/>
         </p:nvSpPr>
         <p:spPr>
           <a:xfrm>
-            <a:off x="822960" y="4663440"/>
-            <a:ext cx="10545775" cy="365760"/>
+            <a:off x="640080" y="4892040"/>
+            <a:ext cx="10911535" cy="365760"/>
           </a:xfrm>
           <a:prstGeom prst="rect">
             <a:avLst/>
@@ -8755,7 +9222,7 @@
     <p:bg>
       <p:bgPr>
         <a:solidFill>
-          <a:srgbClr val="FBF3EF"/>
+          <a:srgbClr val="FFFFFF"/>
         </a:solidFill>
         <a:effectLst/>
       </p:bgPr>
@@ -8775,46 +9242,113 @@
         </p:nvSpPr>
         <p:spPr>
           <a:xfrm>
-            <a:off x="256032" y="256032"/>
-            <a:ext cx="11679631" cy="6345936"/>
+            <a:off x="0" y="6565392"/>
+            <a:ext cx="12191695" cy="292608"/>
+          </a:xfrm>
+          <a:prstGeom prst="rect">
+            <a:avLst/>
+          </a:prstGeom>
+          <a:solidFill>
+            <a:srgbClr val="EBC4AD"/>
+          </a:solidFill>
+          <a:ln>
+            <a:noFill/>
+          </a:ln>
+        </p:spPr>
+        <p:txBody>
+          <a:bodyPr rtlCol="0" anchor="ctr"/>
+          <a:lstStyle/>
+          <a:p>
+            <a:pPr algn="ctr"/>
+          </a:p>
+        </p:txBody>
+      </p:sp>
+      <p:sp>
+        <p:nvSpPr>
+          <p:cNvPr id="4" name="장식"/>
+          <p:cNvSpPr/>
+          <p:nvPr/>
+        </p:nvSpPr>
+        <p:spPr>
+          <a:xfrm>
+            <a:off x="640080" y="566928"/>
+            <a:ext cx="10911535" cy="10972"/>
+          </a:xfrm>
+          <a:prstGeom prst="rect">
+            <a:avLst/>
+          </a:prstGeom>
+          <a:solidFill>
+            <a:srgbClr val="26231F"/>
+          </a:solidFill>
+          <a:ln>
+            <a:noFill/>
+          </a:ln>
+        </p:spPr>
+        <p:txBody>
+          <a:bodyPr rtlCol="0" anchor="ctr"/>
+          <a:lstStyle/>
+          <a:p>
+            <a:pPr algn="ctr"/>
+          </a:p>
+        </p:txBody>
+      </p:sp>
+      <p:sp>
+        <p:nvSpPr>
+          <p:cNvPr id="5" name="상단 라벨"/>
+          <p:cNvSpPr txBox="1"/>
+          <p:nvPr/>
+        </p:nvSpPr>
+        <p:spPr>
+          <a:xfrm>
+            <a:off x="640080" y="237744"/>
+            <a:ext cx="5486400" cy="274320"/>
           </a:xfrm>
           <a:prstGeom prst="rect">
             <a:avLst/>
           </a:prstGeom>
           <a:noFill/>
-          <a:ln w="28575">
-            <a:solidFill>
-              <a:srgbClr val="995229"/>
-            </a:solidFill>
-          </a:ln>
-        </p:spPr>
-        <p:txBody>
-          <a:bodyPr rtlCol="0" anchor="ctr"/>
-          <a:lstStyle/>
-          <a:p>
-            <a:pPr algn="ctr"/>
-          </a:p>
-        </p:txBody>
-      </p:sp>
-      <p:sp>
-        <p:nvSpPr>
-          <p:cNvPr id="4" name="장식"/>
+        </p:spPr>
+        <p:txBody>
+          <a:bodyPr wrap="square" lIns="54864" rIns="54864" tIns="27432" bIns="27432" anchor="ctr">
+            <a:noAutofit/>
+          </a:bodyPr>
+          <a:lstStyle/>
+          <a:p>
+            <a:pPr algn="l">
+              <a:lnSpc>
+                <a:spcPct val="115000"/>
+              </a:lnSpc>
+            </a:pPr>
+            <a:r>
+              <a:rPr sz="900" b="1" i="0" spc="250">
+                <a:solidFill>
+                  <a:srgbClr val="26231F"/>
+                </a:solidFill>
+              </a:rPr>
+              <a:t>INSURANCE CHECK</a:t>
+            </a:r>
+          </a:p>
+        </p:txBody>
+      </p:sp>
+      <p:sp>
+        <p:nvSpPr>
+          <p:cNvPr id="6" name="포인트"/>
           <p:cNvSpPr/>
           <p:nvPr/>
         </p:nvSpPr>
         <p:spPr>
           <a:xfrm>
-            <a:off x="384048" y="384048"/>
-            <a:ext cx="11423599" cy="6089904"/>
-          </a:xfrm>
-          <a:prstGeom prst="rect">
+            <a:off x="11204143" y="246888"/>
+            <a:ext cx="237744" cy="237744"/>
+          </a:xfrm>
+          <a:prstGeom prst="ellipse">
             <a:avLst/>
           </a:prstGeom>
-          <a:noFill/>
-          <a:ln w="9525">
-            <a:solidFill>
-              <a:srgbClr val="F4DBCD"/>
-            </a:solidFill>
+          <a:solidFill>
+            <a:srgbClr val="D89C79"/>
+          </a:solidFill>
+          <a:ln>
+            <a:noFill/>
           </a:ln>
         </p:spPr>
         <p:txBody>
@@ -8837,8 +9371,8 @@
         </p:nvSpPr>
         <p:spPr>
           <a:xfrm>
-            <a:off x="822960" y="548640"/>
-            <a:ext cx="9265615" cy="822960"/>
+            <a:off x="640080" y="731520"/>
+            <a:ext cx="10911535" cy="822960"/>
           </a:xfrm>
         </p:spPr>
         <p:txBody>
@@ -8855,7 +9389,7 @@
             <a:r>
               <a:rPr sz="3000" b="1" i="0">
                 <a:solidFill>
-                  <a:srgbClr val="492713"/>
+                  <a:srgbClr val="26231F"/>
                 </a:solidFill>
               </a:rPr>
               <a:t>점검 메모와 다음 할 일</a:t>
@@ -8865,27 +9399,25 @@
       </p:sp>
       <p:sp>
         <p:nvSpPr>
-          <p:cNvPr id="5" name="카드 1"/>
+          <p:cNvPr id="7" name="카드 1"/>
           <p:cNvSpPr/>
           <p:nvPr/>
         </p:nvSpPr>
         <p:spPr>
           <a:xfrm>
-            <a:off x="822960" y="1554480"/>
-            <a:ext cx="3362858" cy="3977639"/>
+            <a:off x="640080" y="1783080"/>
+            <a:ext cx="3484778" cy="3749039"/>
           </a:xfrm>
           <a:prstGeom prst="roundRect">
             <a:avLst>
-              <a:gd name="adj" fmla="val 8000"/>
+              <a:gd name="adj" fmla="val 4000"/>
             </a:avLst>
           </a:prstGeom>
           <a:solidFill>
-            <a:srgbClr val="FBF3EF"/>
+            <a:srgbClr val="FBF2EC"/>
           </a:solidFill>
-          <a:ln w="15875">
-            <a:solidFill>
-              <a:srgbClr val="F4DBCD"/>
-            </a:solidFill>
+          <a:ln>
+            <a:noFill/>
           </a:ln>
         </p:spPr>
         <p:txBody>
@@ -8898,20 +9430,49 @@
       </p:sp>
       <p:sp>
         <p:nvSpPr>
-          <p:cNvPr id="6" name="번호 1"/>
+          <p:cNvPr id="8" name="포인트 막대"/>
           <p:cNvSpPr/>
           <p:nvPr/>
         </p:nvSpPr>
         <p:spPr>
           <a:xfrm>
-            <a:off x="1005840" y="1737360"/>
+            <a:off x="640080" y="1892807"/>
+            <a:ext cx="54864" cy="3529583"/>
+          </a:xfrm>
+          <a:prstGeom prst="rect">
+            <a:avLst/>
+          </a:prstGeom>
+          <a:solidFill>
+            <a:srgbClr val="D89C79"/>
+          </a:solidFill>
+          <a:ln>
+            <a:noFill/>
+          </a:ln>
+        </p:spPr>
+        <p:txBody>
+          <a:bodyPr rtlCol="0" anchor="ctr"/>
+          <a:lstStyle/>
+          <a:p>
+            <a:pPr algn="ctr"/>
+          </a:p>
+        </p:txBody>
+      </p:sp>
+      <p:sp>
+        <p:nvSpPr>
+          <p:cNvPr id="9" name="번호 1"/>
+          <p:cNvSpPr/>
+          <p:nvPr/>
+        </p:nvSpPr>
+        <p:spPr>
+          <a:xfrm>
+            <a:off x="822959" y="1965960"/>
             <a:ext cx="457200" cy="457200"/>
           </a:xfrm>
           <a:prstGeom prst="ellipse">
             <a:avLst/>
           </a:prstGeom>
           <a:solidFill>
-            <a:srgbClr val="995229"/>
+            <a:srgbClr val="D89C79"/>
           </a:solidFill>
           <a:ln>
             <a:noFill/>
@@ -8931,7 +9492,7 @@
             <a:r>
               <a:rPr sz="1600" b="1" i="0">
                 <a:solidFill>
-                  <a:srgbClr val="FFFFFF"/>
+                  <a:srgbClr val="26231F"/>
                 </a:solidFill>
               </a:rPr>
               <a:t>1</a:t>
@@ -8941,14 +9502,14 @@
       </p:sp>
       <p:sp>
         <p:nvSpPr>
-          <p:cNvPr id="7" name="TextBox 6"/>
+          <p:cNvPr id="10" name="TextBox 9"/>
           <p:cNvSpPr txBox="1"/>
           <p:nvPr/>
         </p:nvSpPr>
         <p:spPr>
           <a:xfrm>
-            <a:off x="960120" y="2331720"/>
-            <a:ext cx="3088538" cy="640080"/>
+            <a:off x="777240" y="2560320"/>
+            <a:ext cx="3210458" cy="640080"/>
           </a:xfrm>
           <a:prstGeom prst="rect">
             <a:avLst/>
@@ -8969,7 +9530,7 @@
             <a:r>
               <a:rPr sz="1800" b="1" i="0">
                 <a:solidFill>
-                  <a:srgbClr val="492713"/>
+                  <a:srgbClr val="493427"/>
                 </a:solidFill>
               </a:rPr>
               <a:t>확인할 것</a:t>
@@ -8979,14 +9540,14 @@
       </p:sp>
       <p:sp>
         <p:nvSpPr>
-          <p:cNvPr id="8" name="TextBox 7"/>
+          <p:cNvPr id="11" name="TextBox 10"/>
           <p:cNvSpPr txBox="1"/>
           <p:nvPr/>
         </p:nvSpPr>
         <p:spPr>
           <a:xfrm>
-            <a:off x="960120" y="3017520"/>
-            <a:ext cx="3088538" cy="2377439"/>
+            <a:off x="777240" y="3246120"/>
+            <a:ext cx="3210458" cy="2148839"/>
           </a:xfrm>
           <a:prstGeom prst="rect">
             <a:avLst/>
@@ -9007,7 +9568,7 @@
             <a:r>
               <a:rPr sz="1500" b="0" i="0">
                 <a:solidFill>
-                  <a:srgbClr val="2B2B2B"/>
+                  <a:srgbClr val="26231F"/>
                 </a:solidFill>
               </a:rPr>
               <a:t>내용을 입력하세요</a:t>
@@ -9017,27 +9578,25 @@
       </p:sp>
       <p:sp>
         <p:nvSpPr>
-          <p:cNvPr id="9" name="카드 2"/>
+          <p:cNvPr id="12" name="카드 2"/>
           <p:cNvSpPr/>
           <p:nvPr/>
         </p:nvSpPr>
         <p:spPr>
           <a:xfrm>
-            <a:off x="4414418" y="1554480"/>
-            <a:ext cx="3362858" cy="3977639"/>
+            <a:off x="4353458" y="1783080"/>
+            <a:ext cx="3484778" cy="3749039"/>
           </a:xfrm>
           <a:prstGeom prst="roundRect">
             <a:avLst>
-              <a:gd name="adj" fmla="val 8000"/>
+              <a:gd name="adj" fmla="val 4000"/>
             </a:avLst>
           </a:prstGeom>
           <a:solidFill>
-            <a:srgbClr val="FBF3EF"/>
+            <a:srgbClr val="FBF2EC"/>
           </a:solidFill>
-          <a:ln w="15875">
-            <a:solidFill>
-              <a:srgbClr val="F4DBCD"/>
-            </a:solidFill>
+          <a:ln>
+            <a:noFill/>
           </a:ln>
         </p:spPr>
         <p:txBody>
@@ -9050,20 +9609,49 @@
       </p:sp>
       <p:sp>
         <p:nvSpPr>
-          <p:cNvPr id="10" name="번호 2"/>
+          <p:cNvPr id="13" name="포인트 막대"/>
           <p:cNvSpPr/>
           <p:nvPr/>
         </p:nvSpPr>
         <p:spPr>
           <a:xfrm>
-            <a:off x="4597298" y="1737360"/>
+            <a:off x="4353458" y="1892807"/>
+            <a:ext cx="54864" cy="3529583"/>
+          </a:xfrm>
+          <a:prstGeom prst="rect">
+            <a:avLst/>
+          </a:prstGeom>
+          <a:solidFill>
+            <a:srgbClr val="D89C79"/>
+          </a:solidFill>
+          <a:ln>
+            <a:noFill/>
+          </a:ln>
+        </p:spPr>
+        <p:txBody>
+          <a:bodyPr rtlCol="0" anchor="ctr"/>
+          <a:lstStyle/>
+          <a:p>
+            <a:pPr algn="ctr"/>
+          </a:p>
+        </p:txBody>
+      </p:sp>
+      <p:sp>
+        <p:nvSpPr>
+          <p:cNvPr id="14" name="번호 2"/>
+          <p:cNvSpPr/>
+          <p:nvPr/>
+        </p:nvSpPr>
+        <p:spPr>
+          <a:xfrm>
+            <a:off x="4536338" y="1965960"/>
             <a:ext cx="457200" cy="457200"/>
           </a:xfrm>
           <a:prstGeom prst="ellipse">
             <a:avLst/>
           </a:prstGeom>
           <a:solidFill>
-            <a:srgbClr val="995229"/>
+            <a:srgbClr val="D89C79"/>
           </a:solidFill>
           <a:ln>
             <a:noFill/>
@@ -9083,7 +9671,7 @@
             <a:r>
               <a:rPr sz="1600" b="1" i="0">
                 <a:solidFill>
-                  <a:srgbClr val="FFFFFF"/>
+                  <a:srgbClr val="26231F"/>
                 </a:solidFill>
               </a:rPr>
               <a:t>2</a:t>
@@ -9093,14 +9681,14 @@
       </p:sp>
       <p:sp>
         <p:nvSpPr>
-          <p:cNvPr id="11" name="TextBox 10"/>
+          <p:cNvPr id="15" name="TextBox 14"/>
           <p:cNvSpPr txBox="1"/>
           <p:nvPr/>
         </p:nvSpPr>
         <p:spPr>
           <a:xfrm>
-            <a:off x="4551578" y="2331720"/>
-            <a:ext cx="3088538" cy="640080"/>
+            <a:off x="4490618" y="2560320"/>
+            <a:ext cx="3210458" cy="640080"/>
           </a:xfrm>
           <a:prstGeom prst="rect">
             <a:avLst/>
@@ -9121,7 +9709,7 @@
             <a:r>
               <a:rPr sz="1800" b="1" i="0">
                 <a:solidFill>
-                  <a:srgbClr val="492713"/>
+                  <a:srgbClr val="493427"/>
                 </a:solidFill>
               </a:rPr>
               <a:t>문의할 것</a:t>
@@ -9131,14 +9719,14 @@
       </p:sp>
       <p:sp>
         <p:nvSpPr>
-          <p:cNvPr id="12" name="TextBox 11"/>
+          <p:cNvPr id="16" name="TextBox 15"/>
           <p:cNvSpPr txBox="1"/>
           <p:nvPr/>
         </p:nvSpPr>
         <p:spPr>
           <a:xfrm>
-            <a:off x="4551578" y="3017520"/>
-            <a:ext cx="3088538" cy="2377439"/>
+            <a:off x="4490618" y="3246120"/>
+            <a:ext cx="3210458" cy="2148839"/>
           </a:xfrm>
           <a:prstGeom prst="rect">
             <a:avLst/>
@@ -9159,7 +9747,7 @@
             <a:r>
               <a:rPr sz="1500" b="0" i="0">
                 <a:solidFill>
-                  <a:srgbClr val="2B2B2B"/>
+                  <a:srgbClr val="26231F"/>
                 </a:solidFill>
               </a:rPr>
               <a:t>내용을 입력하세요</a:t>
@@ -9169,27 +9757,25 @@
       </p:sp>
       <p:sp>
         <p:nvSpPr>
-          <p:cNvPr id="13" name="카드 3"/>
+          <p:cNvPr id="17" name="카드 3"/>
           <p:cNvSpPr/>
           <p:nvPr/>
         </p:nvSpPr>
         <p:spPr>
           <a:xfrm>
-            <a:off x="8005876" y="1554480"/>
-            <a:ext cx="3362858" cy="3977639"/>
+            <a:off x="8066836" y="1783080"/>
+            <a:ext cx="3484778" cy="3749039"/>
           </a:xfrm>
           <a:prstGeom prst="roundRect">
             <a:avLst>
-              <a:gd name="adj" fmla="val 8000"/>
+              <a:gd name="adj" fmla="val 4000"/>
             </a:avLst>
           </a:prstGeom>
           <a:solidFill>
-            <a:srgbClr val="FBF3EF"/>
+            <a:srgbClr val="FBF2EC"/>
           </a:solidFill>
-          <a:ln w="15875">
-            <a:solidFill>
-              <a:srgbClr val="F4DBCD"/>
-            </a:solidFill>
+          <a:ln>
+            <a:noFill/>
           </a:ln>
         </p:spPr>
         <p:txBody>
@@ -9202,20 +9788,49 @@
       </p:sp>
       <p:sp>
         <p:nvSpPr>
-          <p:cNvPr id="14" name="번호 3"/>
+          <p:cNvPr id="18" name="포인트 막대"/>
           <p:cNvSpPr/>
           <p:nvPr/>
         </p:nvSpPr>
         <p:spPr>
           <a:xfrm>
-            <a:off x="8188756" y="1737360"/>
+            <a:off x="8066836" y="1892807"/>
+            <a:ext cx="54864" cy="3529583"/>
+          </a:xfrm>
+          <a:prstGeom prst="rect">
+            <a:avLst/>
+          </a:prstGeom>
+          <a:solidFill>
+            <a:srgbClr val="D89C79"/>
+          </a:solidFill>
+          <a:ln>
+            <a:noFill/>
+          </a:ln>
+        </p:spPr>
+        <p:txBody>
+          <a:bodyPr rtlCol="0" anchor="ctr"/>
+          <a:lstStyle/>
+          <a:p>
+            <a:pPr algn="ctr"/>
+          </a:p>
+        </p:txBody>
+      </p:sp>
+      <p:sp>
+        <p:nvSpPr>
+          <p:cNvPr id="19" name="번호 3"/>
+          <p:cNvSpPr/>
+          <p:nvPr/>
+        </p:nvSpPr>
+        <p:spPr>
+          <a:xfrm>
+            <a:off x="8249716" y="1965960"/>
             <a:ext cx="457200" cy="457200"/>
           </a:xfrm>
           <a:prstGeom prst="ellipse">
             <a:avLst/>
           </a:prstGeom>
           <a:solidFill>
-            <a:srgbClr val="995229"/>
+            <a:srgbClr val="D89C79"/>
           </a:solidFill>
           <a:ln>
             <a:noFill/>
@@ -9235,7 +9850,7 @@
             <a:r>
               <a:rPr sz="1600" b="1" i="0">
                 <a:solidFill>
-                  <a:srgbClr val="FFFFFF"/>
+                  <a:srgbClr val="26231F"/>
                 </a:solidFill>
               </a:rPr>
               <a:t>3</a:t>
@@ -9245,14 +9860,14 @@
       </p:sp>
       <p:sp>
         <p:nvSpPr>
-          <p:cNvPr id="15" name="TextBox 14"/>
+          <p:cNvPr id="20" name="TextBox 19"/>
           <p:cNvSpPr txBox="1"/>
           <p:nvPr/>
         </p:nvSpPr>
         <p:spPr>
           <a:xfrm>
-            <a:off x="8143036" y="2331720"/>
-            <a:ext cx="3088538" cy="640080"/>
+            <a:off x="8203996" y="2560320"/>
+            <a:ext cx="3210458" cy="640080"/>
           </a:xfrm>
           <a:prstGeom prst="rect">
             <a:avLst/>
@@ -9273,7 +9888,7 @@
             <a:r>
               <a:rPr sz="1800" b="1" i="0">
                 <a:solidFill>
-                  <a:srgbClr val="492713"/>
+                  <a:srgbClr val="493427"/>
                 </a:solidFill>
               </a:rPr>
               <a:t>정리할 날짜</a:t>
@@ -9283,14 +9898,14 @@
       </p:sp>
       <p:sp>
         <p:nvSpPr>
-          <p:cNvPr id="16" name="TextBox 15"/>
+          <p:cNvPr id="21" name="TextBox 20"/>
           <p:cNvSpPr txBox="1"/>
           <p:nvPr/>
         </p:nvSpPr>
         <p:spPr>
           <a:xfrm>
-            <a:off x="8143036" y="3017520"/>
-            <a:ext cx="3088538" cy="2377439"/>
+            <a:off x="8203996" y="3246120"/>
+            <a:ext cx="3210458" cy="2148839"/>
           </a:xfrm>
           <a:prstGeom prst="rect">
             <a:avLst/>
@@ -9311,7 +9926,7 @@
             <a:r>
               <a:rPr sz="1500" b="0" i="0">
                 <a:solidFill>
-                  <a:srgbClr val="2B2B2B"/>
+                  <a:srgbClr val="26231F"/>
                 </a:solidFill>
               </a:rPr>
               <a:t>내용을 입력하세요</a:t>
@@ -9321,14 +9936,14 @@
       </p:sp>
       <p:sp>
         <p:nvSpPr>
-          <p:cNvPr id="17" name="안내 문구"/>
+          <p:cNvPr id="22" name="안내 문구"/>
           <p:cNvSpPr txBox="1"/>
           <p:nvPr/>
         </p:nvSpPr>
         <p:spPr>
           <a:xfrm>
-            <a:off x="822960" y="5623560"/>
-            <a:ext cx="10545775" cy="548640"/>
+            <a:off x="640080" y="5623560"/>
+            <a:ext cx="10911535" cy="548640"/>
           </a:xfrm>
           <a:prstGeom prst="rect">
             <a:avLst/>
@@ -9376,34 +9991,34 @@
         <a:sysClr val="window" lastClr="FFFFFF"/>
       </a:lt1>
       <a:dk2>
-        <a:srgbClr val="492713"/>
+        <a:srgbClr val="493427"/>
       </a:dk2>
       <a:lt2>
-        <a:srgbClr val="FBF3EF"/>
+        <a:srgbClr val="FBF2EC"/>
       </a:lt2>
       <a:accent1>
-        <a:srgbClr val="995229"/>
+        <a:srgbClr val="D89C79"/>
       </a:accent1>
       <a:accent2>
-        <a:srgbClr val="3B9185"/>
+        <a:srgbClr val="E1D598"/>
       </a:accent2>
       <a:accent3>
-        <a:srgbClr val="492713"/>
+        <a:srgbClr val="493427"/>
       </a:accent3>
       <a:accent4>
-        <a:srgbClr val="F4DBCD"/>
+        <a:srgbClr val="F6E1D5"/>
       </a:accent4>
       <a:accent5>
-        <a:srgbClr val="6A7257"/>
+        <a:srgbClr val="DCB888"/>
       </a:accent5>
       <a:accent6>
-        <a:srgbClr val="927D71"/>
+        <a:srgbClr val="92857D"/>
       </a:accent6>
       <a:hlink>
-        <a:srgbClr val="995229"/>
+        <a:srgbClr val="D89C79"/>
       </a:hlink>
       <a:folHlink>
-        <a:srgbClr val="492713"/>
+        <a:srgbClr val="493427"/>
       </a:folHlink>
     </a:clrScheme>
     <a:fontScheme name="Office">
